--- a/docs/presentation/adaptive_evidence_acquisition_grounded_videoqa_presentation.pptx
+++ b/docs/presentation/adaptive_evidence_acquisition_grounded_videoqa_presentation.pptx
@@ -3724,13 +3724,12 @@
           <a:p>
             <a:pPr algn="r"/>
             <a:r>
-              <a:rPr sz="850" b="0">
+              <a:rPr sz="750">
                 <a:solidFill>
-                  <a:srgbClr val="19375C"/>
+                  <a:srgbClr val="374151"/>
                 </a:solidFill>
-                <a:latin typeface="Aptos"/>
               </a:rPr>
-              <a:t>Final Presentation</a:t>
+              <a:t>Research Presentation</a:t>
             </a:r>
           </a:p>
         </p:txBody>
@@ -3766,21 +3765,44 @@
                     <a:bodyPr/>
                     <a:lstStyle/>
                     <a:p>
+                      <a:pPr algn="l"/>
+                      <a:r>
+                        <a:rPr sz="950" b="1">
+                          <a:solidFill>
+                            <a:srgbClr val="FFFFFF"/>
+                          </a:solidFill>
+                          <a:latin typeface="Aptos"/>
+                        </a:rPr>
+                        <a:t>Method</a:t>
+                      </a:r>
+                    </a:p>
+                  </a:txBody>
+                  <a:tcPr marL="54864" marR="54864" marT="27432" marB="27432" anchor="ctr">
+                    <a:solidFill>
+                      <a:srgbClr val="2F5E8D"/>
+                    </a:solidFill>
+                  </a:tcPr>
+                </a:tc>
+                <a:tc>
+                  <a:txBody>
+                    <a:bodyPr/>
+                    <a:lstStyle/>
+                    <a:p>
                       <a:pPr algn="ctr"/>
                       <a:r>
-                        <a:rPr sz="1200" b="1">
+                        <a:rPr sz="950" b="1">
                           <a:solidFill>
                             <a:srgbClr val="FFFFFF"/>
                           </a:solidFill>
                           <a:latin typeface="Aptos"/>
                         </a:rPr>
-                        <a:t>Method</a:t>
-                      </a:r>
-                    </a:p>
-                  </a:txBody>
-                  <a:tcPr>
-                    <a:solidFill>
-                      <a:srgbClr val="2A598F"/>
+                        <a:t>Acc@QA</a:t>
+                      </a:r>
+                    </a:p>
+                  </a:txBody>
+                  <a:tcPr marL="54864" marR="54864" marT="27432" marB="27432" anchor="ctr">
+                    <a:solidFill>
+                      <a:srgbClr val="2F5E8D"/>
                     </a:solidFill>
                   </a:tcPr>
                 </a:tc>
@@ -3791,19 +3813,19 @@
                     <a:p>
                       <a:pPr algn="ctr"/>
                       <a:r>
-                        <a:rPr sz="1200" b="1">
+                        <a:rPr sz="950" b="1">
                           <a:solidFill>
                             <a:srgbClr val="FFFFFF"/>
                           </a:solidFill>
                           <a:latin typeface="Aptos"/>
                         </a:rPr>
-                        <a:t>Acc@QA</a:t>
-                      </a:r>
-                    </a:p>
-                  </a:txBody>
-                  <a:tcPr>
-                    <a:solidFill>
-                      <a:srgbClr val="2A598F"/>
+                        <a:t>Cost</a:t>
+                      </a:r>
+                    </a:p>
+                  </a:txBody>
+                  <a:tcPr marL="54864" marR="54864" marT="27432" marB="27432" anchor="ctr">
+                    <a:solidFill>
+                      <a:srgbClr val="2F5E8D"/>
                     </a:solidFill>
                   </a:tcPr>
                 </a:tc>
@@ -3814,19 +3836,19 @@
                     <a:p>
                       <a:pPr algn="ctr"/>
                       <a:r>
-                        <a:rPr sz="1200" b="1">
+                        <a:rPr sz="950" b="1">
                           <a:solidFill>
                             <a:srgbClr val="FFFFFF"/>
                           </a:solidFill>
                           <a:latin typeface="Aptos"/>
                         </a:rPr>
-                        <a:t>Cost</a:t>
-                      </a:r>
-                    </a:p>
-                  </a:txBody>
-                  <a:tcPr>
-                    <a:solidFill>
-                      <a:srgbClr val="2A598F"/>
+                        <a:t>IoP@0.5</a:t>
+                      </a:r>
+                    </a:p>
+                  </a:txBody>
+                  <a:tcPr marL="54864" marR="54864" marT="27432" marB="27432" anchor="ctr">
+                    <a:solidFill>
+                      <a:srgbClr val="2F5E8D"/>
                     </a:solidFill>
                   </a:tcPr>
                 </a:tc>
@@ -3837,42 +3859,19 @@
                     <a:p>
                       <a:pPr algn="ctr"/>
                       <a:r>
-                        <a:rPr sz="1200" b="1">
+                        <a:rPr sz="950" b="1">
                           <a:solidFill>
                             <a:srgbClr val="FFFFFF"/>
                           </a:solidFill>
                           <a:latin typeface="Aptos"/>
                         </a:rPr>
-                        <a:t>IoP@0.5</a:t>
-                      </a:r>
-                    </a:p>
-                  </a:txBody>
-                  <a:tcPr>
-                    <a:solidFill>
-                      <a:srgbClr val="2A598F"/>
-                    </a:solidFill>
-                  </a:tcPr>
-                </a:tc>
-                <a:tc>
-                  <a:txBody>
-                    <a:bodyPr/>
-                    <a:lstStyle/>
-                    <a:p>
-                      <a:pPr algn="ctr"/>
-                      <a:r>
-                        <a:rPr sz="1200" b="1">
-                          <a:solidFill>
-                            <a:srgbClr val="FFFFFF"/>
-                          </a:solidFill>
-                          <a:latin typeface="Aptos"/>
-                        </a:rPr>
                         <a:t>Acc@GQA</a:t>
                       </a:r>
                     </a:p>
                   </a:txBody>
-                  <a:tcPr>
-                    <a:solidFill>
-                      <a:srgbClr val="2A598F"/>
+                  <a:tcPr marL="54864" marR="54864" marT="27432" marB="27432" anchor="ctr">
+                    <a:solidFill>
+                      <a:srgbClr val="2F5E8D"/>
                     </a:solidFill>
                   </a:tcPr>
                 </a:tc>
@@ -3885,9 +3884,9 @@
                     <a:p>
                       <a:pPr algn="l"/>
                       <a:r>
-                        <a:rPr sz="1200" b="0">
-                          <a:solidFill>
-                            <a:srgbClr val="14181F"/>
+                        <a:rPr sz="900" b="0">
+                          <a:solidFill>
+                            <a:srgbClr val="111827"/>
                           </a:solidFill>
                           <a:latin typeface="Aptos"/>
                         </a:rPr>
@@ -3895,7 +3894,7 @@
                       </a:r>
                     </a:p>
                   </a:txBody>
-                  <a:tcPr>
+                  <a:tcPr marL="54864" marR="54864" marT="27432" marB="27432" anchor="ctr">
                     <a:solidFill>
                       <a:srgbClr val="FFFFFF"/>
                     </a:solidFill>
@@ -3908,9 +3907,9 @@
                     <a:p>
                       <a:pPr algn="ctr"/>
                       <a:r>
-                        <a:rPr sz="1200" b="0">
-                          <a:solidFill>
-                            <a:srgbClr val="14181F"/>
+                        <a:rPr sz="900" b="0">
+                          <a:solidFill>
+                            <a:srgbClr val="111827"/>
                           </a:solidFill>
                           <a:latin typeface="Aptos"/>
                         </a:rPr>
@@ -3918,7 +3917,7 @@
                       </a:r>
                     </a:p>
                   </a:txBody>
-                  <a:tcPr>
+                  <a:tcPr marL="54864" marR="54864" marT="27432" marB="27432" anchor="ctr">
                     <a:solidFill>
                       <a:srgbClr val="FFFFFF"/>
                     </a:solidFill>
@@ -3931,9 +3930,9 @@
                     <a:p>
                       <a:pPr algn="ctr"/>
                       <a:r>
-                        <a:rPr sz="1200" b="0">
-                          <a:solidFill>
-                            <a:srgbClr val="14181F"/>
+                        <a:rPr sz="900" b="0">
+                          <a:solidFill>
+                            <a:srgbClr val="111827"/>
                           </a:solidFill>
                           <a:latin typeface="Aptos"/>
                         </a:rPr>
@@ -3941,7 +3940,7 @@
                       </a:r>
                     </a:p>
                   </a:txBody>
-                  <a:tcPr>
+                  <a:tcPr marL="54864" marR="54864" marT="27432" marB="27432" anchor="ctr">
                     <a:solidFill>
                       <a:srgbClr val="FFFFFF"/>
                     </a:solidFill>
@@ -3954,9 +3953,9 @@
                     <a:p>
                       <a:pPr algn="ctr"/>
                       <a:r>
-                        <a:rPr sz="1200" b="0">
-                          <a:solidFill>
-                            <a:srgbClr val="14181F"/>
+                        <a:rPr sz="900" b="0">
+                          <a:solidFill>
+                            <a:srgbClr val="111827"/>
                           </a:solidFill>
                           <a:latin typeface="Aptos"/>
                         </a:rPr>
@@ -3964,7 +3963,7 @@
                       </a:r>
                     </a:p>
                   </a:txBody>
-                  <a:tcPr>
+                  <a:tcPr marL="54864" marR="54864" marT="27432" marB="27432" anchor="ctr">
                     <a:solidFill>
                       <a:srgbClr val="FFFFFF"/>
                     </a:solidFill>
@@ -3977,9 +3976,9 @@
                     <a:p>
                       <a:pPr algn="ctr"/>
                       <a:r>
-                        <a:rPr sz="1200" b="0">
-                          <a:solidFill>
-                            <a:srgbClr val="14181F"/>
+                        <a:rPr sz="900" b="0">
+                          <a:solidFill>
+                            <a:srgbClr val="111827"/>
                           </a:solidFill>
                           <a:latin typeface="Aptos"/>
                         </a:rPr>
@@ -3987,7 +3986,7 @@
                       </a:r>
                     </a:p>
                   </a:txBody>
-                  <a:tcPr>
+                  <a:tcPr marL="54864" marR="54864" marT="27432" marB="27432" anchor="ctr">
                     <a:solidFill>
                       <a:srgbClr val="FFFFFF"/>
                     </a:solidFill>
@@ -4002,19 +4001,41 @@
                     <a:p>
                       <a:pPr algn="l"/>
                       <a:r>
-                        <a:rPr sz="1200" b="0">
-                          <a:solidFill>
-                            <a:srgbClr val="14181F"/>
+                        <a:rPr sz="900" b="0">
+                          <a:solidFill>
+                            <a:srgbClr val="111827"/>
+                          </a:solidFill>
+                        </a:rPr>
+                        <a:t>Linear policy, two items</a:t>
+                      </a:r>
+                    </a:p>
+                  </a:txBody>
+                  <a:tcPr marL="54864" marR="54864" marT="27432" marB="27432" anchor="ctr">
+                    <a:solidFill>
+                      <a:srgbClr val="F6F8FB"/>
+                    </a:solidFill>
+                  </a:tcPr>
+                </a:tc>
+                <a:tc>
+                  <a:txBody>
+                    <a:bodyPr/>
+                    <a:lstStyle/>
+                    <a:p>
+                      <a:pPr algn="ctr"/>
+                      <a:r>
+                        <a:rPr sz="900" b="0">
+                          <a:solidFill>
+                            <a:srgbClr val="111827"/>
                           </a:solidFill>
                           <a:latin typeface="Aptos"/>
                         </a:rPr>
-                        <a:t>Linear two-item</a:t>
-                      </a:r>
-                    </a:p>
-                  </a:txBody>
-                  <a:tcPr>
-                    <a:solidFill>
-                      <a:srgbClr val="EBF4F1"/>
+                        <a:t>0.381</a:t>
+                      </a:r>
+                    </a:p>
+                  </a:txBody>
+                  <a:tcPr marL="54864" marR="54864" marT="27432" marB="27432" anchor="ctr">
+                    <a:solidFill>
+                      <a:srgbClr val="F6F8FB"/>
                     </a:solidFill>
                   </a:tcPr>
                 </a:tc>
@@ -4025,19 +4046,19 @@
                     <a:p>
                       <a:pPr algn="ctr"/>
                       <a:r>
-                        <a:rPr sz="1200" b="0">
-                          <a:solidFill>
-                            <a:srgbClr val="14181F"/>
+                        <a:rPr sz="900" b="0">
+                          <a:solidFill>
+                            <a:srgbClr val="111827"/>
                           </a:solidFill>
                           <a:latin typeface="Aptos"/>
                         </a:rPr>
-                        <a:t>0.381</a:t>
-                      </a:r>
-                    </a:p>
-                  </a:txBody>
-                  <a:tcPr>
-                    <a:solidFill>
-                      <a:srgbClr val="EBF4F1"/>
+                        <a:t>2.795</a:t>
+                      </a:r>
+                    </a:p>
+                  </a:txBody>
+                  <a:tcPr marL="54864" marR="54864" marT="27432" marB="27432" anchor="ctr">
+                    <a:solidFill>
+                      <a:srgbClr val="F6F8FB"/>
                     </a:solidFill>
                   </a:tcPr>
                 </a:tc>
@@ -4048,19 +4069,19 @@
                     <a:p>
                       <a:pPr algn="ctr"/>
                       <a:r>
-                        <a:rPr sz="1200" b="0">
-                          <a:solidFill>
-                            <a:srgbClr val="14181F"/>
+                        <a:rPr sz="900" b="0">
+                          <a:solidFill>
+                            <a:srgbClr val="111827"/>
                           </a:solidFill>
                           <a:latin typeface="Aptos"/>
                         </a:rPr>
-                        <a:t>2.795</a:t>
-                      </a:r>
-                    </a:p>
-                  </a:txBody>
-                  <a:tcPr>
-                    <a:solidFill>
-                      <a:srgbClr val="EBF4F1"/>
+                        <a:t>0.410</a:t>
+                      </a:r>
+                    </a:p>
+                  </a:txBody>
+                  <a:tcPr marL="54864" marR="54864" marT="27432" marB="27432" anchor="ctr">
+                    <a:solidFill>
+                      <a:srgbClr val="F6F8FB"/>
                     </a:solidFill>
                   </a:tcPr>
                 </a:tc>
@@ -4071,42 +4092,19 @@
                     <a:p>
                       <a:pPr algn="ctr"/>
                       <a:r>
-                        <a:rPr sz="1200" b="0">
-                          <a:solidFill>
-                            <a:srgbClr val="14181F"/>
+                        <a:rPr sz="900" b="0">
+                          <a:solidFill>
+                            <a:srgbClr val="111827"/>
                           </a:solidFill>
                           <a:latin typeface="Aptos"/>
                         </a:rPr>
-                        <a:t>0.410</a:t>
-                      </a:r>
-                    </a:p>
-                  </a:txBody>
-                  <a:tcPr>
-                    <a:solidFill>
-                      <a:srgbClr val="EBF4F1"/>
-                    </a:solidFill>
-                  </a:tcPr>
-                </a:tc>
-                <a:tc>
-                  <a:txBody>
-                    <a:bodyPr/>
-                    <a:lstStyle/>
-                    <a:p>
-                      <a:pPr algn="ctr"/>
-                      <a:r>
-                        <a:rPr sz="1200" b="0">
-                          <a:solidFill>
-                            <a:srgbClr val="14181F"/>
-                          </a:solidFill>
-                          <a:latin typeface="Aptos"/>
-                        </a:rPr>
                         <a:t>0.164</a:t>
                       </a:r>
                     </a:p>
                   </a:txBody>
-                  <a:tcPr>
-                    <a:solidFill>
-                      <a:srgbClr val="EBF4F1"/>
+                  <a:tcPr marL="54864" marR="54864" marT="27432" marB="27432" anchor="ctr">
+                    <a:solidFill>
+                      <a:srgbClr val="F6F8FB"/>
                     </a:solidFill>
                   </a:tcPr>
                 </a:tc>
@@ -4119,19 +4117,41 @@
                     <a:p>
                       <a:pPr algn="l"/>
                       <a:r>
-                        <a:rPr sz="1200" b="0">
-                          <a:solidFill>
-                            <a:srgbClr val="14181F"/>
+                        <a:rPr sz="900" b="0">
+                          <a:solidFill>
+                            <a:srgbClr val="111827"/>
+                          </a:solidFill>
+                        </a:rPr>
+                        <a:t>Fixed 3 frames + 3 segments</a:t>
+                      </a:r>
+                    </a:p>
+                  </a:txBody>
+                  <a:tcPr marL="54864" marR="54864" marT="27432" marB="27432" anchor="ctr">
+                    <a:solidFill>
+                      <a:srgbClr val="FFFFFF"/>
+                    </a:solidFill>
+                  </a:tcPr>
+                </a:tc>
+                <a:tc>
+                  <a:txBody>
+                    <a:bodyPr/>
+                    <a:lstStyle/>
+                    <a:p>
+                      <a:pPr algn="ctr"/>
+                      <a:r>
+                        <a:rPr sz="900" b="0">
+                          <a:solidFill>
+                            <a:srgbClr val="111827"/>
                           </a:solidFill>
                           <a:latin typeface="Aptos"/>
                         </a:rPr>
-                        <a:t>Fixed 3+3</a:t>
-                      </a:r>
-                    </a:p>
-                  </a:txBody>
-                  <a:tcPr>
-                    <a:solidFill>
-                      <a:srgbClr val="EBF4F1"/>
+                        <a:t>0.388</a:t>
+                      </a:r>
+                    </a:p>
+                  </a:txBody>
+                  <a:tcPr marL="54864" marR="54864" marT="27432" marB="27432" anchor="ctr">
+                    <a:solidFill>
+                      <a:srgbClr val="FFFFFF"/>
                     </a:solidFill>
                   </a:tcPr>
                 </a:tc>
@@ -4142,19 +4162,19 @@
                     <a:p>
                       <a:pPr algn="ctr"/>
                       <a:r>
-                        <a:rPr sz="1200" b="0">
-                          <a:solidFill>
-                            <a:srgbClr val="14181F"/>
+                        <a:rPr sz="900" b="0">
+                          <a:solidFill>
+                            <a:srgbClr val="111827"/>
                           </a:solidFill>
                           <a:latin typeface="Aptos"/>
                         </a:rPr>
-                        <a:t>0.388</a:t>
-                      </a:r>
-                    </a:p>
-                  </a:txBody>
-                  <a:tcPr>
-                    <a:solidFill>
-                      <a:srgbClr val="EBF4F1"/>
+                        <a:t>7.500</a:t>
+                      </a:r>
+                    </a:p>
+                  </a:txBody>
+                  <a:tcPr marL="54864" marR="54864" marT="27432" marB="27432" anchor="ctr">
+                    <a:solidFill>
+                      <a:srgbClr val="FFFFFF"/>
                     </a:solidFill>
                   </a:tcPr>
                 </a:tc>
@@ -4165,19 +4185,19 @@
                     <a:p>
                       <a:pPr algn="ctr"/>
                       <a:r>
-                        <a:rPr sz="1200" b="0">
-                          <a:solidFill>
-                            <a:srgbClr val="14181F"/>
+                        <a:rPr sz="900" b="0">
+                          <a:solidFill>
+                            <a:srgbClr val="111827"/>
                           </a:solidFill>
                           <a:latin typeface="Aptos"/>
                         </a:rPr>
-                        <a:t>7.500</a:t>
-                      </a:r>
-                    </a:p>
-                  </a:txBody>
-                  <a:tcPr>
-                    <a:solidFill>
-                      <a:srgbClr val="EBF4F1"/>
+                        <a:t>0.615</a:t>
+                      </a:r>
+                    </a:p>
+                  </a:txBody>
+                  <a:tcPr marL="54864" marR="54864" marT="27432" marB="27432" anchor="ctr">
+                    <a:solidFill>
+                      <a:srgbClr val="FFFFFF"/>
                     </a:solidFill>
                   </a:tcPr>
                 </a:tc>
@@ -4188,42 +4208,19 @@
                     <a:p>
                       <a:pPr algn="ctr"/>
                       <a:r>
-                        <a:rPr sz="1200" b="0">
-                          <a:solidFill>
-                            <a:srgbClr val="14181F"/>
+                        <a:rPr sz="900" b="0">
+                          <a:solidFill>
+                            <a:srgbClr val="111827"/>
                           </a:solidFill>
                           <a:latin typeface="Aptos"/>
                         </a:rPr>
-                        <a:t>0.615</a:t>
-                      </a:r>
-                    </a:p>
-                  </a:txBody>
-                  <a:tcPr>
-                    <a:solidFill>
-                      <a:srgbClr val="EBF4F1"/>
-                    </a:solidFill>
-                  </a:tcPr>
-                </a:tc>
-                <a:tc>
-                  <a:txBody>
-                    <a:bodyPr/>
-                    <a:lstStyle/>
-                    <a:p>
-                      <a:pPr algn="ctr"/>
-                      <a:r>
-                        <a:rPr sz="1200" b="0">
-                          <a:solidFill>
-                            <a:srgbClr val="14181F"/>
-                          </a:solidFill>
-                          <a:latin typeface="Aptos"/>
-                        </a:rPr>
                         <a:t>0.245</a:t>
                       </a:r>
                     </a:p>
                   </a:txBody>
-                  <a:tcPr>
-                    <a:solidFill>
-                      <a:srgbClr val="EBF4F1"/>
+                  <a:tcPr marL="54864" marR="54864" marT="27432" marB="27432" anchor="ctr">
+                    <a:solidFill>
+                      <a:srgbClr val="FFFFFF"/>
                     </a:solidFill>
                   </a:tcPr>
                 </a:tc>
@@ -4236,19 +4233,41 @@
                     <a:p>
                       <a:pPr algn="l"/>
                       <a:r>
-                        <a:rPr sz="1200" b="0">
-                          <a:solidFill>
-                            <a:srgbClr val="14181F"/>
+                        <a:rPr sz="900" b="0">
+                          <a:solidFill>
+                            <a:srgbClr val="111827"/>
+                          </a:solidFill>
+                        </a:rPr>
+                        <a:t>Fixed 6 frames + 6 segments</a:t>
+                      </a:r>
+                    </a:p>
+                  </a:txBody>
+                  <a:tcPr marL="54864" marR="54864" marT="27432" marB="27432" anchor="ctr">
+                    <a:solidFill>
+                      <a:srgbClr val="F6F8FB"/>
+                    </a:solidFill>
+                  </a:tcPr>
+                </a:tc>
+                <a:tc>
+                  <a:txBody>
+                    <a:bodyPr/>
+                    <a:lstStyle/>
+                    <a:p>
+                      <a:pPr algn="ctr"/>
+                      <a:r>
+                        <a:rPr sz="900" b="0">
+                          <a:solidFill>
+                            <a:srgbClr val="111827"/>
                           </a:solidFill>
                           <a:latin typeface="Aptos"/>
                         </a:rPr>
-                        <a:t>Fixed 6+6</a:t>
-                      </a:r>
-                    </a:p>
-                  </a:txBody>
-                  <a:tcPr>
-                    <a:solidFill>
-                      <a:srgbClr val="EBF4F1"/>
+                        <a:t>0.394</a:t>
+                      </a:r>
+                    </a:p>
+                  </a:txBody>
+                  <a:tcPr marL="54864" marR="54864" marT="27432" marB="27432" anchor="ctr">
+                    <a:solidFill>
+                      <a:srgbClr val="F6F8FB"/>
                     </a:solidFill>
                   </a:tcPr>
                 </a:tc>
@@ -4259,19 +4278,19 @@
                     <a:p>
                       <a:pPr algn="ctr"/>
                       <a:r>
-                        <a:rPr sz="1200" b="0">
-                          <a:solidFill>
-                            <a:srgbClr val="14181F"/>
+                        <a:rPr sz="900" b="0">
+                          <a:solidFill>
+                            <a:srgbClr val="111827"/>
                           </a:solidFill>
                           <a:latin typeface="Aptos"/>
                         </a:rPr>
-                        <a:t>0.394</a:t>
-                      </a:r>
-                    </a:p>
-                  </a:txBody>
-                  <a:tcPr>
-                    <a:solidFill>
-                      <a:srgbClr val="EBF4F1"/>
+                        <a:t>14.908</a:t>
+                      </a:r>
+                    </a:p>
+                  </a:txBody>
+                  <a:tcPr marL="54864" marR="54864" marT="27432" marB="27432" anchor="ctr">
+                    <a:solidFill>
+                      <a:srgbClr val="F6F8FB"/>
                     </a:solidFill>
                   </a:tcPr>
                 </a:tc>
@@ -4282,19 +4301,19 @@
                     <a:p>
                       <a:pPr algn="ctr"/>
                       <a:r>
-                        <a:rPr sz="1200" b="0">
-                          <a:solidFill>
-                            <a:srgbClr val="14181F"/>
+                        <a:rPr sz="900" b="0">
+                          <a:solidFill>
+                            <a:srgbClr val="111827"/>
                           </a:solidFill>
                           <a:latin typeface="Aptos"/>
                         </a:rPr>
-                        <a:t>14.908</a:t>
-                      </a:r>
-                    </a:p>
-                  </a:txBody>
-                  <a:tcPr>
-                    <a:solidFill>
-                      <a:srgbClr val="EBF4F1"/>
+                        <a:t>0.787</a:t>
+                      </a:r>
+                    </a:p>
+                  </a:txBody>
+                  <a:tcPr marL="54864" marR="54864" marT="27432" marB="27432" anchor="ctr">
+                    <a:solidFill>
+                      <a:srgbClr val="F6F8FB"/>
                     </a:solidFill>
                   </a:tcPr>
                 </a:tc>
@@ -4305,42 +4324,19 @@
                     <a:p>
                       <a:pPr algn="ctr"/>
                       <a:r>
-                        <a:rPr sz="1200" b="0">
-                          <a:solidFill>
-                            <a:srgbClr val="14181F"/>
+                        <a:rPr sz="900" b="0">
+                          <a:solidFill>
+                            <a:srgbClr val="111827"/>
                           </a:solidFill>
                           <a:latin typeface="Aptos"/>
                         </a:rPr>
-                        <a:t>0.787</a:t>
-                      </a:r>
-                    </a:p>
-                  </a:txBody>
-                  <a:tcPr>
-                    <a:solidFill>
-                      <a:srgbClr val="EBF4F1"/>
-                    </a:solidFill>
-                  </a:tcPr>
-                </a:tc>
-                <a:tc>
-                  <a:txBody>
-                    <a:bodyPr/>
-                    <a:lstStyle/>
-                    <a:p>
-                      <a:pPr algn="ctr"/>
-                      <a:r>
-                        <a:rPr sz="1200" b="0">
-                          <a:solidFill>
-                            <a:srgbClr val="14181F"/>
-                          </a:solidFill>
-                          <a:latin typeface="Aptos"/>
-                        </a:rPr>
                         <a:t>0.316</a:t>
                       </a:r>
                     </a:p>
                   </a:txBody>
-                  <a:tcPr>
-                    <a:solidFill>
-                      <a:srgbClr val="EBF4F1"/>
+                  <a:tcPr marL="54864" marR="54864" marT="27432" marB="27432" anchor="ctr">
+                    <a:solidFill>
+                      <a:srgbClr val="F6F8FB"/>
                     </a:solidFill>
                   </a:tcPr>
                 </a:tc>
@@ -4451,13 +4447,8 @@
           <a:lstStyle/>
           <a:p>
             <a:r>
-              <a:rPr sz="1800" b="0">
-                <a:solidFill>
-                  <a:srgbClr val="14181F"/>
-                </a:solidFill>
-                <a:latin typeface="Aptos"/>
-              </a:rPr>
-              <a:t>Grounding improves as evidence budget increases, but answer accuracy remains near 0.38.</a:t>
+              <a:rPr sz="1100"/>
+              <a:t>Temporal coverage improves as evidence budget increases, but answer accuracy remains near 0.38-0.39.</a:t>
             </a:r>
           </a:p>
         </p:txBody>
@@ -4564,13 +4555,8 @@
           <a:lstStyle/>
           <a:p>
             <a:r>
-              <a:rPr sz="1800" b="0">
-                <a:solidFill>
-                  <a:srgbClr val="14181F"/>
-                </a:solidFill>
-                <a:latin typeface="Aptos"/>
-              </a:rPr>
-              <a:t>A weak answerer hides evidence-policy improvements in the answer metric.</a:t>
+              <a:rPr sz="1100"/>
+              <a:t>A weak answerer can hide evidence-selection improvements in the answer metric.</a:t>
             </a:r>
           </a:p>
         </p:txBody>
@@ -4814,28 +4800,400 @@
           <a:p>
             <a:pPr algn="r"/>
             <a:r>
-              <a:rPr sz="850" b="0">
+              <a:rPr sz="750">
                 <a:solidFill>
-                  <a:srgbClr val="19375C"/>
+                  <a:srgbClr val="374151"/>
                 </a:solidFill>
-                <a:latin typeface="Aptos"/>
               </a:rPr>
-              <a:t>Final Presentation</a:t>
+              <a:t>Research Presentation</a:t>
+            </a:r>
+          </a:p>
+        </p:txBody>
+      </p:sp>
+      <p:sp>
+        <p:nvSpPr>
+          <p:cNvPr id="9" name="Rectangle 8"/>
+          <p:cNvSpPr/>
+          <p:nvPr/>
+        </p:nvSpPr>
+        <p:spPr>
+          <a:xfrm>
+            <a:off x="914400" y="3657600"/>
+            <a:ext cx="3383280" cy="868680"/>
+          </a:xfrm>
+          <a:prstGeom prst="rect">
+            <a:avLst/>
+          </a:prstGeom>
+          <a:solidFill>
+            <a:srgbClr val="F8FAFC"/>
+          </a:solidFill>
+          <a:ln w="17780">
+            <a:solidFill>
+              <a:srgbClr val="3B8B74"/>
+            </a:solidFill>
+          </a:ln>
+        </p:spPr>
+        <p:style>
+          <a:lnRef idx="1">
+            <a:schemeClr val="accent1"/>
+          </a:lnRef>
+          <a:fillRef idx="3">
+            <a:schemeClr val="accent1"/>
+          </a:fillRef>
+          <a:effectRef idx="2">
+            <a:schemeClr val="accent1"/>
+          </a:effectRef>
+          <a:fontRef idx="minor">
+            <a:schemeClr val="lt1"/>
+          </a:fontRef>
+        </p:style>
+        <p:txBody>
+          <a:bodyPr rtlCol="0" anchor="ctr"/>
+          <a:lstStyle/>
+          <a:p>
+            <a:pPr algn="ctr"/>
+          </a:p>
+        </p:txBody>
+      </p:sp>
+      <p:sp>
+        <p:nvSpPr>
+          <p:cNvPr id="10" name="TextBox 9"/>
+          <p:cNvSpPr txBox="1"/>
+          <p:nvPr/>
+        </p:nvSpPr>
+        <p:spPr>
+          <a:xfrm>
+            <a:off x="996695" y="3785615"/>
+            <a:ext cx="3218688" cy="256032"/>
+          </a:xfrm>
+          <a:prstGeom prst="rect">
+            <a:avLst/>
+          </a:prstGeom>
+          <a:noFill/>
+        </p:spPr>
+        <p:txBody>
+          <a:bodyPr wrap="square">
+            <a:normAutofit/>
+          </a:bodyPr>
+          <a:lstStyle/>
+          <a:p>
+            <a:pPr algn="ctr"/>
+            <a:r>
+              <a:rPr sz="1050" b="1">
+                <a:solidFill>
+                  <a:srgbClr val="2F5E8D"/>
+                </a:solidFill>
+              </a:rPr>
+              <a:t>Answer retained</a:t>
+            </a:r>
+          </a:p>
+        </p:txBody>
+      </p:sp>
+      <p:sp>
+        <p:nvSpPr>
+          <p:cNvPr id="11" name="TextBox 10"/>
+          <p:cNvSpPr txBox="1"/>
+          <p:nvPr/>
+        </p:nvSpPr>
+        <p:spPr>
+          <a:xfrm>
+            <a:off x="996695" y="4059936"/>
+            <a:ext cx="3218688" cy="329184"/>
+          </a:xfrm>
+          <a:prstGeom prst="rect">
+            <a:avLst/>
+          </a:prstGeom>
+          <a:noFill/>
+        </p:spPr>
+        <p:txBody>
+          <a:bodyPr wrap="square">
+            <a:normAutofit/>
+          </a:bodyPr>
+          <a:lstStyle/>
+          <a:p>
+            <a:pPr algn="ctr"/>
+            <a:r>
+              <a:rPr sz="1800" b="1">
+                <a:solidFill>
+                  <a:srgbClr val="3F927D"/>
+                </a:solidFill>
+              </a:rPr>
+              <a:t>95%</a:t>
+            </a:r>
+          </a:p>
+        </p:txBody>
+      </p:sp>
+      <p:sp>
+        <p:nvSpPr>
+          <p:cNvPr id="12" name="Rectangle 11"/>
+          <p:cNvSpPr/>
+          <p:nvPr/>
+        </p:nvSpPr>
+        <p:spPr>
+          <a:xfrm>
+            <a:off x="4389120" y="3657600"/>
+            <a:ext cx="3383280" cy="868680"/>
+          </a:xfrm>
+          <a:prstGeom prst="rect">
+            <a:avLst/>
+          </a:prstGeom>
+          <a:solidFill>
+            <a:srgbClr val="F8FAFC"/>
+          </a:solidFill>
+          <a:ln w="17780">
+            <a:solidFill>
+              <a:srgbClr val="2A598F"/>
+            </a:solidFill>
+          </a:ln>
+        </p:spPr>
+        <p:style>
+          <a:lnRef idx="1">
+            <a:schemeClr val="accent1"/>
+          </a:lnRef>
+          <a:fillRef idx="3">
+            <a:schemeClr val="accent1"/>
+          </a:fillRef>
+          <a:effectRef idx="2">
+            <a:schemeClr val="accent1"/>
+          </a:effectRef>
+          <a:fontRef idx="minor">
+            <a:schemeClr val="lt1"/>
+          </a:fontRef>
+        </p:style>
+        <p:txBody>
+          <a:bodyPr rtlCol="0" anchor="ctr"/>
+          <a:lstStyle/>
+          <a:p>
+            <a:pPr algn="ctr"/>
+          </a:p>
+        </p:txBody>
+      </p:sp>
+      <p:sp>
+        <p:nvSpPr>
+          <p:cNvPr id="13" name="TextBox 12"/>
+          <p:cNvSpPr txBox="1"/>
+          <p:nvPr/>
+        </p:nvSpPr>
+        <p:spPr>
+          <a:xfrm>
+            <a:off x="4471416" y="3785615"/>
+            <a:ext cx="3218688" cy="256032"/>
+          </a:xfrm>
+          <a:prstGeom prst="rect">
+            <a:avLst/>
+          </a:prstGeom>
+          <a:noFill/>
+        </p:spPr>
+        <p:txBody>
+          <a:bodyPr wrap="square">
+            <a:normAutofit/>
+          </a:bodyPr>
+          <a:lstStyle/>
+          <a:p>
+            <a:pPr algn="ctr"/>
+            <a:r>
+              <a:rPr sz="1050" b="1">
+                <a:solidFill>
+                  <a:srgbClr val="2F5E8D"/>
+                </a:solidFill>
+              </a:rPr>
+              <a:t>Cost used</a:t>
+            </a:r>
+          </a:p>
+        </p:txBody>
+      </p:sp>
+      <p:sp>
+        <p:nvSpPr>
+          <p:cNvPr id="14" name="TextBox 13"/>
+          <p:cNvSpPr txBox="1"/>
+          <p:nvPr/>
+        </p:nvSpPr>
+        <p:spPr>
+          <a:xfrm>
+            <a:off x="4471416" y="4059936"/>
+            <a:ext cx="3218688" cy="329184"/>
+          </a:xfrm>
+          <a:prstGeom prst="rect">
+            <a:avLst/>
+          </a:prstGeom>
+          <a:noFill/>
+        </p:spPr>
+        <p:txBody>
+          <a:bodyPr wrap="square">
+            <a:normAutofit/>
+          </a:bodyPr>
+          <a:lstStyle/>
+          <a:p>
+            <a:pPr algn="ctr"/>
+            <a:r>
+              <a:rPr sz="1800" b="1">
+                <a:solidFill>
+                  <a:srgbClr val="3F927D"/>
+                </a:solidFill>
+              </a:rPr>
+              <a:t>39%</a:t>
+            </a:r>
+          </a:p>
+        </p:txBody>
+      </p:sp>
+      <p:sp>
+        <p:nvSpPr>
+          <p:cNvPr id="15" name="Rectangle 14"/>
+          <p:cNvSpPr/>
+          <p:nvPr/>
+        </p:nvSpPr>
+        <p:spPr>
+          <a:xfrm>
+            <a:off x="7863840" y="3657600"/>
+            <a:ext cx="3383280" cy="868680"/>
+          </a:xfrm>
+          <a:prstGeom prst="rect">
+            <a:avLst/>
+          </a:prstGeom>
+          <a:solidFill>
+            <a:srgbClr val="F8FAFC"/>
+          </a:solidFill>
+          <a:ln w="17780">
+            <a:solidFill>
+              <a:srgbClr val="B08400"/>
+            </a:solidFill>
+          </a:ln>
+        </p:spPr>
+        <p:style>
+          <a:lnRef idx="1">
+            <a:schemeClr val="accent1"/>
+          </a:lnRef>
+          <a:fillRef idx="3">
+            <a:schemeClr val="accent1"/>
+          </a:fillRef>
+          <a:effectRef idx="2">
+            <a:schemeClr val="accent1"/>
+          </a:effectRef>
+          <a:fontRef idx="minor">
+            <a:schemeClr val="lt1"/>
+          </a:fontRef>
+        </p:style>
+        <p:txBody>
+          <a:bodyPr rtlCol="0" anchor="ctr"/>
+          <a:lstStyle/>
+          <a:p>
+            <a:pPr algn="ctr"/>
+          </a:p>
+        </p:txBody>
+      </p:sp>
+      <p:sp>
+        <p:nvSpPr>
+          <p:cNvPr id="16" name="TextBox 15"/>
+          <p:cNvSpPr txBox="1"/>
+          <p:nvPr/>
+        </p:nvSpPr>
+        <p:spPr>
+          <a:xfrm>
+            <a:off x="7946136" y="3785615"/>
+            <a:ext cx="3218688" cy="256032"/>
+          </a:xfrm>
+          <a:prstGeom prst="rect">
+            <a:avLst/>
+          </a:prstGeom>
+          <a:noFill/>
+        </p:spPr>
+        <p:txBody>
+          <a:bodyPr wrap="square">
+            <a:normAutofit/>
+          </a:bodyPr>
+          <a:lstStyle/>
+          <a:p>
+            <a:pPr algn="ctr"/>
+            <a:r>
+              <a:rPr sz="1050" b="1">
+                <a:solidFill>
+                  <a:srgbClr val="2F5E8D"/>
+                </a:solidFill>
+              </a:rPr>
+              <a:t>Acc@GQA retained</a:t>
+            </a:r>
+          </a:p>
+        </p:txBody>
+      </p:sp>
+      <p:sp>
+        <p:nvSpPr>
+          <p:cNvPr id="17" name="TextBox 16"/>
+          <p:cNvSpPr txBox="1"/>
+          <p:nvPr/>
+        </p:nvSpPr>
+        <p:spPr>
+          <a:xfrm>
+            <a:off x="7946136" y="4059936"/>
+            <a:ext cx="3218688" cy="329184"/>
+          </a:xfrm>
+          <a:prstGeom prst="rect">
+            <a:avLst/>
+          </a:prstGeom>
+          <a:noFill/>
+        </p:spPr>
+        <p:txBody>
+          <a:bodyPr wrap="square">
+            <a:normAutofit/>
+          </a:bodyPr>
+          <a:lstStyle/>
+          <a:p>
+            <a:pPr algn="ctr"/>
+            <a:r>
+              <a:rPr sz="1800" b="1">
+                <a:solidFill>
+                  <a:srgbClr val="3F927D"/>
+                </a:solidFill>
+              </a:rPr>
+              <a:t>71%</a:t>
+            </a:r>
+          </a:p>
+        </p:txBody>
+      </p:sp>
+      <p:sp>
+        <p:nvSpPr>
+          <p:cNvPr id="18" name="TextBox 17"/>
+          <p:cNvSpPr txBox="1"/>
+          <p:nvPr/>
+        </p:nvSpPr>
+        <p:spPr>
+          <a:xfrm>
+            <a:off x="1005840" y="5074920"/>
+            <a:ext cx="10149840" cy="640080"/>
+          </a:xfrm>
+          <a:prstGeom prst="rect">
+            <a:avLst/>
+          </a:prstGeom>
+          <a:noFill/>
+        </p:spPr>
+        <p:txBody>
+          <a:bodyPr wrap="square">
+            <a:normAutofit/>
+          </a:bodyPr>
+          <a:lstStyle/>
+          <a:p>
+            <a:pPr algn="ctr"/>
+            <a:r>
+              <a:rPr sz="1300" b="0">
+                <a:solidFill>
+                  <a:srgbClr val="111827"/>
+                </a:solidFill>
+              </a:rPr>
+              <a:t>MLP+NMS is the strongest learned grounded selector; temporal supervision is cheaper but under-covers by IoU, and oracle top-2 shows routing headroom.</a:t>
             </a:r>
           </a:p>
         </p:txBody>
       </p:sp>
       <p:graphicFrame>
         <p:nvGraphicFramePr>
-          <p:cNvPr id="8" name="Table 7"/>
+          <p:cNvPr id="19" name="Table 18"/>
           <p:cNvGraphicFramePr>
             <a:graphicFrameLocks noGrp="1"/>
           </p:cNvGraphicFramePr>
           <p:nvPr/>
         </p:nvGraphicFramePr>
         <p:xfrm>
-          <a:off x="685800" y="868680"/>
-          <a:ext cx="10835640" cy="2148840"/>
+          <a:off x="502920" y="685800"/>
+          <a:ext cx="11201398" cy="3108960"/>
         </p:xfrm>
         <a:graphic>
           <a:graphicData uri="http://schemas.openxmlformats.org/drawingml/2006/table">
@@ -4844,13 +5202,36 @@
                 <a:tableStyleId>{5C22544A-7EE6-4342-B048-85BDC9FD1C3A}</a:tableStyleId>
               </a:tblPr>
               <a:tblGrid>
-                <a:gridCol w="2167128"/>
-                <a:gridCol w="2167128"/>
-                <a:gridCol w="2167128"/>
-                <a:gridCol w="2167128"/>
-                <a:gridCol w="2167128"/>
+                <a:gridCol w="3920490"/>
+                <a:gridCol w="1400175"/>
+                <a:gridCol w="1306829"/>
+                <a:gridCol w="1586865"/>
+                <a:gridCol w="1306829"/>
+                <a:gridCol w="1680210"/>
               </a:tblGrid>
-              <a:tr h="537210">
+              <a:tr h="388620">
+                <a:tc>
+                  <a:txBody>
+                    <a:bodyPr/>
+                    <a:lstStyle/>
+                    <a:p>
+                      <a:pPr algn="l"/>
+                      <a:r>
+                        <a:rPr sz="780" b="1">
+                          <a:solidFill>
+                            <a:srgbClr val="FFFFFF"/>
+                          </a:solidFill>
+                        </a:rPr>
+                        <a:t>Method</a:t>
+                      </a:r>
+                    </a:p>
+                  </a:txBody>
+                  <a:tcPr marL="54864" marR="54864" marT="27432" marB="27432" anchor="ctr">
+                    <a:solidFill>
+                      <a:srgbClr val="2F5E8D"/>
+                    </a:solidFill>
+                  </a:tcPr>
+                </a:tc>
                 <a:tc>
                   <a:txBody>
                     <a:bodyPr/>
@@ -4858,19 +5239,18 @@
                     <a:p>
                       <a:pPr algn="ctr"/>
                       <a:r>
-                        <a:rPr sz="1300" b="1">
+                        <a:rPr sz="780" b="1">
                           <a:solidFill>
                             <a:srgbClr val="FFFFFF"/>
                           </a:solidFill>
-                          <a:latin typeface="Aptos"/>
-                        </a:rPr>
-                        <a:t>Method</a:t>
-                      </a:r>
-                    </a:p>
-                  </a:txBody>
-                  <a:tcPr>
-                    <a:solidFill>
-                      <a:srgbClr val="2A598F"/>
+                        </a:rPr>
+                        <a:t>Acc@QA</a:t>
+                      </a:r>
+                    </a:p>
+                  </a:txBody>
+                  <a:tcPr marL="54864" marR="54864" marT="27432" marB="27432" anchor="ctr">
+                    <a:solidFill>
+                      <a:srgbClr val="2F5E8D"/>
                     </a:solidFill>
                   </a:tcPr>
                 </a:tc>
@@ -4881,19 +5261,18 @@
                     <a:p>
                       <a:pPr algn="ctr"/>
                       <a:r>
-                        <a:rPr sz="1300" b="1">
+                        <a:rPr sz="780" b="1">
                           <a:solidFill>
                             <a:srgbClr val="FFFFFF"/>
                           </a:solidFill>
-                          <a:latin typeface="Aptos"/>
-                        </a:rPr>
-                        <a:t>Acc@QA</a:t>
-                      </a:r>
-                    </a:p>
-                  </a:txBody>
-                  <a:tcPr>
-                    <a:solidFill>
-                      <a:srgbClr val="2A598F"/>
+                        </a:rPr>
+                        <a:t>Cost</a:t>
+                      </a:r>
+                    </a:p>
+                  </a:txBody>
+                  <a:tcPr marL="54864" marR="54864" marT="27432" marB="27432" anchor="ctr">
+                    <a:solidFill>
+                      <a:srgbClr val="2F5E8D"/>
                     </a:solidFill>
                   </a:tcPr>
                 </a:tc>
@@ -4904,19 +5283,18 @@
                     <a:p>
                       <a:pPr algn="ctr"/>
                       <a:r>
-                        <a:rPr sz="1300" b="1">
+                        <a:rPr sz="780" b="1">
                           <a:solidFill>
                             <a:srgbClr val="FFFFFF"/>
                           </a:solidFill>
-                          <a:latin typeface="Aptos"/>
-                        </a:rPr>
-                        <a:t>Cost</a:t>
-                      </a:r>
-                    </a:p>
-                  </a:txBody>
-                  <a:tcPr>
-                    <a:solidFill>
-                      <a:srgbClr val="2A598F"/>
+                        </a:rPr>
+                        <a:t>IoP@0.5</a:t>
+                      </a:r>
+                    </a:p>
+                  </a:txBody>
+                  <a:tcPr marL="54864" marR="54864" marT="27432" marB="27432" anchor="ctr">
+                    <a:solidFill>
+                      <a:srgbClr val="2F5E8D"/>
                     </a:solidFill>
                   </a:tcPr>
                 </a:tc>
@@ -4927,19 +5305,18 @@
                     <a:p>
                       <a:pPr algn="ctr"/>
                       <a:r>
-                        <a:rPr sz="1300" b="1">
+                        <a:rPr sz="780" b="1">
                           <a:solidFill>
                             <a:srgbClr val="FFFFFF"/>
                           </a:solidFill>
-                          <a:latin typeface="Aptos"/>
-                        </a:rPr>
-                        <a:t>IoP@0.5</a:t>
-                      </a:r>
-                    </a:p>
-                  </a:txBody>
-                  <a:tcPr>
-                    <a:solidFill>
-                      <a:srgbClr val="2A598F"/>
+                        </a:rPr>
+                        <a:t>mIoU</a:t>
+                      </a:r>
+                    </a:p>
+                  </a:txBody>
+                  <a:tcPr marL="54864" marR="54864" marT="27432" marB="27432" anchor="ctr">
+                    <a:solidFill>
+                      <a:srgbClr val="2F5E8D"/>
                     </a:solidFill>
                   </a:tcPr>
                 </a:tc>
@@ -4950,24 +5327,23 @@
                     <a:p>
                       <a:pPr algn="ctr"/>
                       <a:r>
-                        <a:rPr sz="1300" b="1">
+                        <a:rPr sz="780" b="1">
                           <a:solidFill>
                             <a:srgbClr val="FFFFFF"/>
                           </a:solidFill>
-                          <a:latin typeface="Aptos"/>
                         </a:rPr>
                         <a:t>Acc@GQA</a:t>
                       </a:r>
                     </a:p>
                   </a:txBody>
-                  <a:tcPr>
-                    <a:solidFill>
-                      <a:srgbClr val="2A598F"/>
+                  <a:tcPr marL="54864" marR="54864" marT="27432" marB="27432" anchor="ctr">
+                    <a:solidFill>
+                      <a:srgbClr val="2F5E8D"/>
                     </a:solidFill>
                   </a:tcPr>
                 </a:tc>
               </a:tr>
-              <a:tr h="537210">
+              <a:tr h="388620">
                 <a:tc>
                   <a:txBody>
                     <a:bodyPr/>
@@ -4975,17 +5351,16 @@
                     <a:p>
                       <a:pPr algn="l"/>
                       <a:r>
-                        <a:rPr sz="1300" b="0">
-                          <a:solidFill>
-                            <a:srgbClr val="14181F"/>
-                          </a:solidFill>
-                          <a:latin typeface="Aptos"/>
-                        </a:rPr>
-                        <a:t>Qwen one segment</a:t>
-                      </a:r>
-                    </a:p>
-                  </a:txBody>
-                  <a:tcPr>
+                        <a:rPr sz="700" b="0">
+                          <a:solidFill>
+                            <a:srgbClr val="111827"/>
+                          </a:solidFill>
+                        </a:rPr>
+                        <a:t>One segment</a:t>
+                      </a:r>
+                    </a:p>
+                  </a:txBody>
+                  <a:tcPr marL="54864" marR="54864" marT="27432" marB="27432" anchor="ctr">
                     <a:solidFill>
                       <a:srgbClr val="FFFFFF"/>
                     </a:solidFill>
@@ -4998,17 +5373,16 @@
                     <a:p>
                       <a:pPr algn="ctr"/>
                       <a:r>
-                        <a:rPr sz="1300" b="0">
-                          <a:solidFill>
-                            <a:srgbClr val="14181F"/>
-                          </a:solidFill>
-                          <a:latin typeface="Aptos"/>
+                        <a:rPr sz="700" b="0">
+                          <a:solidFill>
+                            <a:srgbClr val="111827"/>
+                          </a:solidFill>
                         </a:rPr>
                         <a:t>0.668</a:t>
                       </a:r>
                     </a:p>
                   </a:txBody>
-                  <a:tcPr>
+                  <a:tcPr marL="54864" marR="54864" marT="27432" marB="27432" anchor="ctr">
                     <a:solidFill>
                       <a:srgbClr val="FFFFFF"/>
                     </a:solidFill>
@@ -5021,17 +5395,16 @@
                     <a:p>
                       <a:pPr algn="ctr"/>
                       <a:r>
-                        <a:rPr sz="1300" b="0">
-                          <a:solidFill>
-                            <a:srgbClr val="14181F"/>
-                          </a:solidFill>
-                          <a:latin typeface="Aptos"/>
+                        <a:rPr sz="700" b="0">
+                          <a:solidFill>
+                            <a:srgbClr val="111827"/>
+                          </a:solidFill>
                         </a:rPr>
                         <a:t>1.500</a:t>
                       </a:r>
                     </a:p>
                   </a:txBody>
-                  <a:tcPr>
+                  <a:tcPr marL="54864" marR="54864" marT="27432" marB="27432" anchor="ctr">
                     <a:solidFill>
                       <a:srgbClr val="FFFFFF"/>
                     </a:solidFill>
@@ -5044,17 +5417,16 @@
                     <a:p>
                       <a:pPr algn="ctr"/>
                       <a:r>
-                        <a:rPr sz="1300" b="0">
-                          <a:solidFill>
-                            <a:srgbClr val="14181F"/>
-                          </a:solidFill>
-                          <a:latin typeface="Aptos"/>
+                        <a:rPr sz="700" b="0">
+                          <a:solidFill>
+                            <a:srgbClr val="111827"/>
+                          </a:solidFill>
                         </a:rPr>
                         <a:t>0.311</a:t>
                       </a:r>
                     </a:p>
                   </a:txBody>
-                  <a:tcPr>
+                  <a:tcPr marL="54864" marR="54864" marT="27432" marB="27432" anchor="ctr">
                     <a:solidFill>
                       <a:srgbClr val="FFFFFF"/>
                     </a:solidFill>
@@ -5067,24 +5439,45 @@
                     <a:p>
                       <a:pPr algn="ctr"/>
                       <a:r>
-                        <a:rPr sz="1300" b="0">
-                          <a:solidFill>
-                            <a:srgbClr val="14181F"/>
-                          </a:solidFill>
-                          <a:latin typeface="Aptos"/>
+                        <a:rPr sz="700" b="0">
+                          <a:solidFill>
+                            <a:srgbClr val="111827"/>
+                          </a:solidFill>
+                        </a:rPr>
+                        <a:t>0.165</a:t>
+                      </a:r>
+                    </a:p>
+                  </a:txBody>
+                  <a:tcPr marL="54864" marR="54864" marT="27432" marB="27432" anchor="ctr">
+                    <a:solidFill>
+                      <a:srgbClr val="FFFFFF"/>
+                    </a:solidFill>
+                  </a:tcPr>
+                </a:tc>
+                <a:tc>
+                  <a:txBody>
+                    <a:bodyPr/>
+                    <a:lstStyle/>
+                    <a:p>
+                      <a:pPr algn="ctr"/>
+                      <a:r>
+                        <a:rPr sz="700" b="0">
+                          <a:solidFill>
+                            <a:srgbClr val="111827"/>
+                          </a:solidFill>
                         </a:rPr>
                         <a:t>0.221</a:t>
                       </a:r>
                     </a:p>
                   </a:txBody>
-                  <a:tcPr>
+                  <a:tcPr marL="54864" marR="54864" marT="27432" marB="27432" anchor="ctr">
                     <a:solidFill>
                       <a:srgbClr val="FFFFFF"/>
                     </a:solidFill>
                   </a:tcPr>
                 </a:tc>
               </a:tr>
-              <a:tr h="537210">
+              <a:tr h="388620">
                 <a:tc>
                   <a:txBody>
                     <a:bodyPr/>
@@ -5092,19 +5485,18 @@
                     <a:p>
                       <a:pPr algn="l"/>
                       <a:r>
-                        <a:rPr sz="1300" b="0">
-                          <a:solidFill>
-                            <a:srgbClr val="14181F"/>
-                          </a:solidFill>
-                          <a:latin typeface="Aptos"/>
-                        </a:rPr>
-                        <a:t>Qwen learned two-item</a:t>
-                      </a:r>
-                    </a:p>
-                  </a:txBody>
-                  <a:tcPr>
-                    <a:solidFill>
-                      <a:srgbClr val="EBF4F1"/>
+                        <a:rPr sz="700" b="0">
+                          <a:solidFill>
+                            <a:srgbClr val="111827"/>
+                          </a:solidFill>
+                        </a:rPr>
+                        <a:t>Linear policy</a:t>
+                      </a:r>
+                    </a:p>
+                  </a:txBody>
+                  <a:tcPr marL="54864" marR="54864" marT="27432" marB="27432" anchor="ctr">
+                    <a:solidFill>
+                      <a:srgbClr val="F6F8FB"/>
                     </a:solidFill>
                   </a:tcPr>
                 </a:tc>
@@ -5115,19 +5507,18 @@
                     <a:p>
                       <a:pPr algn="ctr"/>
                       <a:r>
-                        <a:rPr sz="1300" b="0">
-                          <a:solidFill>
-                            <a:srgbClr val="14181F"/>
-                          </a:solidFill>
-                          <a:latin typeface="Aptos"/>
+                        <a:rPr sz="700" b="0">
+                          <a:solidFill>
+                            <a:srgbClr val="111827"/>
+                          </a:solidFill>
                         </a:rPr>
                         <a:t>0.696</a:t>
                       </a:r>
                     </a:p>
                   </a:txBody>
-                  <a:tcPr>
-                    <a:solidFill>
-                      <a:srgbClr val="EBF4F1"/>
+                  <a:tcPr marL="54864" marR="54864" marT="27432" marB="27432" anchor="ctr">
+                    <a:solidFill>
+                      <a:srgbClr val="F6F8FB"/>
                     </a:solidFill>
                   </a:tcPr>
                 </a:tc>
@@ -5138,19 +5529,18 @@
                     <a:p>
                       <a:pPr algn="ctr"/>
                       <a:r>
-                        <a:rPr sz="1300" b="0">
-                          <a:solidFill>
-                            <a:srgbClr val="14181F"/>
-                          </a:solidFill>
-                          <a:latin typeface="Aptos"/>
+                        <a:rPr sz="700" b="0">
+                          <a:solidFill>
+                            <a:srgbClr val="111827"/>
+                          </a:solidFill>
                         </a:rPr>
                         <a:t>2.795</a:t>
                       </a:r>
                     </a:p>
                   </a:txBody>
-                  <a:tcPr>
-                    <a:solidFill>
-                      <a:srgbClr val="EBF4F1"/>
+                  <a:tcPr marL="54864" marR="54864" marT="27432" marB="27432" anchor="ctr">
+                    <a:solidFill>
+                      <a:srgbClr val="F6F8FB"/>
                     </a:solidFill>
                   </a:tcPr>
                 </a:tc>
@@ -5161,19 +5551,18 @@
                     <a:p>
                       <a:pPr algn="ctr"/>
                       <a:r>
-                        <a:rPr sz="1300" b="0">
-                          <a:solidFill>
-                            <a:srgbClr val="14181F"/>
-                          </a:solidFill>
-                          <a:latin typeface="Aptos"/>
+                        <a:rPr sz="700" b="0">
+                          <a:solidFill>
+                            <a:srgbClr val="111827"/>
+                          </a:solidFill>
                         </a:rPr>
                         <a:t>0.410</a:t>
                       </a:r>
                     </a:p>
                   </a:txBody>
-                  <a:tcPr>
-                    <a:solidFill>
-                      <a:srgbClr val="EBF4F1"/>
+                  <a:tcPr marL="54864" marR="54864" marT="27432" marB="27432" anchor="ctr">
+                    <a:solidFill>
+                      <a:srgbClr val="F6F8FB"/>
                     </a:solidFill>
                   </a:tcPr>
                 </a:tc>
@@ -5184,24 +5573,45 @@
                     <a:p>
                       <a:pPr algn="ctr"/>
                       <a:r>
-                        <a:rPr sz="1300" b="0">
-                          <a:solidFill>
-                            <a:srgbClr val="14181F"/>
-                          </a:solidFill>
-                          <a:latin typeface="Aptos"/>
+                        <a:rPr sz="700" b="0">
+                          <a:solidFill>
+                            <a:srgbClr val="111827"/>
+                          </a:solidFill>
+                        </a:rPr>
+                        <a:t>0.206</a:t>
+                      </a:r>
+                    </a:p>
+                  </a:txBody>
+                  <a:tcPr marL="54864" marR="54864" marT="27432" marB="27432" anchor="ctr">
+                    <a:solidFill>
+                      <a:srgbClr val="F6F8FB"/>
+                    </a:solidFill>
+                  </a:tcPr>
+                </a:tc>
+                <a:tc>
+                  <a:txBody>
+                    <a:bodyPr/>
+                    <a:lstStyle/>
+                    <a:p>
+                      <a:pPr algn="ctr"/>
+                      <a:r>
+                        <a:rPr sz="700" b="0">
+                          <a:solidFill>
+                            <a:srgbClr val="111827"/>
+                          </a:solidFill>
                         </a:rPr>
                         <a:t>0.297</a:t>
                       </a:r>
                     </a:p>
                   </a:txBody>
-                  <a:tcPr>
-                    <a:solidFill>
-                      <a:srgbClr val="EBF4F1"/>
+                  <a:tcPr marL="54864" marR="54864" marT="27432" marB="27432" anchor="ctr">
+                    <a:solidFill>
+                      <a:srgbClr val="F6F8FB"/>
                     </a:solidFill>
                   </a:tcPr>
                 </a:tc>
               </a:tr>
-              <a:tr h="537210">
+              <a:tr h="388620">
                 <a:tc>
                   <a:txBody>
                     <a:bodyPr/>
@@ -5209,19 +5619,18 @@
                     <a:p>
                       <a:pPr algn="l"/>
                       <a:r>
-                        <a:rPr sz="1300" b="0">
-                          <a:solidFill>
-                            <a:srgbClr val="14181F"/>
-                          </a:solidFill>
-                          <a:latin typeface="Aptos"/>
-                        </a:rPr>
-                        <a:t>Qwen fixed 3+3 reference</a:t>
-                      </a:r>
-                    </a:p>
-                  </a:txBody>
-                  <a:tcPr>
-                    <a:solidFill>
-                      <a:srgbClr val="EBF4F1"/>
+                        <a:rPr sz="700" b="0">
+                          <a:solidFill>
+                            <a:srgbClr val="111827"/>
+                          </a:solidFill>
+                        </a:rPr>
+                        <a:t>MLP top-2</a:t>
+                      </a:r>
+                    </a:p>
+                  </a:txBody>
+                  <a:tcPr marL="54864" marR="54864" marT="27432" marB="27432" anchor="ctr">
+                    <a:solidFill>
+                      <a:srgbClr val="FFFFFF"/>
                     </a:solidFill>
                   </a:tcPr>
                 </a:tc>
@@ -5232,19 +5641,554 @@
                     <a:p>
                       <a:pPr algn="ctr"/>
                       <a:r>
-                        <a:rPr sz="1300" b="0">
-                          <a:solidFill>
-                            <a:srgbClr val="14181F"/>
-                          </a:solidFill>
-                          <a:latin typeface="Aptos"/>
+                        <a:rPr sz="700" b="0">
+                          <a:solidFill>
+                            <a:srgbClr val="111827"/>
+                          </a:solidFill>
+                        </a:rPr>
+                        <a:t>0.687</a:t>
+                      </a:r>
+                    </a:p>
+                  </a:txBody>
+                  <a:tcPr marL="54864" marR="54864" marT="27432" marB="27432" anchor="ctr">
+                    <a:solidFill>
+                      <a:srgbClr val="FFFFFF"/>
+                    </a:solidFill>
+                  </a:tcPr>
+                </a:tc>
+                <a:tc>
+                  <a:txBody>
+                    <a:bodyPr/>
+                    <a:lstStyle/>
+                    <a:p>
+                      <a:pPr algn="ctr"/>
+                      <a:r>
+                        <a:rPr sz="700" b="0">
+                          <a:solidFill>
+                            <a:srgbClr val="111827"/>
+                          </a:solidFill>
+                        </a:rPr>
+                        <a:t>3.000</a:t>
+                      </a:r>
+                    </a:p>
+                  </a:txBody>
+                  <a:tcPr marL="54864" marR="54864" marT="27432" marB="27432" anchor="ctr">
+                    <a:solidFill>
+                      <a:srgbClr val="FFFFFF"/>
+                    </a:solidFill>
+                  </a:tcPr>
+                </a:tc>
+                <a:tc>
+                  <a:txBody>
+                    <a:bodyPr/>
+                    <a:lstStyle/>
+                    <a:p>
+                      <a:pPr algn="ctr"/>
+                      <a:r>
+                        <a:rPr sz="700" b="0">
+                          <a:solidFill>
+                            <a:srgbClr val="111827"/>
+                          </a:solidFill>
+                        </a:rPr>
+                        <a:t>0.423</a:t>
+                      </a:r>
+                    </a:p>
+                  </a:txBody>
+                  <a:tcPr marL="54864" marR="54864" marT="27432" marB="27432" anchor="ctr">
+                    <a:solidFill>
+                      <a:srgbClr val="FFFFFF"/>
+                    </a:solidFill>
+                  </a:tcPr>
+                </a:tc>
+                <a:tc>
+                  <a:txBody>
+                    <a:bodyPr/>
+                    <a:lstStyle/>
+                    <a:p>
+                      <a:pPr algn="ctr"/>
+                      <a:r>
+                        <a:rPr sz="700" b="0">
+                          <a:solidFill>
+                            <a:srgbClr val="111827"/>
+                          </a:solidFill>
+                        </a:rPr>
+                        <a:t>0.238</a:t>
+                      </a:r>
+                    </a:p>
+                  </a:txBody>
+                  <a:tcPr marL="54864" marR="54864" marT="27432" marB="27432" anchor="ctr">
+                    <a:solidFill>
+                      <a:srgbClr val="FFFFFF"/>
+                    </a:solidFill>
+                  </a:tcPr>
+                </a:tc>
+                <a:tc>
+                  <a:txBody>
+                    <a:bodyPr/>
+                    <a:lstStyle/>
+                    <a:p>
+                      <a:pPr algn="ctr"/>
+                      <a:r>
+                        <a:rPr sz="700" b="0">
+                          <a:solidFill>
+                            <a:srgbClr val="111827"/>
+                          </a:solidFill>
+                        </a:rPr>
+                        <a:t>0.301</a:t>
+                      </a:r>
+                    </a:p>
+                  </a:txBody>
+                  <a:tcPr marL="54864" marR="54864" marT="27432" marB="27432" anchor="ctr">
+                    <a:solidFill>
+                      <a:srgbClr val="FFFFFF"/>
+                    </a:solidFill>
+                  </a:tcPr>
+                </a:tc>
+              </a:tr>
+              <a:tr h="388620">
+                <a:tc>
+                  <a:txBody>
+                    <a:bodyPr/>
+                    <a:lstStyle/>
+                    <a:p>
+                      <a:pPr algn="l"/>
+                      <a:r>
+                        <a:rPr sz="700" b="1">
+                          <a:solidFill>
+                            <a:srgbClr val="111827"/>
+                          </a:solidFill>
+                        </a:rPr>
+                        <a:t>MLP+NMS (Our)</a:t>
+                      </a:r>
+                    </a:p>
+                  </a:txBody>
+                  <a:tcPr marL="54864" marR="54864" marT="27432" marB="27432" anchor="ctr">
+                    <a:solidFill>
+                      <a:srgbClr val="E2F0EC"/>
+                    </a:solidFill>
+                  </a:tcPr>
+                </a:tc>
+                <a:tc>
+                  <a:txBody>
+                    <a:bodyPr/>
+                    <a:lstStyle/>
+                    <a:p>
+                      <a:pPr algn="ctr"/>
+                      <a:r>
+                        <a:rPr sz="700" b="1">
+                          <a:solidFill>
+                            <a:srgbClr val="111827"/>
+                          </a:solidFill>
+                        </a:rPr>
+                        <a:t>0.689</a:t>
+                      </a:r>
+                    </a:p>
+                  </a:txBody>
+                  <a:tcPr marL="54864" marR="54864" marT="27432" marB="27432" anchor="ctr">
+                    <a:solidFill>
+                      <a:srgbClr val="E2F0EC"/>
+                    </a:solidFill>
+                  </a:tcPr>
+                </a:tc>
+                <a:tc>
+                  <a:txBody>
+                    <a:bodyPr/>
+                    <a:lstStyle/>
+                    <a:p>
+                      <a:pPr algn="ctr"/>
+                      <a:r>
+                        <a:rPr sz="700" b="1">
+                          <a:solidFill>
+                            <a:srgbClr val="111827"/>
+                          </a:solidFill>
+                        </a:rPr>
+                        <a:t>2.935</a:t>
+                      </a:r>
+                    </a:p>
+                  </a:txBody>
+                  <a:tcPr marL="54864" marR="54864" marT="27432" marB="27432" anchor="ctr">
+                    <a:solidFill>
+                      <a:srgbClr val="E2F0EC"/>
+                    </a:solidFill>
+                  </a:tcPr>
+                </a:tc>
+                <a:tc>
+                  <a:txBody>
+                    <a:bodyPr/>
+                    <a:lstStyle/>
+                    <a:p>
+                      <a:pPr algn="ctr"/>
+                      <a:r>
+                        <a:rPr sz="700" b="1">
+                          <a:solidFill>
+                            <a:srgbClr val="111827"/>
+                          </a:solidFill>
+                        </a:rPr>
+                        <a:t>0.453</a:t>
+                      </a:r>
+                    </a:p>
+                  </a:txBody>
+                  <a:tcPr marL="54864" marR="54864" marT="27432" marB="27432" anchor="ctr">
+                    <a:solidFill>
+                      <a:srgbClr val="E2F0EC"/>
+                    </a:solidFill>
+                  </a:tcPr>
+                </a:tc>
+                <a:tc>
+                  <a:txBody>
+                    <a:bodyPr/>
+                    <a:lstStyle/>
+                    <a:p>
+                      <a:pPr algn="ctr"/>
+                      <a:r>
+                        <a:rPr sz="700" b="1">
+                          <a:solidFill>
+                            <a:srgbClr val="111827"/>
+                          </a:solidFill>
+                        </a:rPr>
+                        <a:t>0.246</a:t>
+                      </a:r>
+                    </a:p>
+                  </a:txBody>
+                  <a:tcPr marL="54864" marR="54864" marT="27432" marB="27432" anchor="ctr">
+                    <a:solidFill>
+                      <a:srgbClr val="E2F0EC"/>
+                    </a:solidFill>
+                  </a:tcPr>
+                </a:tc>
+                <a:tc>
+                  <a:txBody>
+                    <a:bodyPr/>
+                    <a:lstStyle/>
+                    <a:p>
+                      <a:pPr algn="ctr"/>
+                      <a:r>
+                        <a:rPr sz="700" b="1">
+                          <a:solidFill>
+                            <a:srgbClr val="111827"/>
+                          </a:solidFill>
+                        </a:rPr>
+                        <a:t>0.321</a:t>
+                      </a:r>
+                    </a:p>
+                  </a:txBody>
+                  <a:tcPr marL="54864" marR="54864" marT="27432" marB="27432" anchor="ctr">
+                    <a:solidFill>
+                      <a:srgbClr val="E2F0EC"/>
+                    </a:solidFill>
+                  </a:tcPr>
+                </a:tc>
+              </a:tr>
+              <a:tr h="388620">
+                <a:tc>
+                  <a:txBody>
+                    <a:bodyPr/>
+                    <a:lstStyle/>
+                    <a:p>
+                      <a:pPr algn="l"/>
+                      <a:r>
+                        <a:rPr sz="700" b="0">
+                          <a:solidFill>
+                            <a:srgbClr val="111827"/>
+                          </a:solidFill>
+                        </a:rPr>
+                        <a:t>Temporal-supervised</a:t>
+                      </a:r>
+                    </a:p>
+                  </a:txBody>
+                  <a:tcPr marL="54864" marR="54864" marT="27432" marB="27432" anchor="ctr">
+                    <a:solidFill>
+                      <a:srgbClr val="FFFFFF"/>
+                    </a:solidFill>
+                  </a:tcPr>
+                </a:tc>
+                <a:tc>
+                  <a:txBody>
+                    <a:bodyPr/>
+                    <a:lstStyle/>
+                    <a:p>
+                      <a:pPr algn="ctr"/>
+                      <a:r>
+                        <a:rPr sz="700" b="0">
+                          <a:solidFill>
+                            <a:srgbClr val="111827"/>
+                          </a:solidFill>
+                        </a:rPr>
+                        <a:t>0.696</a:t>
+                      </a:r>
+                    </a:p>
+                  </a:txBody>
+                  <a:tcPr marL="54864" marR="54864" marT="27432" marB="27432" anchor="ctr">
+                    <a:solidFill>
+                      <a:srgbClr val="FFFFFF"/>
+                    </a:solidFill>
+                  </a:tcPr>
+                </a:tc>
+                <a:tc>
+                  <a:txBody>
+                    <a:bodyPr/>
+                    <a:lstStyle/>
+                    <a:p>
+                      <a:pPr algn="ctr"/>
+                      <a:r>
+                        <a:rPr sz="700" b="0">
+                          <a:solidFill>
+                            <a:srgbClr val="111827"/>
+                          </a:solidFill>
+                        </a:rPr>
+                        <a:t>2.273</a:t>
+                      </a:r>
+                    </a:p>
+                  </a:txBody>
+                  <a:tcPr marL="54864" marR="54864" marT="27432" marB="27432" anchor="ctr">
+                    <a:solidFill>
+                      <a:srgbClr val="FFFFFF"/>
+                    </a:solidFill>
+                  </a:tcPr>
+                </a:tc>
+                <a:tc>
+                  <a:txBody>
+                    <a:bodyPr/>
+                    <a:lstStyle/>
+                    <a:p>
+                      <a:pPr algn="ctr"/>
+                      <a:r>
+                        <a:rPr sz="700" b="0">
+                          <a:solidFill>
+                            <a:srgbClr val="111827"/>
+                          </a:solidFill>
+                        </a:rPr>
+                        <a:t>0.432</a:t>
+                      </a:r>
+                    </a:p>
+                  </a:txBody>
+                  <a:tcPr marL="54864" marR="54864" marT="27432" marB="27432" anchor="ctr">
+                    <a:solidFill>
+                      <a:srgbClr val="FFFFFF"/>
+                    </a:solidFill>
+                  </a:tcPr>
+                </a:tc>
+                <a:tc>
+                  <a:txBody>
+                    <a:bodyPr/>
+                    <a:lstStyle/>
+                    <a:p>
+                      <a:pPr algn="ctr"/>
+                      <a:r>
+                        <a:rPr sz="700" b="0">
+                          <a:solidFill>
+                            <a:srgbClr val="111827"/>
+                          </a:solidFill>
+                        </a:rPr>
+                        <a:t>0.088</a:t>
+                      </a:r>
+                    </a:p>
+                  </a:txBody>
+                  <a:tcPr marL="54864" marR="54864" marT="27432" marB="27432" anchor="ctr">
+                    <a:solidFill>
+                      <a:srgbClr val="FFFFFF"/>
+                    </a:solidFill>
+                  </a:tcPr>
+                </a:tc>
+                <a:tc>
+                  <a:txBody>
+                    <a:bodyPr/>
+                    <a:lstStyle/>
+                    <a:p>
+                      <a:pPr algn="ctr"/>
+                      <a:r>
+                        <a:rPr sz="700" b="0">
+                          <a:solidFill>
+                            <a:srgbClr val="111827"/>
+                          </a:solidFill>
+                        </a:rPr>
+                        <a:t>0.312</a:t>
+                      </a:r>
+                    </a:p>
+                  </a:txBody>
+                  <a:tcPr marL="54864" marR="54864" marT="27432" marB="27432" anchor="ctr">
+                    <a:solidFill>
+                      <a:srgbClr val="FFFFFF"/>
+                    </a:solidFill>
+                  </a:tcPr>
+                </a:tc>
+              </a:tr>
+              <a:tr h="388620">
+                <a:tc>
+                  <a:txBody>
+                    <a:bodyPr/>
+                    <a:lstStyle/>
+                    <a:p>
+                      <a:pPr algn="l"/>
+                      <a:r>
+                        <a:rPr sz="700" b="0">
+                          <a:solidFill>
+                            <a:srgbClr val="111827"/>
+                          </a:solidFill>
+                        </a:rPr>
+                        <a:t>Oracle top-2 ref.</a:t>
+                      </a:r>
+                    </a:p>
+                  </a:txBody>
+                  <a:tcPr marL="54864" marR="54864" marT="27432" marB="27432" anchor="ctr">
+                    <a:solidFill>
+                      <a:srgbClr val="F6F8FB"/>
+                    </a:solidFill>
+                  </a:tcPr>
+                </a:tc>
+                <a:tc>
+                  <a:txBody>
+                    <a:bodyPr/>
+                    <a:lstStyle/>
+                    <a:p>
+                      <a:pPr algn="ctr"/>
+                      <a:r>
+                        <a:rPr sz="700" b="0">
+                          <a:solidFill>
+                            <a:srgbClr val="111827"/>
+                          </a:solidFill>
+                        </a:rPr>
+                        <a:t>0.701</a:t>
+                      </a:r>
+                    </a:p>
+                  </a:txBody>
+                  <a:tcPr marL="54864" marR="54864" marT="27432" marB="27432" anchor="ctr">
+                    <a:solidFill>
+                      <a:srgbClr val="F6F8FB"/>
+                    </a:solidFill>
+                  </a:tcPr>
+                </a:tc>
+                <a:tc>
+                  <a:txBody>
+                    <a:bodyPr/>
+                    <a:lstStyle/>
+                    <a:p>
+                      <a:pPr algn="ctr"/>
+                      <a:r>
+                        <a:rPr sz="700" b="0">
+                          <a:solidFill>
+                            <a:srgbClr val="111827"/>
+                          </a:solidFill>
+                        </a:rPr>
+                        <a:t>2.493</a:t>
+                      </a:r>
+                    </a:p>
+                  </a:txBody>
+                  <a:tcPr marL="54864" marR="54864" marT="27432" marB="27432" anchor="ctr">
+                    <a:solidFill>
+                      <a:srgbClr val="F6F8FB"/>
+                    </a:solidFill>
+                  </a:tcPr>
+                </a:tc>
+                <a:tc>
+                  <a:txBody>
+                    <a:bodyPr/>
+                    <a:lstStyle/>
+                    <a:p>
+                      <a:pPr algn="ctr"/>
+                      <a:r>
+                        <a:rPr sz="700" b="0">
+                          <a:solidFill>
+                            <a:srgbClr val="111827"/>
+                          </a:solidFill>
+                        </a:rPr>
+                        <a:t>0.615</a:t>
+                      </a:r>
+                    </a:p>
+                  </a:txBody>
+                  <a:tcPr marL="54864" marR="54864" marT="27432" marB="27432" anchor="ctr">
+                    <a:solidFill>
+                      <a:srgbClr val="F6F8FB"/>
+                    </a:solidFill>
+                  </a:tcPr>
+                </a:tc>
+                <a:tc>
+                  <a:txBody>
+                    <a:bodyPr/>
+                    <a:lstStyle/>
+                    <a:p>
+                      <a:pPr algn="ctr"/>
+                      <a:r>
+                        <a:rPr sz="700" b="0">
+                          <a:solidFill>
+                            <a:srgbClr val="111827"/>
+                          </a:solidFill>
+                        </a:rPr>
+                        <a:t>0.224</a:t>
+                      </a:r>
+                    </a:p>
+                  </a:txBody>
+                  <a:tcPr marL="54864" marR="54864" marT="27432" marB="27432" anchor="ctr">
+                    <a:solidFill>
+                      <a:srgbClr val="F6F8FB"/>
+                    </a:solidFill>
+                  </a:tcPr>
+                </a:tc>
+                <a:tc>
+                  <a:txBody>
+                    <a:bodyPr/>
+                    <a:lstStyle/>
+                    <a:p>
+                      <a:pPr algn="ctr"/>
+                      <a:r>
+                        <a:rPr sz="700" b="0">
+                          <a:solidFill>
+                            <a:srgbClr val="111827"/>
+                          </a:solidFill>
+                        </a:rPr>
+                        <a:t>0.442</a:t>
+                      </a:r>
+                    </a:p>
+                  </a:txBody>
+                  <a:tcPr marL="54864" marR="54864" marT="27432" marB="27432" anchor="ctr">
+                    <a:solidFill>
+                      <a:srgbClr val="F6F8FB"/>
+                    </a:solidFill>
+                  </a:tcPr>
+                </a:tc>
+              </a:tr>
+              <a:tr h="388620">
+                <a:tc>
+                  <a:txBody>
+                    <a:bodyPr/>
+                    <a:lstStyle/>
+                    <a:p>
+                      <a:pPr algn="l"/>
+                      <a:r>
+                        <a:rPr sz="700" b="0">
+                          <a:solidFill>
+                            <a:srgbClr val="111827"/>
+                          </a:solidFill>
+                        </a:rPr>
+                        <a:t>Fixed 3+3 ref.</a:t>
+                      </a:r>
+                    </a:p>
+                  </a:txBody>
+                  <a:tcPr marL="54864" marR="54864" marT="27432" marB="27432" anchor="ctr">
+                    <a:solidFill>
+                      <a:srgbClr val="FFFFFF"/>
+                    </a:solidFill>
+                  </a:tcPr>
+                </a:tc>
+                <a:tc>
+                  <a:txBody>
+                    <a:bodyPr/>
+                    <a:lstStyle/>
+                    <a:p>
+                      <a:pPr algn="ctr"/>
+                      <a:r>
+                        <a:rPr sz="700" b="0">
+                          <a:solidFill>
+                            <a:srgbClr val="111827"/>
+                          </a:solidFill>
                         </a:rPr>
                         <a:t>0.724</a:t>
                       </a:r>
                     </a:p>
                   </a:txBody>
-                  <a:tcPr>
-                    <a:solidFill>
-                      <a:srgbClr val="EBF4F1"/>
+                  <a:tcPr marL="54864" marR="54864" marT="27432" marB="27432" anchor="ctr">
+                    <a:solidFill>
+                      <a:srgbClr val="FFFFFF"/>
                     </a:solidFill>
                   </a:tcPr>
                 </a:tc>
@@ -5255,19 +6199,18 @@
                     <a:p>
                       <a:pPr algn="ctr"/>
                       <a:r>
-                        <a:rPr sz="1300" b="0">
-                          <a:solidFill>
-                            <a:srgbClr val="14181F"/>
-                          </a:solidFill>
-                          <a:latin typeface="Aptos"/>
+                        <a:rPr sz="700" b="0">
+                          <a:solidFill>
+                            <a:srgbClr val="111827"/>
+                          </a:solidFill>
                         </a:rPr>
                         <a:t>7.500</a:t>
                       </a:r>
                     </a:p>
                   </a:txBody>
-                  <a:tcPr>
-                    <a:solidFill>
-                      <a:srgbClr val="EBF4F1"/>
+                  <a:tcPr marL="54864" marR="54864" marT="27432" marB="27432" anchor="ctr">
+                    <a:solidFill>
+                      <a:srgbClr val="FFFFFF"/>
                     </a:solidFill>
                   </a:tcPr>
                 </a:tc>
@@ -5278,19 +6221,18 @@
                     <a:p>
                       <a:pPr algn="ctr"/>
                       <a:r>
-                        <a:rPr sz="1300" b="0">
-                          <a:solidFill>
-                            <a:srgbClr val="14181F"/>
-                          </a:solidFill>
-                          <a:latin typeface="Aptos"/>
+                        <a:rPr sz="700" b="0">
+                          <a:solidFill>
+                            <a:srgbClr val="111827"/>
+                          </a:solidFill>
                         </a:rPr>
                         <a:t>0.615</a:t>
                       </a:r>
                     </a:p>
                   </a:txBody>
-                  <a:tcPr>
-                    <a:solidFill>
-                      <a:srgbClr val="EBF4F1"/>
+                  <a:tcPr marL="54864" marR="54864" marT="27432" marB="27432" anchor="ctr">
+                    <a:solidFill>
+                      <a:srgbClr val="FFFFFF"/>
                     </a:solidFill>
                   </a:tcPr>
                 </a:tc>
@@ -5301,19 +6243,40 @@
                     <a:p>
                       <a:pPr algn="ctr"/>
                       <a:r>
-                        <a:rPr sz="1300" b="0">
-                          <a:solidFill>
-                            <a:srgbClr val="14181F"/>
-                          </a:solidFill>
-                          <a:latin typeface="Aptos"/>
+                        <a:rPr sz="700" b="0">
+                          <a:solidFill>
+                            <a:srgbClr val="111827"/>
+                          </a:solidFill>
+                        </a:rPr>
+                        <a:t>0.296</a:t>
+                      </a:r>
+                    </a:p>
+                  </a:txBody>
+                  <a:tcPr marL="54864" marR="54864" marT="27432" marB="27432" anchor="ctr">
+                    <a:solidFill>
+                      <a:srgbClr val="FFFFFF"/>
+                    </a:solidFill>
+                  </a:tcPr>
+                </a:tc>
+                <a:tc>
+                  <a:txBody>
+                    <a:bodyPr/>
+                    <a:lstStyle/>
+                    <a:p>
+                      <a:pPr algn="ctr"/>
+                      <a:r>
+                        <a:rPr sz="700" b="0">
+                          <a:solidFill>
+                            <a:srgbClr val="111827"/>
+                          </a:solidFill>
                         </a:rPr>
                         <a:t>0.454</a:t>
                       </a:r>
                     </a:p>
                   </a:txBody>
-                  <a:tcPr>
-                    <a:solidFill>
-                      <a:srgbClr val="EBF4F1"/>
+                  <a:tcPr marL="54864" marR="54864" marT="27432" marB="27432" anchor="ctr">
+                    <a:solidFill>
+                      <a:srgbClr val="FFFFFF"/>
                     </a:solidFill>
                   </a:tcPr>
                 </a:tc>
@@ -5322,386 +6285,6 @@
           </a:graphicData>
         </a:graphic>
       </p:graphicFrame>
-      <p:sp>
-        <p:nvSpPr>
-          <p:cNvPr id="9" name="Rectangle 8"/>
-          <p:cNvSpPr/>
-          <p:nvPr/>
-        </p:nvSpPr>
-        <p:spPr>
-          <a:xfrm>
-            <a:off x="914400" y="3657600"/>
-            <a:ext cx="3383280" cy="868680"/>
-          </a:xfrm>
-          <a:prstGeom prst="rect">
-            <a:avLst/>
-          </a:prstGeom>
-          <a:solidFill>
-            <a:srgbClr val="F8FAFC"/>
-          </a:solidFill>
-          <a:ln w="17780">
-            <a:solidFill>
-              <a:srgbClr val="3B8B74"/>
-            </a:solidFill>
-          </a:ln>
-        </p:spPr>
-        <p:style>
-          <a:lnRef idx="1">
-            <a:schemeClr val="accent1"/>
-          </a:lnRef>
-          <a:fillRef idx="3">
-            <a:schemeClr val="accent1"/>
-          </a:fillRef>
-          <a:effectRef idx="2">
-            <a:schemeClr val="accent1"/>
-          </a:effectRef>
-          <a:fontRef idx="minor">
-            <a:schemeClr val="lt1"/>
-          </a:fontRef>
-        </p:style>
-        <p:txBody>
-          <a:bodyPr rtlCol="0" anchor="ctr"/>
-          <a:lstStyle/>
-          <a:p>
-            <a:pPr algn="ctr"/>
-          </a:p>
-        </p:txBody>
-      </p:sp>
-      <p:sp>
-        <p:nvSpPr>
-          <p:cNvPr id="10" name="TextBox 9"/>
-          <p:cNvSpPr txBox="1"/>
-          <p:nvPr/>
-        </p:nvSpPr>
-        <p:spPr>
-          <a:xfrm>
-            <a:off x="996695" y="3785615"/>
-            <a:ext cx="3218688" cy="256032"/>
-          </a:xfrm>
-          <a:prstGeom prst="rect">
-            <a:avLst/>
-          </a:prstGeom>
-          <a:noFill/>
-        </p:spPr>
-        <p:txBody>
-          <a:bodyPr wrap="square">
-            <a:normAutofit/>
-          </a:bodyPr>
-          <a:lstStyle/>
-          <a:p>
-            <a:pPr algn="ctr"/>
-            <a:r>
-              <a:rPr sz="1050" b="1">
-                <a:solidFill>
-                  <a:srgbClr val="5B6370"/>
-                </a:solidFill>
-                <a:latin typeface="Aptos"/>
-              </a:rPr>
-              <a:t>Answer retained</a:t>
-            </a:r>
-          </a:p>
-        </p:txBody>
-      </p:sp>
-      <p:sp>
-        <p:nvSpPr>
-          <p:cNvPr id="11" name="TextBox 10"/>
-          <p:cNvSpPr txBox="1"/>
-          <p:nvPr/>
-        </p:nvSpPr>
-        <p:spPr>
-          <a:xfrm>
-            <a:off x="996695" y="4059936"/>
-            <a:ext cx="3218688" cy="329184"/>
-          </a:xfrm>
-          <a:prstGeom prst="rect">
-            <a:avLst/>
-          </a:prstGeom>
-          <a:noFill/>
-        </p:spPr>
-        <p:txBody>
-          <a:bodyPr wrap="square">
-            <a:normAutofit/>
-          </a:bodyPr>
-          <a:lstStyle/>
-          <a:p>
-            <a:pPr algn="ctr"/>
-            <a:r>
-              <a:rPr sz="1800" b="1">
-                <a:solidFill>
-                  <a:srgbClr val="3B8B74"/>
-                </a:solidFill>
-                <a:latin typeface="Aptos"/>
-              </a:rPr>
-              <a:t>95%</a:t>
-            </a:r>
-          </a:p>
-        </p:txBody>
-      </p:sp>
-      <p:sp>
-        <p:nvSpPr>
-          <p:cNvPr id="12" name="Rectangle 11"/>
-          <p:cNvSpPr/>
-          <p:nvPr/>
-        </p:nvSpPr>
-        <p:spPr>
-          <a:xfrm>
-            <a:off x="4389120" y="3657600"/>
-            <a:ext cx="3383280" cy="868680"/>
-          </a:xfrm>
-          <a:prstGeom prst="rect">
-            <a:avLst/>
-          </a:prstGeom>
-          <a:solidFill>
-            <a:srgbClr val="F8FAFC"/>
-          </a:solidFill>
-          <a:ln w="17780">
-            <a:solidFill>
-              <a:srgbClr val="2A598F"/>
-            </a:solidFill>
-          </a:ln>
-        </p:spPr>
-        <p:style>
-          <a:lnRef idx="1">
-            <a:schemeClr val="accent1"/>
-          </a:lnRef>
-          <a:fillRef idx="3">
-            <a:schemeClr val="accent1"/>
-          </a:fillRef>
-          <a:effectRef idx="2">
-            <a:schemeClr val="accent1"/>
-          </a:effectRef>
-          <a:fontRef idx="minor">
-            <a:schemeClr val="lt1"/>
-          </a:fontRef>
-        </p:style>
-        <p:txBody>
-          <a:bodyPr rtlCol="0" anchor="ctr"/>
-          <a:lstStyle/>
-          <a:p>
-            <a:pPr algn="ctr"/>
-          </a:p>
-        </p:txBody>
-      </p:sp>
-      <p:sp>
-        <p:nvSpPr>
-          <p:cNvPr id="13" name="TextBox 12"/>
-          <p:cNvSpPr txBox="1"/>
-          <p:nvPr/>
-        </p:nvSpPr>
-        <p:spPr>
-          <a:xfrm>
-            <a:off x="4471416" y="3785615"/>
-            <a:ext cx="3218688" cy="256032"/>
-          </a:xfrm>
-          <a:prstGeom prst="rect">
-            <a:avLst/>
-          </a:prstGeom>
-          <a:noFill/>
-        </p:spPr>
-        <p:txBody>
-          <a:bodyPr wrap="square">
-            <a:normAutofit/>
-          </a:bodyPr>
-          <a:lstStyle/>
-          <a:p>
-            <a:pPr algn="ctr"/>
-            <a:r>
-              <a:rPr sz="1050" b="1">
-                <a:solidFill>
-                  <a:srgbClr val="5B6370"/>
-                </a:solidFill>
-                <a:latin typeface="Aptos"/>
-              </a:rPr>
-              <a:t>Cost used</a:t>
-            </a:r>
-          </a:p>
-        </p:txBody>
-      </p:sp>
-      <p:sp>
-        <p:nvSpPr>
-          <p:cNvPr id="14" name="TextBox 13"/>
-          <p:cNvSpPr txBox="1"/>
-          <p:nvPr/>
-        </p:nvSpPr>
-        <p:spPr>
-          <a:xfrm>
-            <a:off x="4471416" y="4059936"/>
-            <a:ext cx="3218688" cy="329184"/>
-          </a:xfrm>
-          <a:prstGeom prst="rect">
-            <a:avLst/>
-          </a:prstGeom>
-          <a:noFill/>
-        </p:spPr>
-        <p:txBody>
-          <a:bodyPr wrap="square">
-            <a:normAutofit/>
-          </a:bodyPr>
-          <a:lstStyle/>
-          <a:p>
-            <a:pPr algn="ctr"/>
-            <a:r>
-              <a:rPr sz="1800" b="1">
-                <a:solidFill>
-                  <a:srgbClr val="2A598F"/>
-                </a:solidFill>
-                <a:latin typeface="Aptos"/>
-              </a:rPr>
-              <a:t>39%</a:t>
-            </a:r>
-          </a:p>
-        </p:txBody>
-      </p:sp>
-      <p:sp>
-        <p:nvSpPr>
-          <p:cNvPr id="15" name="Rectangle 14"/>
-          <p:cNvSpPr/>
-          <p:nvPr/>
-        </p:nvSpPr>
-        <p:spPr>
-          <a:xfrm>
-            <a:off x="7863840" y="3657600"/>
-            <a:ext cx="3383280" cy="868680"/>
-          </a:xfrm>
-          <a:prstGeom prst="rect">
-            <a:avLst/>
-          </a:prstGeom>
-          <a:solidFill>
-            <a:srgbClr val="F8FAFC"/>
-          </a:solidFill>
-          <a:ln w="17780">
-            <a:solidFill>
-              <a:srgbClr val="B08400"/>
-            </a:solidFill>
-          </a:ln>
-        </p:spPr>
-        <p:style>
-          <a:lnRef idx="1">
-            <a:schemeClr val="accent1"/>
-          </a:lnRef>
-          <a:fillRef idx="3">
-            <a:schemeClr val="accent1"/>
-          </a:fillRef>
-          <a:effectRef idx="2">
-            <a:schemeClr val="accent1"/>
-          </a:effectRef>
-          <a:fontRef idx="minor">
-            <a:schemeClr val="lt1"/>
-          </a:fontRef>
-        </p:style>
-        <p:txBody>
-          <a:bodyPr rtlCol="0" anchor="ctr"/>
-          <a:lstStyle/>
-          <a:p>
-            <a:pPr algn="ctr"/>
-          </a:p>
-        </p:txBody>
-      </p:sp>
-      <p:sp>
-        <p:nvSpPr>
-          <p:cNvPr id="16" name="TextBox 15"/>
-          <p:cNvSpPr txBox="1"/>
-          <p:nvPr/>
-        </p:nvSpPr>
-        <p:spPr>
-          <a:xfrm>
-            <a:off x="7946136" y="3785615"/>
-            <a:ext cx="3218688" cy="256032"/>
-          </a:xfrm>
-          <a:prstGeom prst="rect">
-            <a:avLst/>
-          </a:prstGeom>
-          <a:noFill/>
-        </p:spPr>
-        <p:txBody>
-          <a:bodyPr wrap="square">
-            <a:normAutofit/>
-          </a:bodyPr>
-          <a:lstStyle/>
-          <a:p>
-            <a:pPr algn="ctr"/>
-            <a:r>
-              <a:rPr sz="1050" b="1">
-                <a:solidFill>
-                  <a:srgbClr val="5B6370"/>
-                </a:solidFill>
-                <a:latin typeface="Aptos"/>
-              </a:rPr>
-              <a:t>Grounding retained</a:t>
-            </a:r>
-          </a:p>
-        </p:txBody>
-      </p:sp>
-      <p:sp>
-        <p:nvSpPr>
-          <p:cNvPr id="17" name="TextBox 16"/>
-          <p:cNvSpPr txBox="1"/>
-          <p:nvPr/>
-        </p:nvSpPr>
-        <p:spPr>
-          <a:xfrm>
-            <a:off x="7946136" y="4059936"/>
-            <a:ext cx="3218688" cy="329184"/>
-          </a:xfrm>
-          <a:prstGeom prst="rect">
-            <a:avLst/>
-          </a:prstGeom>
-          <a:noFill/>
-        </p:spPr>
-        <p:txBody>
-          <a:bodyPr wrap="square">
-            <a:normAutofit/>
-          </a:bodyPr>
-          <a:lstStyle/>
-          <a:p>
-            <a:pPr algn="ctr"/>
-            <a:r>
-              <a:rPr sz="1800" b="1">
-                <a:solidFill>
-                  <a:srgbClr val="B08400"/>
-                </a:solidFill>
-                <a:latin typeface="Aptos"/>
-              </a:rPr>
-              <a:t>71%</a:t>
-            </a:r>
-          </a:p>
-        </p:txBody>
-      </p:sp>
-      <p:sp>
-        <p:nvSpPr>
-          <p:cNvPr id="18" name="TextBox 17"/>
-          <p:cNvSpPr txBox="1"/>
-          <p:nvPr/>
-        </p:nvSpPr>
-        <p:spPr>
-          <a:xfrm>
-            <a:off x="1005840" y="5074920"/>
-            <a:ext cx="10149840" cy="640080"/>
-          </a:xfrm>
-          <a:prstGeom prst="rect">
-            <a:avLst/>
-          </a:prstGeom>
-          <a:noFill/>
-        </p:spPr>
-        <p:txBody>
-          <a:bodyPr wrap="square">
-            <a:normAutofit/>
-          </a:bodyPr>
-          <a:lstStyle/>
-          <a:p>
-            <a:pPr algn="ctr"/>
-            <a:r>
-              <a:rPr sz="2000" b="1">
-                <a:solidFill>
-                  <a:srgbClr val="19375C"/>
-                </a:solidFill>
-                <a:latin typeface="Aptos"/>
-              </a:rPr>
-              <a:t>MLP+NMS evidence is the best learned budgeted method: near-fixed accuracy at much lower evidence cost.</a:t>
-            </a:r>
-          </a:p>
-        </p:txBody>
-      </p:sp>
     </p:spTree>
   </p:cSld>
   <p:clrMapOvr>
@@ -5941,41 +6524,16 @@
           <a:p>
             <a:pPr algn="r"/>
             <a:r>
-              <a:rPr sz="850" b="0">
+              <a:rPr sz="750">
                 <a:solidFill>
-                  <a:srgbClr val="19375C"/>
+                  <a:srgbClr val="374151"/>
                 </a:solidFill>
-                <a:latin typeface="Aptos"/>
               </a:rPr>
-              <a:t>Final Presentation</a:t>
-            </a:r>
-          </a:p>
-        </p:txBody>
-      </p:sp>
-      <p:pic>
-        <p:nvPicPr>
-          <p:cNvPr id="8" name="Picture 7" descr="qwen_test_tradeoff_presentation.png"/>
-          <p:cNvPicPr>
-            <a:picLocks noChangeAspect="1"/>
-          </p:cNvPicPr>
-          <p:nvPr/>
-        </p:nvPicPr>
-        <p:blipFill>
-          <a:blip r:embed="rId2"/>
-          <a:stretch>
-            <a:fillRect/>
-          </a:stretch>
-        </p:blipFill>
-        <p:spPr>
-          <a:xfrm>
-            <a:off x="502920" y="777240"/>
-            <a:ext cx="11155680" cy="4092352"/>
-          </a:xfrm>
-          <a:prstGeom prst="rect">
-            <a:avLst/>
-          </a:prstGeom>
-        </p:spPr>
-      </p:pic>
+              <a:t>Research Presentation</a:t>
+            </a:r>
+          </a:p>
+        </p:txBody>
+      </p:sp>
       <p:sp>
         <p:nvSpPr>
           <p:cNvPr id="9" name="Rectangle 8"/>
@@ -6044,11 +6602,10 @@
           <a:lstStyle/>
           <a:p>
             <a:r>
-              <a:rPr sz="1500" b="1">
+              <a:rPr sz="1250" b="1">
                 <a:solidFill>
-                  <a:srgbClr val="2A598F"/>
+                  <a:srgbClr val="2F5E8D"/>
                 </a:solidFill>
-                <a:latin typeface="Aptos"/>
               </a:rPr>
               <a:t>Interpretation</a:t>
             </a:r>
@@ -6078,17 +6635,36 @@
           <a:lstStyle/>
           <a:p>
             <a:r>
-              <a:rPr sz="1500" b="0">
-                <a:solidFill>
-                  <a:srgbClr val="14181F"/>
-                </a:solidFill>
-                <a:latin typeface="Aptos"/>
-              </a:rPr>
-              <a:t>MLP+NMS gives the best learned budgeted tradeoff: most of the high-cost answer accuracy, much lower evidence cost, and better grounding than one segment.</a:t>
-            </a:r>
-          </a:p>
-        </p:txBody>
-      </p:sp>
+              <a:rPr sz="1150"/>
+              <a:t>Answer accuracy is relatively flat among compact selectors, but Acc@GQA separates evidence quality. MLP+NMS is the strongest learned grounded point; oracle top-2 shows compact support exists in the pool.</a:t>
+            </a:r>
+          </a:p>
+        </p:txBody>
+      </p:sp>
+      <p:pic>
+        <p:nvPicPr>
+          <p:cNvPr id="12" name="Picture 11" descr="qwen_tradeoff.png"/>
+          <p:cNvPicPr>
+            <a:picLocks noChangeAspect="1"/>
+          </p:cNvPicPr>
+          <p:nvPr/>
+        </p:nvPicPr>
+        <p:blipFill>
+          <a:blip r:embed="rId3"/>
+          <a:stretch>
+            <a:fillRect/>
+          </a:stretch>
+        </p:blipFill>
+        <p:spPr>
+          <a:xfrm>
+            <a:off x="502920" y="777240"/>
+            <a:ext cx="11155680" cy="4092352"/>
+          </a:xfrm>
+          <a:prstGeom prst="rect">
+            <a:avLst/>
+          </a:prstGeom>
+        </p:spPr>
+      </p:pic>
     </p:spTree>
   </p:cSld>
   <p:clrMapOvr>
@@ -6328,20 +6904,127 @@
           <a:p>
             <a:pPr algn="r"/>
             <a:r>
-              <a:rPr sz="850" b="0">
+              <a:rPr sz="750">
                 <a:solidFill>
-                  <a:srgbClr val="19375C"/>
+                  <a:srgbClr val="374151"/>
+                </a:solidFill>
+              </a:rPr>
+              <a:t>Research Presentation</a:t>
+            </a:r>
+          </a:p>
+        </p:txBody>
+      </p:sp>
+      <p:sp>
+        <p:nvSpPr>
+          <p:cNvPr id="9" name="Rectangle 8"/>
+          <p:cNvSpPr/>
+          <p:nvPr/>
+        </p:nvSpPr>
+        <p:spPr>
+          <a:xfrm>
+            <a:off x="914400" y="4572000"/>
+            <a:ext cx="10378440" cy="960120"/>
+          </a:xfrm>
+          <a:prstGeom prst="rect">
+            <a:avLst/>
+          </a:prstGeom>
+          <a:solidFill>
+            <a:srgbClr val="E8F0FA"/>
+          </a:solidFill>
+          <a:ln w="15240">
+            <a:solidFill>
+              <a:srgbClr val="3B8B74"/>
+            </a:solidFill>
+          </a:ln>
+        </p:spPr>
+        <p:style>
+          <a:lnRef idx="1">
+            <a:schemeClr val="accent1"/>
+          </a:lnRef>
+          <a:fillRef idx="3">
+            <a:schemeClr val="accent1"/>
+          </a:fillRef>
+          <a:effectRef idx="2">
+            <a:schemeClr val="accent1"/>
+          </a:effectRef>
+          <a:fontRef idx="minor">
+            <a:schemeClr val="lt1"/>
+          </a:fontRef>
+        </p:style>
+        <p:txBody>
+          <a:bodyPr rtlCol="0" anchor="ctr"/>
+          <a:lstStyle/>
+          <a:p>
+            <a:pPr algn="ctr"/>
+          </a:p>
+        </p:txBody>
+      </p:sp>
+      <p:sp>
+        <p:nvSpPr>
+          <p:cNvPr id="10" name="TextBox 9"/>
+          <p:cNvSpPr txBox="1"/>
+          <p:nvPr/>
+        </p:nvSpPr>
+        <p:spPr>
+          <a:xfrm>
+            <a:off x="1078992" y="4681728"/>
+            <a:ext cx="10049256" cy="256032"/>
+          </a:xfrm>
+          <a:prstGeom prst="rect">
+            <a:avLst/>
+          </a:prstGeom>
+          <a:noFill/>
+        </p:spPr>
+        <p:txBody>
+          <a:bodyPr wrap="square">
+            <a:normAutofit/>
+          </a:bodyPr>
+          <a:lstStyle/>
+          <a:p>
+            <a:r>
+              <a:rPr sz="1500" b="1">
+                <a:solidFill>
+                  <a:srgbClr val="3B8B74"/>
                 </a:solidFill>
                 <a:latin typeface="Aptos"/>
               </a:rPr>
-              <a:t>Final Presentation</a:t>
+              <a:t>Takeaway</a:t>
+            </a:r>
+          </a:p>
+        </p:txBody>
+      </p:sp>
+      <p:sp>
+        <p:nvSpPr>
+          <p:cNvPr id="11" name="TextBox 10"/>
+          <p:cNvSpPr txBox="1"/>
+          <p:nvPr/>
+        </p:nvSpPr>
+        <p:spPr>
+          <a:xfrm>
+            <a:off x="1078992" y="5047488"/>
+            <a:ext cx="10049256" cy="374904"/>
+          </a:xfrm>
+          <a:prstGeom prst="rect">
+            <a:avLst/>
+          </a:prstGeom>
+          <a:noFill/>
+        </p:spPr>
+        <p:txBody>
+          <a:bodyPr wrap="square">
+            <a:normAutofit/>
+          </a:bodyPr>
+          <a:lstStyle/>
+          <a:p>
+            <a:r>
+              <a:rPr sz="1150"/>
+              <a:t>The qualitative examples support the same conclusion as the tables: the remaining bottleneck is ranking and diversifying support evidence, not simply adding a stronger answerer.</a:t>
             </a:r>
           </a:p>
         </p:txBody>
       </p:sp>
       <p:graphicFrame>
         <p:nvGraphicFramePr>
-          <p:cNvPr id="8" name="Table 7"/>
+          <p:cNvPr id="12" name="Table 11"/>
           <p:cNvGraphicFramePr>
             <a:graphicFrameLocks noGrp="1"/>
           </p:cNvGraphicFramePr>
@@ -6358,8 +7041,8 @@
                 <a:tableStyleId>{5C22544A-7EE6-4342-B048-85BDC9FD1C3A}</a:tableStyleId>
               </a:tblPr>
               <a:tblGrid>
-                <a:gridCol w="3733800"/>
-                <a:gridCol w="3733800"/>
+                <a:gridCol w="2426970"/>
+                <a:gridCol w="5040630"/>
                 <a:gridCol w="3733800"/>
               </a:tblGrid>
               <a:tr h="811530">
@@ -6368,21 +7051,42 @@
                     <a:bodyPr/>
                     <a:lstStyle/>
                     <a:p>
+                      <a:pPr algn="l"/>
+                      <a:r>
+                        <a:rPr sz="930" b="1">
+                          <a:solidFill>
+                            <a:srgbClr val="FFFFFF"/>
+                          </a:solidFill>
+                        </a:rPr>
+                        <a:t>Case from report</a:t>
+                      </a:r>
+                    </a:p>
+                  </a:txBody>
+                  <a:tcPr marL="54864" marR="54864" marT="27432" marB="27432" anchor="ctr">
+                    <a:solidFill>
+                      <a:srgbClr val="2F5E8D"/>
+                    </a:solidFill>
+                  </a:tcPr>
+                </a:tc>
+                <a:tc>
+                  <a:txBody>
+                    <a:bodyPr/>
+                    <a:lstStyle/>
+                    <a:p>
                       <a:pPr algn="ctr"/>
                       <a:r>
-                        <a:rPr sz="1150" b="1">
+                        <a:rPr sz="930" b="1">
                           <a:solidFill>
                             <a:srgbClr val="FFFFFF"/>
                           </a:solidFill>
-                          <a:latin typeface="Aptos"/>
-                        </a:rPr>
-                        <a:t>Case</a:t>
-                      </a:r>
-                    </a:p>
-                  </a:txBody>
-                  <a:tcPr>
-                    <a:solidFill>
-                      <a:srgbClr val="2A598F"/>
+                        </a:rPr>
+                        <a:t>What happens</a:t>
+                      </a:r>
+                    </a:p>
+                  </a:txBody>
+                  <a:tcPr marL="54864" marR="54864" marT="27432" marB="27432" anchor="ctr">
+                    <a:solidFill>
+                      <a:srgbClr val="2F5E8D"/>
                     </a:solidFill>
                   </a:tcPr>
                 </a:tc>
@@ -6393,42 +7097,18 @@
                     <a:p>
                       <a:pPr algn="ctr"/>
                       <a:r>
-                        <a:rPr sz="1150" b="1">
+                        <a:rPr sz="930" b="1">
                           <a:solidFill>
                             <a:srgbClr val="FFFFFF"/>
                           </a:solidFill>
-                          <a:latin typeface="Aptos"/>
-                        </a:rPr>
-                        <a:t>What happens</a:t>
-                      </a:r>
-                    </a:p>
-                  </a:txBody>
-                  <a:tcPr>
-                    <a:solidFill>
-                      <a:srgbClr val="2A598F"/>
-                    </a:solidFill>
-                  </a:tcPr>
-                </a:tc>
-                <a:tc>
-                  <a:txBody>
-                    <a:bodyPr/>
-                    <a:lstStyle/>
-                    <a:p>
-                      <a:pPr algn="ctr"/>
-                      <a:r>
-                        <a:rPr sz="1150" b="1">
-                          <a:solidFill>
-                            <a:srgbClr val="FFFFFF"/>
-                          </a:solidFill>
-                          <a:latin typeface="Aptos"/>
                         </a:rPr>
                         <a:t>Lesson</a:t>
                       </a:r>
                     </a:p>
                   </a:txBody>
-                  <a:tcPr>
-                    <a:solidFill>
-                      <a:srgbClr val="2A598F"/>
+                  <a:tcPr marL="54864" marR="54864" marT="27432" marB="27432" anchor="ctr">
+                    <a:solidFill>
+                      <a:srgbClr val="2F5E8D"/>
                     </a:solidFill>
                   </a:tcPr>
                 </a:tc>
@@ -6441,17 +7121,16 @@
                     <a:p>
                       <a:pPr algn="l"/>
                       <a:r>
-                        <a:rPr sz="1150" b="0">
-                          <a:solidFill>
-                            <a:srgbClr val="14181F"/>
-                          </a:solidFill>
-                          <a:latin typeface="Aptos"/>
-                        </a:rPr>
-                        <a:t>Correct and grounded</a:t>
-                      </a:r>
-                    </a:p>
-                  </a:txBody>
-                  <a:tcPr>
+                        <a:rPr sz="860" b="0">
+                          <a:solidFill>
+                            <a:srgbClr val="111827"/>
+                          </a:solidFill>
+                        </a:rPr>
+                        <a:t>Temporal NMS helps</a:t>
+                      </a:r>
+                    </a:p>
+                  </a:txBody>
+                  <a:tcPr marL="54864" marR="54864" marT="27432" marB="27432" anchor="ctr">
                     <a:solidFill>
                       <a:srgbClr val="FFFFFF"/>
                     </a:solidFill>
@@ -6464,17 +7143,16 @@
                     <a:p>
                       <a:pPr algn="ctr"/>
                       <a:r>
-                        <a:rPr sz="1150" b="0">
-                          <a:solidFill>
-                            <a:srgbClr val="14181F"/>
-                          </a:solidFill>
-                          <a:latin typeface="Aptos"/>
-                        </a:rPr>
-                        <a:t>Evidence overlaps the support moment and Qwen predicts the gold answer.</a:t>
-                      </a:r>
-                    </a:p>
-                  </a:txBody>
-                  <a:tcPr>
+                        <a:rPr sz="860" b="0">
+                          <a:solidFill>
+                            <a:srgbClr val="111827"/>
+                          </a:solidFill>
+                        </a:rPr>
+                        <a:t>MLP top-2 selects redundant late evidence; MLP+NMS recovers support overlap while preserving the answer.</a:t>
+                      </a:r>
+                    </a:p>
+                  </a:txBody>
+                  <a:tcPr marL="54864" marR="54864" marT="27432" marB="27432" anchor="ctr">
                     <a:solidFill>
                       <a:srgbClr val="FFFFFF"/>
                     </a:solidFill>
@@ -6487,17 +7165,16 @@
                     <a:p>
                       <a:pPr algn="ctr"/>
                       <a:r>
-                        <a:rPr sz="1150" b="0">
-                          <a:solidFill>
-                            <a:srgbClr val="14181F"/>
-                          </a:solidFill>
-                          <a:latin typeface="Aptos"/>
-                        </a:rPr>
-                        <a:t>Desired behavior</a:t>
-                      </a:r>
-                    </a:p>
-                  </a:txBody>
-                  <a:tcPr>
+                        <a:rPr sz="860" b="0">
+                          <a:solidFill>
+                            <a:srgbClr val="111827"/>
+                          </a:solidFill>
+                        </a:rPr>
+                        <a:t>Diversity filtering improves compact grounding</a:t>
+                      </a:r>
+                    </a:p>
+                  </a:txBody>
+                  <a:tcPr marL="54864" marR="54864" marT="27432" marB="27432" anchor="ctr">
                     <a:solidFill>
                       <a:srgbClr val="FFFFFF"/>
                     </a:solidFill>
@@ -6512,19 +7189,18 @@
                     <a:p>
                       <a:pPr algn="l"/>
                       <a:r>
-                        <a:rPr sz="1150" b="0">
-                          <a:solidFill>
-                            <a:srgbClr val="14181F"/>
-                          </a:solidFill>
-                          <a:latin typeface="Aptos"/>
-                        </a:rPr>
-                        <a:t>Correct, weakly grounded</a:t>
-                      </a:r>
-                    </a:p>
-                  </a:txBody>
-                  <a:tcPr>
-                    <a:solidFill>
-                      <a:srgbClr val="F4F6F9"/>
+                        <a:rPr sz="860" b="0">
+                          <a:solidFill>
+                            <a:srgbClr val="111827"/>
+                          </a:solidFill>
+                        </a:rPr>
+                        <a:t>Router misses support</a:t>
+                      </a:r>
+                    </a:p>
+                  </a:txBody>
+                  <a:tcPr marL="54864" marR="54864" marT="27432" marB="27432" anchor="ctr">
+                    <a:solidFill>
+                      <a:srgbClr val="F6F8FB"/>
                     </a:solidFill>
                   </a:tcPr>
                 </a:tc>
@@ -6535,19 +7211,18 @@
                     <a:p>
                       <a:pPr algn="ctr"/>
                       <a:r>
-                        <a:rPr sz="1150" b="0">
-                          <a:solidFill>
-                            <a:srgbClr val="14181F"/>
-                          </a:solidFill>
-                          <a:latin typeface="Aptos"/>
-                        </a:rPr>
-                        <a:t>Qwen predicts correctly but selected evidence has low temporal overlap.</a:t>
-                      </a:r>
-                    </a:p>
-                  </a:txBody>
-                  <a:tcPr>
-                    <a:solidFill>
-                      <a:srgbClr val="F4F6F9"/>
+                        <a:rPr sz="860" b="0">
+                          <a:solidFill>
+                            <a:srgbClr val="111827"/>
+                          </a:solidFill>
+                        </a:rPr>
+                        <a:t>MLP+NMS can miss the annotated moment; oracle top-2 and fixed 3+3 recover it from the same pool.</a:t>
+                      </a:r>
+                    </a:p>
+                  </a:txBody>
+                  <a:tcPr marL="54864" marR="54864" marT="27432" marB="27432" anchor="ctr">
+                    <a:solidFill>
+                      <a:srgbClr val="F6F8FB"/>
                     </a:solidFill>
                   </a:tcPr>
                 </a:tc>
@@ -6558,19 +7233,18 @@
                     <a:p>
                       <a:pPr algn="ctr"/>
                       <a:r>
-                        <a:rPr sz="1150" b="0">
-                          <a:solidFill>
-                            <a:srgbClr val="14181F"/>
-                          </a:solidFill>
-                          <a:latin typeface="Aptos"/>
-                        </a:rPr>
-                        <a:t>Answer accuracy alone misleads</a:t>
-                      </a:r>
-                    </a:p>
-                  </a:txBody>
-                  <a:tcPr>
-                    <a:solidFill>
-                      <a:srgbClr val="F4F6F9"/>
+                        <a:rPr sz="860" b="0">
+                          <a:solidFill>
+                            <a:srgbClr val="111827"/>
+                          </a:solidFill>
+                        </a:rPr>
+                        <a:t>Candidate pool has headroom</a:t>
+                      </a:r>
+                    </a:p>
+                  </a:txBody>
+                  <a:tcPr marL="54864" marR="54864" marT="27432" marB="27432" anchor="ctr">
+                    <a:solidFill>
+                      <a:srgbClr val="F6F8FB"/>
                     </a:solidFill>
                   </a:tcPr>
                 </a:tc>
@@ -6583,17 +7257,16 @@
                     <a:p>
                       <a:pPr algn="l"/>
                       <a:r>
-                        <a:rPr sz="1150" b="0">
-                          <a:solidFill>
-                            <a:srgbClr val="14181F"/>
-                          </a:solidFill>
-                          <a:latin typeface="Aptos"/>
-                        </a:rPr>
-                        <a:t>Grounded but wrong</a:t>
-                      </a:r>
-                    </a:p>
-                  </a:txBody>
-                  <a:tcPr>
+                        <a:rPr sz="860" b="0">
+                          <a:solidFill>
+                            <a:srgbClr val="111827"/>
+                          </a:solidFill>
+                        </a:rPr>
+                        <a:t>Grounding and answering separate</a:t>
+                      </a:r>
+                    </a:p>
+                  </a:txBody>
+                  <a:tcPr marL="54864" marR="54864" marT="27432" marB="27432" anchor="ctr">
                     <a:solidFill>
                       <a:srgbClr val="FFFFFF"/>
                     </a:solidFill>
@@ -6606,17 +7279,16 @@
                     <a:p>
                       <a:pPr algn="ctr"/>
                       <a:r>
-                        <a:rPr sz="1150" b="0">
-                          <a:solidFill>
-                            <a:srgbClr val="14181F"/>
-                          </a:solidFill>
-                          <a:latin typeface="Aptos"/>
-                        </a:rPr>
-                        <a:t>Selected evidence overlaps support span, but answer reasoning fails.</a:t>
-                      </a:r>
-                    </a:p>
-                  </a:txBody>
-                  <a:tcPr>
+                        <a:rPr sz="860" b="0">
+                          <a:solidFill>
+                            <a:srgbClr val="111827"/>
+                          </a:solidFill>
+                        </a:rPr>
+                        <a:t>High temporal overlap can still produce a wrong answer, and correct answers can be weakly grounded.</a:t>
+                      </a:r>
+                    </a:p>
+                  </a:txBody>
+                  <a:tcPr marL="54864" marR="54864" marT="27432" marB="27432" anchor="ctr">
                     <a:solidFill>
                       <a:srgbClr val="FFFFFF"/>
                     </a:solidFill>
@@ -6629,17 +7301,16 @@
                     <a:p>
                       <a:pPr algn="ctr"/>
                       <a:r>
-                        <a:rPr sz="1150" b="0">
-                          <a:solidFill>
-                            <a:srgbClr val="14181F"/>
-                          </a:solidFill>
-                          <a:latin typeface="Aptos"/>
-                        </a:rPr>
-                        <a:t>Evidence and reasoning are separate</a:t>
-                      </a:r>
-                    </a:p>
-                  </a:txBody>
-                  <a:tcPr>
+                        <a:rPr sz="860" b="0">
+                          <a:solidFill>
+                            <a:srgbClr val="111827"/>
+                          </a:solidFill>
+                        </a:rPr>
+                        <a:t>Report Acc@QA, cost, IoP/IoU, and Acc@GQA together</a:t>
+                      </a:r>
+                    </a:p>
+                  </a:txBody>
+                  <a:tcPr marL="54864" marR="54864" marT="27432" marB="27432" anchor="ctr">
                     <a:solidFill>
                       <a:srgbClr val="FFFFFF"/>
                     </a:solidFill>
@@ -6650,119 +7321,6 @@
           </a:graphicData>
         </a:graphic>
       </p:graphicFrame>
-      <p:sp>
-        <p:nvSpPr>
-          <p:cNvPr id="9" name="Rectangle 8"/>
-          <p:cNvSpPr/>
-          <p:nvPr/>
-        </p:nvSpPr>
-        <p:spPr>
-          <a:xfrm>
-            <a:off x="914400" y="4572000"/>
-            <a:ext cx="10378440" cy="960120"/>
-          </a:xfrm>
-          <a:prstGeom prst="rect">
-            <a:avLst/>
-          </a:prstGeom>
-          <a:solidFill>
-            <a:srgbClr val="E8F0FA"/>
-          </a:solidFill>
-          <a:ln w="15240">
-            <a:solidFill>
-              <a:srgbClr val="3B8B74"/>
-            </a:solidFill>
-          </a:ln>
-        </p:spPr>
-        <p:style>
-          <a:lnRef idx="1">
-            <a:schemeClr val="accent1"/>
-          </a:lnRef>
-          <a:fillRef idx="3">
-            <a:schemeClr val="accent1"/>
-          </a:fillRef>
-          <a:effectRef idx="2">
-            <a:schemeClr val="accent1"/>
-          </a:effectRef>
-          <a:fontRef idx="minor">
-            <a:schemeClr val="lt1"/>
-          </a:fontRef>
-        </p:style>
-        <p:txBody>
-          <a:bodyPr rtlCol="0" anchor="ctr"/>
-          <a:lstStyle/>
-          <a:p>
-            <a:pPr algn="ctr"/>
-          </a:p>
-        </p:txBody>
-      </p:sp>
-      <p:sp>
-        <p:nvSpPr>
-          <p:cNvPr id="10" name="TextBox 9"/>
-          <p:cNvSpPr txBox="1"/>
-          <p:nvPr/>
-        </p:nvSpPr>
-        <p:spPr>
-          <a:xfrm>
-            <a:off x="1078992" y="4681728"/>
-            <a:ext cx="10049256" cy="256032"/>
-          </a:xfrm>
-          <a:prstGeom prst="rect">
-            <a:avLst/>
-          </a:prstGeom>
-          <a:noFill/>
-        </p:spPr>
-        <p:txBody>
-          <a:bodyPr wrap="square">
-            <a:normAutofit/>
-          </a:bodyPr>
-          <a:lstStyle/>
-          <a:p>
-            <a:r>
-              <a:rPr sz="1500" b="1">
-                <a:solidFill>
-                  <a:srgbClr val="3B8B74"/>
-                </a:solidFill>
-                <a:latin typeface="Aptos"/>
-              </a:rPr>
-              <a:t>Takeaway</a:t>
-            </a:r>
-          </a:p>
-        </p:txBody>
-      </p:sp>
-      <p:sp>
-        <p:nvSpPr>
-          <p:cNvPr id="11" name="TextBox 10"/>
-          <p:cNvSpPr txBox="1"/>
-          <p:nvPr/>
-        </p:nvSpPr>
-        <p:spPr>
-          <a:xfrm>
-            <a:off x="1078992" y="5047488"/>
-            <a:ext cx="10049256" cy="374904"/>
-          </a:xfrm>
-          <a:prstGeom prst="rect">
-            <a:avLst/>
-          </a:prstGeom>
-          <a:noFill/>
-        </p:spPr>
-        <p:txBody>
-          <a:bodyPr wrap="square">
-            <a:normAutofit/>
-          </a:bodyPr>
-          <a:lstStyle/>
-          <a:p>
-            <a:r>
-              <a:rPr sz="1800" b="0">
-                <a:solidFill>
-                  <a:srgbClr val="14181F"/>
-                </a:solidFill>
-                <a:latin typeface="Aptos"/>
-              </a:rPr>
-              <a:t>Grounded VideoQA needs both components: evidence policy must find the right moment, and the answerer must reason from it.</a:t>
-            </a:r>
-          </a:p>
-        </p:txBody>
-      </p:sp>
     </p:spTree>
   </p:cSld>
   <p:clrMapOvr>
@@ -7002,13 +7560,12 @@
           <a:p>
             <a:pPr algn="r"/>
             <a:r>
-              <a:rPr sz="850" b="0">
+              <a:rPr sz="750">
                 <a:solidFill>
-                  <a:srgbClr val="19375C"/>
+                  <a:srgbClr val="374151"/>
                 </a:solidFill>
-                <a:latin typeface="Aptos"/>
               </a:rPr>
-              <a:t>Final Presentation</a:t>
+              <a:t>Research Presentation</a:t>
             </a:r>
           </a:p>
         </p:txBody>
@@ -7115,13 +7672,8 @@
           <a:lstStyle/>
           <a:p>
             <a:r>
-              <a:rPr sz="1700" b="0">
-                <a:solidFill>
-                  <a:srgbClr val="14181F"/>
-                </a:solidFill>
-                <a:latin typeface="Aptos"/>
-              </a:rPr>
-              <a:t>No. Evidence need varies; fixed context can be wasteful or weakly grounded.</a:t>
+              <a:rPr sz="1220"/>
+              <a:t>No. Some questions need one short segment; others need broader temporal coverage. Fixed context can be wasteful or weakly grounded.</a:t>
             </a:r>
           </a:p>
         </p:txBody>
@@ -7228,13 +7780,8 @@
           <a:lstStyle/>
           <a:p>
             <a:r>
-              <a:rPr sz="1700" b="0">
-                <a:solidFill>
-                  <a:srgbClr val="14181F"/>
-                </a:solidFill>
-                <a:latin typeface="Aptos"/>
-              </a:rPr>
-              <a:t>Yes. MLP+NMS evidence keeps about 95% of fixed 3+3 answer accuracy at 39% of the cost.</a:t>
+              <a:rPr sz="1220"/>
+              <a:t>Yes. MLP+NMS improves Acc@GQA by 10.0 points over one segment, keeps about 95% of fixed 3+3 answer accuracy, and uses 39% of its evidence cost.</a:t>
             </a:r>
           </a:p>
         </p:txBody>
@@ -7341,13 +7888,8 @@
           <a:lstStyle/>
           <a:p>
             <a:r>
-              <a:rPr sz="1700" b="0">
-                <a:solidFill>
-                  <a:srgbClr val="14181F"/>
-                </a:solidFill>
-                <a:latin typeface="Aptos"/>
-              </a:rPr>
-              <a:t>Both. The frozen answerer hides evidence gains; Qwen exposes the accuracy-cost-grounding frontier.</a:t>
+              <a:rPr sz="1220"/>
+              <a:t>Both, but the final gap is mainly routing. The frozen answerer hides evidence gains; Qwen exposes them; oracle top-2 shows compact support exists in the pool.</a:t>
             </a:r>
           </a:p>
         </p:txBody>
@@ -7376,13 +7918,12 @@
           <a:p>
             <a:pPr algn="ctr"/>
             <a:r>
-              <a:rPr sz="1600" b="0">
+              <a:rPr sz="1200" b="1">
                 <a:solidFill>
-                  <a:srgbClr val="5B6370"/>
+                  <a:srgbClr val="2F5E8D"/>
                 </a:solidFill>
-                <a:latin typeface="Aptos"/>
               </a:rPr>
-              <a:t>This answers the initial questions after the method and evidence-budget experiments.</a:t>
+              <a:t>The final claim is a Pareto view: answer accuracy, temporal grounding, and evidence cost must be reported together.</a:t>
             </a:r>
           </a:p>
         </p:txBody>
@@ -7626,13 +8167,12 @@
           <a:p>
             <a:pPr algn="r"/>
             <a:r>
-              <a:rPr sz="850" b="0">
+              <a:rPr sz="750">
                 <a:solidFill>
-                  <a:srgbClr val="19375C"/>
+                  <a:srgbClr val="374151"/>
                 </a:solidFill>
-                <a:latin typeface="Aptos"/>
               </a:rPr>
-              <a:t>Final Presentation</a:t>
+              <a:t>Research Presentation</a:t>
             </a:r>
           </a:p>
         </p:txBody>
@@ -7661,13 +8201,12 @@
           <a:p>
             <a:pPr algn="ctr"/>
             <a:r>
-              <a:rPr sz="2500" b="1">
+              <a:rPr sz="2000" b="1">
                 <a:solidFill>
-                  <a:srgbClr val="19375C"/>
+                  <a:srgbClr val="111827"/>
                 </a:solidFill>
-                <a:latin typeface="Aptos"/>
               </a:rPr>
-              <a:t>Grounded VideoQA should be evaluated as evidence selection plus answer generation.</a:t>
+              <a:t>Grounded VideoQA should be evaluated as evidence acquisition followed by answer generation.</a:t>
             </a:r>
           </a:p>
         </p:txBody>
@@ -7694,67 +8233,27 @@
           </a:bodyPr>
           <a:lstStyle/>
           <a:p>
-            <a:pPr marL="285750">
-              <a:spcAft>
-                <a:spcPts val="700"/>
-              </a:spcAft>
-              <a:defRPr sz="2100">
-                <a:solidFill>
-                  <a:srgbClr val="14181F"/>
-                </a:solidFill>
-                <a:latin typeface="Aptos"/>
-              </a:defRPr>
-            </a:pPr>
-            <a:r>
-              <a:t>A weak answerer can hide better evidence selection.</a:t>
-            </a:r>
-          </a:p>
-          <a:p>
-            <a:pPr marL="285750">
-              <a:spcAft>
-                <a:spcPts val="700"/>
-              </a:spcAft>
-              <a:defRPr sz="2100">
-                <a:solidFill>
-                  <a:srgbClr val="14181F"/>
-                </a:solidFill>
-                <a:latin typeface="Aptos"/>
-              </a:defRPr>
-            </a:pPr>
-            <a:r>
-              <a:t>A strong VLM makes compact evidence useful for answering.</a:t>
-            </a:r>
-          </a:p>
-          <a:p>
-            <a:pPr marL="285750">
-              <a:spcAft>
-                <a:spcPts val="700"/>
-              </a:spcAft>
-              <a:defRPr sz="2100">
-                <a:solidFill>
-                  <a:srgbClr val="14181F"/>
-                </a:solidFill>
-                <a:latin typeface="Aptos"/>
-              </a:defRPr>
-            </a:pPr>
-            <a:r>
-              <a:t>Faithful temporal grounding still benefits from broader evidence coverage.</a:t>
-            </a:r>
-          </a:p>
-          <a:p>
-            <a:pPr marL="285750">
-              <a:spcAft>
-                <a:spcPts val="700"/>
-              </a:spcAft>
-              <a:defRPr sz="2100">
-                <a:solidFill>
-                  <a:srgbClr val="14181F"/>
-                </a:solidFill>
-                <a:latin typeface="Aptos"/>
-              </a:defRPr>
-            </a:pPr>
-            <a:r>
-              <a:t>The result is a Pareto tradeoff, not a single winner.</a:t>
+            <a:r>
+              <a:rPr sz="1500"/>
+              <a:t>MLP+NMS is the best learned selector: 0.321 Acc@GQA at cost 2.935.</a:t>
+            </a:r>
+          </a:p>
+          <a:p>
+            <a:r>
+              <a:rPr sz="1500"/>
+              <a:t>Fixed 3+3 is strongest but expensive: 0.454 Acc@GQA at cost 7.500.</a:t>
+            </a:r>
+          </a:p>
+          <a:p>
+            <a:r>
+              <a:rPr sz="1500"/>
+              <a:t>Oracle top-2 reaches 0.442 Acc@GQA at cost 2.493, so compact support exists in the pool.</a:t>
+            </a:r>
+          </a:p>
+          <a:p>
+            <a:r>
+              <a:rPr sz="1500"/>
+              <a:t>The remaining bottleneck is ranking and diversifying the support evidence.</a:t>
             </a:r>
           </a:p>
         </p:txBody>
@@ -7827,11 +8326,10 @@
           <a:lstStyle/>
           <a:p>
             <a:r>
-              <a:rPr sz="1500" b="1">
+              <a:rPr sz="1250" b="1">
                 <a:solidFill>
-                  <a:srgbClr val="3B8B74"/>
+                  <a:srgbClr val="2F5E8D"/>
                 </a:solidFill>
-                <a:latin typeface="Aptos"/>
               </a:rPr>
               <a:t>One-line closing</a:t>
             </a:r>
@@ -7861,13 +8359,12 @@
           <a:lstStyle/>
           <a:p>
             <a:r>
-              <a:rPr sz="1800" b="0">
+              <a:rPr sz="1320" b="1">
                 <a:solidFill>
-                  <a:srgbClr val="14181F"/>
+                  <a:srgbClr val="111827"/>
                 </a:solidFill>
-                <a:latin typeface="Aptos"/>
               </a:rPr>
-              <a:t>Select enough evidence, not too much evidence, and verify that the answer is supported by the right moment.</a:t>
+              <a:t>Report answer accuracy, evidence cost, and temporal grounding together.</a:t>
             </a:r>
           </a:p>
         </p:txBody>
@@ -8111,13 +8608,12 @@
           <a:p>
             <a:pPr algn="r"/>
             <a:r>
-              <a:rPr sz="850" b="0">
+              <a:rPr sz="750">
                 <a:solidFill>
-                  <a:srgbClr val="19375C"/>
+                  <a:srgbClr val="374151"/>
                 </a:solidFill>
-                <a:latin typeface="Aptos"/>
               </a:rPr>
-              <a:t>Final Presentation</a:t>
+              <a:t>Research Presentation</a:t>
             </a:r>
           </a:p>
         </p:txBody>
@@ -8337,13 +8833,8 @@
           <a:lstStyle/>
           <a:p>
             <a:r>
-              <a:rPr sz="2000" b="0">
-                <a:solidFill>
-                  <a:srgbClr val="14181F"/>
-                </a:solidFill>
-                <a:latin typeface="Aptos"/>
-              </a:rPr>
-              <a:t>Q2. Can a compact learned policy preserve answer accuracy at lower cost?</a:t>
+              <a:rPr sz="1300"/>
+              <a:t>Q2. Can compact question-conditioned evidence improve grounding without using the full fixed budget?</a:t>
             </a:r>
           </a:p>
         </p:txBody>
@@ -8450,13 +8941,8 @@
           <a:lstStyle/>
           <a:p>
             <a:r>
-              <a:rPr sz="2000" b="0">
-                <a:solidFill>
-                  <a:srgbClr val="14181F"/>
-                </a:solidFill>
-                <a:latin typeface="Aptos"/>
-              </a:rPr>
-              <a:t>Q3. Is poor performance caused by weak evidence selection or by a weak answerer?</a:t>
+              <a:rPr sz="1300"/>
+              <a:t>Q3. Is the remaining gap caused by evidence routing, answerer strength, or candidate-pool quality?</a:t>
             </a:r>
           </a:p>
         </p:txBody>
@@ -8483,15 +8969,9 @@
           </a:bodyPr>
           <a:lstStyle/>
           <a:p>
-            <a:pPr algn="ctr"/>
-            <a:r>
-              <a:rPr sz="1800" b="0">
-                <a:solidFill>
-                  <a:srgbClr val="5B6370"/>
-                </a:solidFill>
-                <a:latin typeface="Aptos"/>
-              </a:rPr>
-              <a:t>We answer these after defining the task, method, and evidence-budget experiments.</a:t>
+            <a:r>
+              <a:rPr sz="1200"/>
+              <a:t>We answer these through controlled evidence-budget experiments and an answerer swap from a frozen scorer to Qwen2.5-VL.</a:t>
             </a:r>
           </a:p>
         </p:txBody>
@@ -8735,13 +9215,12 @@
           <a:p>
             <a:pPr algn="r"/>
             <a:r>
-              <a:rPr sz="850" b="0">
+              <a:rPr sz="750">
                 <a:solidFill>
-                  <a:srgbClr val="19375C"/>
+                  <a:srgbClr val="374151"/>
                 </a:solidFill>
-                <a:latin typeface="Aptos"/>
               </a:rPr>
-              <a:t>Final Presentation</a:t>
+              <a:t>Research Presentation</a:t>
             </a:r>
           </a:p>
         </p:txBody>
@@ -9516,20 +9995,126 @@
           <a:p>
             <a:pPr algn="r"/>
             <a:r>
-              <a:rPr sz="850" b="0">
+              <a:rPr sz="750">
                 <a:solidFill>
-                  <a:srgbClr val="19375C"/>
+                  <a:srgbClr val="374151"/>
                 </a:solidFill>
-                <a:latin typeface="Aptos"/>
               </a:rPr>
-              <a:t>Final Presentation</a:t>
+              <a:t>Research Presentation</a:t>
+            </a:r>
+          </a:p>
+        </p:txBody>
+      </p:sp>
+      <p:sp>
+        <p:nvSpPr>
+          <p:cNvPr id="9" name="Rectangle 8"/>
+          <p:cNvSpPr/>
+          <p:nvPr/>
+        </p:nvSpPr>
+        <p:spPr>
+          <a:xfrm>
+            <a:off x="822960" y="4617720"/>
+            <a:ext cx="10561320" cy="960120"/>
+          </a:xfrm>
+          <a:prstGeom prst="rect">
+            <a:avLst/>
+          </a:prstGeom>
+          <a:solidFill>
+            <a:srgbClr val="E8F0FA"/>
+          </a:solidFill>
+          <a:ln w="15240">
+            <a:solidFill>
+              <a:srgbClr val="B08400"/>
+            </a:solidFill>
+          </a:ln>
+        </p:spPr>
+        <p:style>
+          <a:lnRef idx="1">
+            <a:schemeClr val="accent1"/>
+          </a:lnRef>
+          <a:fillRef idx="3">
+            <a:schemeClr val="accent1"/>
+          </a:fillRef>
+          <a:effectRef idx="2">
+            <a:schemeClr val="accent1"/>
+          </a:effectRef>
+          <a:fontRef idx="minor">
+            <a:schemeClr val="lt1"/>
+          </a:fontRef>
+        </p:style>
+        <p:txBody>
+          <a:bodyPr rtlCol="0" anchor="ctr"/>
+          <a:lstStyle/>
+          <a:p>
+            <a:pPr algn="ctr"/>
+          </a:p>
+        </p:txBody>
+      </p:sp>
+      <p:sp>
+        <p:nvSpPr>
+          <p:cNvPr id="10" name="TextBox 9"/>
+          <p:cNvSpPr txBox="1"/>
+          <p:nvPr/>
+        </p:nvSpPr>
+        <p:spPr>
+          <a:xfrm>
+            <a:off x="987552" y="4727448"/>
+            <a:ext cx="10232136" cy="256032"/>
+          </a:xfrm>
+          <a:prstGeom prst="rect">
+            <a:avLst/>
+          </a:prstGeom>
+          <a:noFill/>
+        </p:spPr>
+        <p:txBody>
+          <a:bodyPr wrap="square">
+            <a:normAutofit/>
+          </a:bodyPr>
+          <a:lstStyle/>
+          <a:p>
+            <a:r>
+              <a:rPr sz="1300" b="1">
+                <a:solidFill>
+                  <a:srgbClr val="2F5E8D"/>
+                </a:solidFill>
+              </a:rPr>
+              <a:t>Gap</a:t>
+            </a:r>
+          </a:p>
+        </p:txBody>
+      </p:sp>
+      <p:sp>
+        <p:nvSpPr>
+          <p:cNvPr id="11" name="TextBox 10"/>
+          <p:cNvSpPr txBox="1"/>
+          <p:nvPr/>
+        </p:nvSpPr>
+        <p:spPr>
+          <a:xfrm>
+            <a:off x="987552" y="5093208"/>
+            <a:ext cx="10232136" cy="374904"/>
+          </a:xfrm>
+          <a:prstGeom prst="rect">
+            <a:avLst/>
+          </a:prstGeom>
+          <a:noFill/>
+        </p:spPr>
+        <p:txBody>
+          <a:bodyPr wrap="square">
+            <a:normAutofit/>
+          </a:bodyPr>
+          <a:lstStyle/>
+          <a:p>
+            <a:r>
+              <a:rPr sz="1150"/>
+              <a:t>Prior work often reports answer quality without jointly charging evidence cost and verifying temporal support. We evaluate Acc@QA, cost, IoP/IoU, and Acc@GQA under one evidence-selection protocol.</a:t>
             </a:r>
           </a:p>
         </p:txBody>
       </p:sp>
       <p:graphicFrame>
         <p:nvGraphicFramePr>
-          <p:cNvPr id="8" name="Table 7"/>
+          <p:cNvPr id="12" name="Table 11"/>
           <p:cNvGraphicFramePr>
             <a:graphicFrameLocks noGrp="1"/>
           </p:cNvGraphicFramePr>
@@ -9537,7 +10122,7 @@
         </p:nvGraphicFramePr>
         <p:xfrm>
           <a:off x="594360" y="914400"/>
-          <a:ext cx="11018520" cy="3337560"/>
+          <a:ext cx="11018518" cy="3337560"/>
         </p:xfrm>
         <a:graphic>
           <a:graphicData uri="http://schemas.openxmlformats.org/drawingml/2006/table">
@@ -9546,9 +10131,9 @@
                 <a:tableStyleId>{5C22544A-7EE6-4342-B048-85BDC9FD1C3A}</a:tableStyleId>
               </a:tblPr>
               <a:tblGrid>
-                <a:gridCol w="3672840"/>
-                <a:gridCol w="3672840"/>
-                <a:gridCol w="3672840"/>
+                <a:gridCol w="2586956"/>
+                <a:gridCol w="4599034"/>
+                <a:gridCol w="3832528"/>
               </a:tblGrid>
               <a:tr h="667512">
                 <a:tc>
@@ -9556,21 +10141,42 @@
                     <a:bodyPr/>
                     <a:lstStyle/>
                     <a:p>
+                      <a:pPr algn="l"/>
+                      <a:r>
+                        <a:rPr sz="880" b="1">
+                          <a:solidFill>
+                            <a:srgbClr val="FFFFFF"/>
+                          </a:solidFill>
+                        </a:rPr>
+                        <a:t>Area</a:t>
+                      </a:r>
+                    </a:p>
+                  </a:txBody>
+                  <a:tcPr marL="54864" marR="54864" marT="27432" marB="27432" anchor="ctr">
+                    <a:solidFill>
+                      <a:srgbClr val="2F5E8D"/>
+                    </a:solidFill>
+                  </a:tcPr>
+                </a:tc>
+                <a:tc>
+                  <a:txBody>
+                    <a:bodyPr/>
+                    <a:lstStyle/>
+                    <a:p>
                       <a:pPr algn="ctr"/>
                       <a:r>
-                        <a:rPr sz="1200" b="1">
+                        <a:rPr sz="880" b="1">
                           <a:solidFill>
                             <a:srgbClr val="FFFFFF"/>
                           </a:solidFill>
-                          <a:latin typeface="Aptos"/>
-                        </a:rPr>
-                        <a:t>Area</a:t>
-                      </a:r>
-                    </a:p>
-                  </a:txBody>
-                  <a:tcPr>
-                    <a:solidFill>
-                      <a:srgbClr val="2A598F"/>
+                        </a:rPr>
+                        <a:t>Examples</a:t>
+                      </a:r>
+                    </a:p>
+                  </a:txBody>
+                  <a:tcPr marL="54864" marR="54864" marT="27432" marB="27432" anchor="ctr">
+                    <a:solidFill>
+                      <a:srgbClr val="2F5E8D"/>
                     </a:solidFill>
                   </a:tcPr>
                 </a:tc>
@@ -9581,42 +10187,18 @@
                     <a:p>
                       <a:pPr algn="ctr"/>
                       <a:r>
-                        <a:rPr sz="1200" b="1">
+                        <a:rPr sz="880" b="1">
                           <a:solidFill>
                             <a:srgbClr val="FFFFFF"/>
                           </a:solidFill>
-                          <a:latin typeface="Aptos"/>
-                        </a:rPr>
-                        <a:t>Examples</a:t>
-                      </a:r>
-                    </a:p>
-                  </a:txBody>
-                  <a:tcPr>
-                    <a:solidFill>
-                      <a:srgbClr val="2A598F"/>
-                    </a:solidFill>
-                  </a:tcPr>
-                </a:tc>
-                <a:tc>
-                  <a:txBody>
-                    <a:bodyPr/>
-                    <a:lstStyle/>
-                    <a:p>
-                      <a:pPr algn="ctr"/>
-                      <a:r>
-                        <a:rPr sz="1200" b="1">
-                          <a:solidFill>
-                            <a:srgbClr val="FFFFFF"/>
-                          </a:solidFill>
-                          <a:latin typeface="Aptos"/>
                         </a:rPr>
                         <a:t>What they provide</a:t>
                       </a:r>
                     </a:p>
                   </a:txBody>
-                  <a:tcPr>
-                    <a:solidFill>
-                      <a:srgbClr val="2A598F"/>
+                  <a:tcPr marL="54864" marR="54864" marT="27432" marB="27432" anchor="ctr">
+                    <a:solidFill>
+                      <a:srgbClr val="2F5E8D"/>
                     </a:solidFill>
                   </a:tcPr>
                 </a:tc>
@@ -9629,17 +10211,16 @@
                     <a:p>
                       <a:pPr algn="l"/>
                       <a:r>
-                        <a:rPr sz="1200" b="0">
-                          <a:solidFill>
-                            <a:srgbClr val="14181F"/>
-                          </a:solidFill>
-                          <a:latin typeface="Aptos"/>
+                        <a:rPr sz="800" b="0">
+                          <a:solidFill>
+                            <a:srgbClr val="111827"/>
+                          </a:solidFill>
                         </a:rPr>
                         <a:t>VideoQA benchmarks</a:t>
                       </a:r>
                     </a:p>
                   </a:txBody>
-                  <a:tcPr>
+                  <a:tcPr marL="54864" marR="54864" marT="27432" marB="27432" anchor="ctr">
                     <a:solidFill>
                       <a:srgbClr val="FFFFFF"/>
                     </a:solidFill>
@@ -9652,17 +10233,16 @@
                     <a:p>
                       <a:pPr algn="ctr"/>
                       <a:r>
-                        <a:rPr sz="1200" b="0">
-                          <a:solidFill>
-                            <a:srgbClr val="14181F"/>
-                          </a:solidFill>
-                          <a:latin typeface="Aptos"/>
+                        <a:rPr sz="800" b="0">
+                          <a:solidFill>
+                            <a:srgbClr val="111827"/>
+                          </a:solidFill>
                         </a:rPr>
                         <a:t>MovieQA, TGIF-QA, TVQA, NExT-QA</a:t>
                       </a:r>
                     </a:p>
                   </a:txBody>
-                  <a:tcPr>
+                  <a:tcPr marL="54864" marR="54864" marT="27432" marB="27432" anchor="ctr">
                     <a:solidFill>
                       <a:srgbClr val="FFFFFF"/>
                     </a:solidFill>
@@ -9675,17 +10255,16 @@
                     <a:p>
                       <a:pPr algn="ctr"/>
                       <a:r>
-                        <a:rPr sz="1200" b="0">
-                          <a:solidFill>
-                            <a:srgbClr val="14181F"/>
-                          </a:solidFill>
-                          <a:latin typeface="Aptos"/>
-                        </a:rPr>
-                        <a:t>Temporal and causal reasoning</a:t>
-                      </a:r>
-                    </a:p>
-                  </a:txBody>
-                  <a:tcPr>
+                        <a:rPr sz="800" b="0">
+                          <a:solidFill>
+                            <a:srgbClr val="111827"/>
+                          </a:solidFill>
+                        </a:rPr>
+                        <a:t>Temporal and causal reasoning tasks</a:t>
+                      </a:r>
+                    </a:p>
+                  </a:txBody>
+                  <a:tcPr marL="54864" marR="54864" marT="27432" marB="27432" anchor="ctr">
                     <a:solidFill>
                       <a:srgbClr val="FFFFFF"/>
                     </a:solidFill>
@@ -9700,19 +10279,18 @@
                     <a:p>
                       <a:pPr algn="l"/>
                       <a:r>
-                        <a:rPr sz="1200" b="0">
-                          <a:solidFill>
-                            <a:srgbClr val="14181F"/>
-                          </a:solidFill>
-                          <a:latin typeface="Aptos"/>
-                        </a:rPr>
-                        <a:t>Grounded VideoQA</a:t>
-                      </a:r>
-                    </a:p>
-                  </a:txBody>
-                  <a:tcPr>
-                    <a:solidFill>
-                      <a:srgbClr val="F4F6F9"/>
+                        <a:rPr sz="800" b="0">
+                          <a:solidFill>
+                            <a:srgbClr val="111827"/>
+                          </a:solidFill>
+                        </a:rPr>
+                        <a:t>Grounded VideoQA / localization</a:t>
+                      </a:r>
+                    </a:p>
+                  </a:txBody>
+                  <a:tcPr marL="54864" marR="54864" marT="27432" marB="27432" anchor="ctr">
+                    <a:solidFill>
+                      <a:srgbClr val="F6F8FB"/>
                     </a:solidFill>
                   </a:tcPr>
                 </a:tc>
@@ -9723,19 +10301,18 @@
                     <a:p>
                       <a:pPr algn="ctr"/>
                       <a:r>
-                        <a:rPr sz="1200" b="0">
-                          <a:solidFill>
-                            <a:srgbClr val="14181F"/>
-                          </a:solidFill>
-                          <a:latin typeface="Aptos"/>
-                        </a:rPr>
-                        <a:t>TVQA+, NExT-GQA</a:t>
-                      </a:r>
-                    </a:p>
-                  </a:txBody>
-                  <a:tcPr>
-                    <a:solidFill>
-                      <a:srgbClr val="F4F6F9"/>
+                        <a:rPr sz="800" b="0">
+                          <a:solidFill>
+                            <a:srgbClr val="111827"/>
+                          </a:solidFill>
+                        </a:rPr>
+                        <a:t>TVQA+, NExT-GQA, Moment-DETR/QVHighlights, SeViLA</a:t>
+                      </a:r>
+                    </a:p>
+                  </a:txBody>
+                  <a:tcPr marL="54864" marR="54864" marT="27432" marB="27432" anchor="ctr">
+                    <a:solidFill>
+                      <a:srgbClr val="F6F8FB"/>
                     </a:solidFill>
                   </a:tcPr>
                 </a:tc>
@@ -9746,19 +10323,18 @@
                     <a:p>
                       <a:pPr algn="ctr"/>
                       <a:r>
-                        <a:rPr sz="1200" b="0">
-                          <a:solidFill>
-                            <a:srgbClr val="14181F"/>
-                          </a:solidFill>
-                          <a:latin typeface="Aptos"/>
-                        </a:rPr>
-                        <a:t>Answer must be supported by temporal evidence</a:t>
-                      </a:r>
-                    </a:p>
-                  </a:txBody>
-                  <a:tcPr>
-                    <a:solidFill>
-                      <a:srgbClr val="F4F6F9"/>
+                        <a:rPr sz="800" b="0">
+                          <a:solidFill>
+                            <a:srgbClr val="111827"/>
+                          </a:solidFill>
+                        </a:rPr>
+                        <a:t>Answer support and temporal evidence annotations</a:t>
+                      </a:r>
+                    </a:p>
+                  </a:txBody>
+                  <a:tcPr marL="54864" marR="54864" marT="27432" marB="27432" anchor="ctr">
+                    <a:solidFill>
+                      <a:srgbClr val="F6F8FB"/>
                     </a:solidFill>
                   </a:tcPr>
                 </a:tc>
@@ -9771,17 +10347,16 @@
                     <a:p>
                       <a:pPr algn="l"/>
                       <a:r>
-                        <a:rPr sz="1200" b="0">
-                          <a:solidFill>
-                            <a:srgbClr val="14181F"/>
-                          </a:solidFill>
-                          <a:latin typeface="Aptos"/>
-                        </a:rPr>
-                        <a:t>Pretrained VLMs</a:t>
-                      </a:r>
-                    </a:p>
-                  </a:txBody>
-                  <a:tcPr>
+                        <a:rPr sz="800" b="0">
+                          <a:solidFill>
+                            <a:srgbClr val="111827"/>
+                          </a:solidFill>
+                        </a:rPr>
+                        <a:t>Pretrained answerers</a:t>
+                      </a:r>
+                    </a:p>
+                  </a:txBody>
+                  <a:tcPr marL="54864" marR="54864" marT="27432" marB="27432" anchor="ctr">
                     <a:solidFill>
                       <a:srgbClr val="FFFFFF"/>
                     </a:solidFill>
@@ -9794,17 +10369,16 @@
                     <a:p>
                       <a:pPr algn="ctr"/>
                       <a:r>
-                        <a:rPr sz="1200" b="0">
-                          <a:solidFill>
-                            <a:srgbClr val="14181F"/>
-                          </a:solidFill>
-                          <a:latin typeface="Aptos"/>
-                        </a:rPr>
-                        <a:t>CLIP, FrozenBiLM, SeViLA, Qwen2.5-VL</a:t>
-                      </a:r>
-                    </a:p>
-                  </a:txBody>
-                  <a:tcPr>
+                        <a:rPr sz="800" b="0">
+                          <a:solidFill>
+                            <a:srgbClr val="111827"/>
+                          </a:solidFill>
+                        </a:rPr>
+                        <a:t>CLIP, FrozenBiLM, BLIP-2/InstructBLIP, Video-LLaVA, Qwen2.5-VL</a:t>
+                      </a:r>
+                    </a:p>
+                  </a:txBody>
+                  <a:tcPr marL="54864" marR="54864" marT="27432" marB="27432" anchor="ctr">
                     <a:solidFill>
                       <a:srgbClr val="FFFFFF"/>
                     </a:solidFill>
@@ -9817,17 +10391,16 @@
                     <a:p>
                       <a:pPr algn="ctr"/>
                       <a:r>
-                        <a:rPr sz="1200" b="0">
-                          <a:solidFill>
-                            <a:srgbClr val="14181F"/>
-                          </a:solidFill>
-                          <a:latin typeface="Aptos"/>
-                        </a:rPr>
-                        <a:t>Strong visual-language reasoning</a:t>
-                      </a:r>
-                    </a:p>
-                  </a:txBody>
-                  <a:tcPr>
+                        <a:rPr sz="800" b="0">
+                          <a:solidFill>
+                            <a:srgbClr val="111827"/>
+                          </a:solidFill>
+                        </a:rPr>
+                        <a:t>Strong visual-language reasoning backbones</a:t>
+                      </a:r>
+                    </a:p>
+                  </a:txBody>
+                  <a:tcPr marL="54864" marR="54864" marT="27432" marB="27432" anchor="ctr">
                     <a:solidFill>
                       <a:srgbClr val="FFFFFF"/>
                     </a:solidFill>
@@ -9842,19 +10415,18 @@
                     <a:p>
                       <a:pPr algn="l"/>
                       <a:r>
-                        <a:rPr sz="1200" b="0">
-                          <a:solidFill>
-                            <a:srgbClr val="14181F"/>
-                          </a:solidFill>
-                          <a:latin typeface="Aptos"/>
+                        <a:rPr sz="800" b="0">
+                          <a:solidFill>
+                            <a:srgbClr val="111827"/>
+                          </a:solidFill>
                         </a:rPr>
                         <a:t>Retrieval-augmented video</a:t>
                       </a:r>
                     </a:p>
                   </a:txBody>
-                  <a:tcPr>
-                    <a:solidFill>
-                      <a:srgbClr val="F4F6F9"/>
+                  <a:tcPr marL="54864" marR="54864" marT="27432" marB="27432" anchor="ctr">
+                    <a:solidFill>
+                      <a:srgbClr val="F6F8FB"/>
                     </a:solidFill>
                   </a:tcPr>
                 </a:tc>
@@ -9865,19 +10437,18 @@
                     <a:p>
                       <a:pPr algn="ctr"/>
                       <a:r>
-                        <a:rPr sz="1200" b="0">
-                          <a:solidFill>
-                            <a:srgbClr val="14181F"/>
-                          </a:solidFill>
-                          <a:latin typeface="Aptos"/>
-                        </a:rPr>
-                        <a:t>VideoRAG-style selective context</a:t>
-                      </a:r>
-                    </a:p>
-                  </a:txBody>
-                  <a:tcPr>
-                    <a:solidFill>
-                      <a:srgbClr val="F4F6F9"/>
+                        <a:rPr sz="800" b="0">
+                          <a:solidFill>
+                            <a:srgbClr val="111827"/>
+                          </a:solidFill>
+                        </a:rPr>
+                        <a:t>R2A, VideoRAG/VRAG, UniversalRAG, ModaRoute</a:t>
+                      </a:r>
+                    </a:p>
+                  </a:txBody>
+                  <a:tcPr marL="54864" marR="54864" marT="27432" marB="27432" anchor="ctr">
+                    <a:solidFill>
+                      <a:srgbClr val="F6F8FB"/>
                     </a:solidFill>
                   </a:tcPr>
                 </a:tc>
@@ -9888,19 +10459,18 @@
                     <a:p>
                       <a:pPr algn="ctr"/>
                       <a:r>
-                        <a:rPr sz="1200" b="0">
-                          <a:solidFill>
-                            <a:srgbClr val="14181F"/>
-                          </a:solidFill>
-                          <a:latin typeface="Aptos"/>
-                        </a:rPr>
-                        <a:t>Long-video evidence construction</a:t>
-                      </a:r>
-                    </a:p>
-                  </a:txBody>
-                  <a:tcPr>
-                    <a:solidFill>
-                      <a:srgbClr val="F4F6F9"/>
+                        <a:rPr sz="800" b="0">
+                          <a:solidFill>
+                            <a:srgbClr val="111827"/>
+                          </a:solidFill>
+                        </a:rPr>
+                        <a:t>Selective context construction for long videos</a:t>
+                      </a:r>
+                    </a:p>
+                  </a:txBody>
+                  <a:tcPr marL="54864" marR="54864" marT="27432" marB="27432" anchor="ctr">
+                    <a:solidFill>
+                      <a:srgbClr val="F6F8FB"/>
                     </a:solidFill>
                   </a:tcPr>
                 </a:tc>
@@ -9909,119 +10479,6 @@
           </a:graphicData>
         </a:graphic>
       </p:graphicFrame>
-      <p:sp>
-        <p:nvSpPr>
-          <p:cNvPr id="9" name="Rectangle 8"/>
-          <p:cNvSpPr/>
-          <p:nvPr/>
-        </p:nvSpPr>
-        <p:spPr>
-          <a:xfrm>
-            <a:off x="822960" y="4617720"/>
-            <a:ext cx="10561320" cy="960120"/>
-          </a:xfrm>
-          <a:prstGeom prst="rect">
-            <a:avLst/>
-          </a:prstGeom>
-          <a:solidFill>
-            <a:srgbClr val="E8F0FA"/>
-          </a:solidFill>
-          <a:ln w="15240">
-            <a:solidFill>
-              <a:srgbClr val="B08400"/>
-            </a:solidFill>
-          </a:ln>
-        </p:spPr>
-        <p:style>
-          <a:lnRef idx="1">
-            <a:schemeClr val="accent1"/>
-          </a:lnRef>
-          <a:fillRef idx="3">
-            <a:schemeClr val="accent1"/>
-          </a:fillRef>
-          <a:effectRef idx="2">
-            <a:schemeClr val="accent1"/>
-          </a:effectRef>
-          <a:fontRef idx="minor">
-            <a:schemeClr val="lt1"/>
-          </a:fontRef>
-        </p:style>
-        <p:txBody>
-          <a:bodyPr rtlCol="0" anchor="ctr"/>
-          <a:lstStyle/>
-          <a:p>
-            <a:pPr algn="ctr"/>
-          </a:p>
-        </p:txBody>
-      </p:sp>
-      <p:sp>
-        <p:nvSpPr>
-          <p:cNvPr id="10" name="TextBox 9"/>
-          <p:cNvSpPr txBox="1"/>
-          <p:nvPr/>
-        </p:nvSpPr>
-        <p:spPr>
-          <a:xfrm>
-            <a:off x="987552" y="4727448"/>
-            <a:ext cx="10232136" cy="256032"/>
-          </a:xfrm>
-          <a:prstGeom prst="rect">
-            <a:avLst/>
-          </a:prstGeom>
-          <a:noFill/>
-        </p:spPr>
-        <p:txBody>
-          <a:bodyPr wrap="square">
-            <a:normAutofit/>
-          </a:bodyPr>
-          <a:lstStyle/>
-          <a:p>
-            <a:r>
-              <a:rPr sz="1500" b="1">
-                <a:solidFill>
-                  <a:srgbClr val="B08400"/>
-                </a:solidFill>
-                <a:latin typeface="Aptos"/>
-              </a:rPr>
-              <a:t>Gap</a:t>
-            </a:r>
-          </a:p>
-        </p:txBody>
-      </p:sp>
-      <p:sp>
-        <p:nvSpPr>
-          <p:cNvPr id="11" name="TextBox 10"/>
-          <p:cNvSpPr txBox="1"/>
-          <p:nvPr/>
-        </p:nvSpPr>
-        <p:spPr>
-          <a:xfrm>
-            <a:off x="987552" y="5093208"/>
-            <a:ext cx="10232136" cy="374904"/>
-          </a:xfrm>
-          <a:prstGeom prst="rect">
-            <a:avLst/>
-          </a:prstGeom>
-          <a:noFill/>
-        </p:spPr>
-        <p:txBody>
-          <a:bodyPr wrap="square">
-            <a:normAutofit/>
-          </a:bodyPr>
-          <a:lstStyle/>
-          <a:p>
-            <a:r>
-              <a:rPr sz="1800" b="0">
-                <a:solidFill>
-                  <a:srgbClr val="14181F"/>
-                </a:solidFill>
-                <a:latin typeface="Aptos"/>
-              </a:rPr>
-              <a:t>Prior work often fixes the amount of context or reports answer quality without jointly charging evidence cost and measuring temporal support.</a:t>
-            </a:r>
-          </a:p>
-        </p:txBody>
-      </p:sp>
     </p:spTree>
   </p:cSld>
   <p:clrMapOvr>
@@ -10261,13 +10718,12 @@
           <a:p>
             <a:pPr algn="r"/>
             <a:r>
-              <a:rPr sz="850" b="0">
+              <a:rPr sz="750">
                 <a:solidFill>
-                  <a:srgbClr val="19375C"/>
+                  <a:srgbClr val="374151"/>
                 </a:solidFill>
-                <a:latin typeface="Aptos"/>
               </a:rPr>
-              <a:t>Final Presentation</a:t>
+              <a:t>Research Presentation</a:t>
             </a:r>
           </a:p>
         </p:txBody>
@@ -11010,13 +11466,12 @@
           <a:p>
             <a:pPr algn="r"/>
             <a:r>
-              <a:rPr sz="850" b="0">
+              <a:rPr sz="750">
                 <a:solidFill>
-                  <a:srgbClr val="19375C"/>
+                  <a:srgbClr val="374151"/>
                 </a:solidFill>
-                <a:latin typeface="Aptos"/>
               </a:rPr>
-              <a:t>Final Presentation</a:t>
+              <a:t>Research Presentation</a:t>
             </a:r>
           </a:p>
         </p:txBody>
@@ -11113,11 +11568,10 @@
           <a:lstStyle/>
           <a:p>
             <a:r>
-              <a:rPr sz="1100" b="1">
+              <a:rPr sz="1300" b="1">
                 <a:solidFill>
-                  <a:srgbClr val="2A598F"/>
+                  <a:srgbClr val="2F5E8D"/>
                 </a:solidFill>
-                <a:latin typeface="Aptos"/>
               </a:rPr>
               <a:t>Candidate pool</a:t>
             </a:r>
@@ -11147,13 +11601,8 @@
           <a:lstStyle/>
           <a:p>
             <a:r>
-              <a:rPr sz="1200" b="0">
-                <a:solidFill>
-                  <a:srgbClr val="14181F"/>
-                </a:solidFill>
-                <a:latin typeface="Aptos"/>
-              </a:rPr>
-              <a:t>Sample frames and 4s sliding segments; rank top candidates with CLIP question-option similarity.</a:t>
+              <a:rPr sz="1130"/>
+              <a:t>Sample frames and short temporal segments; store interval, modality, retrieval score, and cost for each candidate.</a:t>
             </a:r>
           </a:p>
         </p:txBody>
@@ -11226,11 +11675,10 @@
           <a:lstStyle/>
           <a:p>
             <a:r>
-              <a:rPr sz="1100" b="1">
+              <a:rPr sz="1300" b="1">
                 <a:solidFill>
-                  <a:srgbClr val="3B8B74"/>
+                  <a:srgbClr val="2F5E8D"/>
                 </a:solidFill>
-                <a:latin typeface="Aptos"/>
               </a:rPr>
               <a:t>Controlled answerer swap</a:t>
             </a:r>
@@ -11260,13 +11708,8 @@
           <a:lstStyle/>
           <a:p>
             <a:r>
-              <a:rPr sz="1200" b="0">
-                <a:solidFill>
-                  <a:srgbClr val="14181F"/>
-                </a:solidFill>
-                <a:latin typeface="Aptos"/>
-              </a:rPr>
-              <a:t>Keep selected evidence fixed, then swap only the answerer to separate evidence quality from reasoning quality.</a:t>
+              <a:rPr sz="1130"/>
+              <a:t>Keep the selected evidence fixed, then swap only the answerer. This separates routing quality from visual reasoning quality.</a:t>
             </a:r>
           </a:p>
         </p:txBody>
@@ -11510,28 +11953,241 @@
           <a:p>
             <a:pPr algn="r"/>
             <a:r>
-              <a:rPr sz="850" b="0">
+              <a:rPr sz="750">
                 <a:solidFill>
-                  <a:srgbClr val="19375C"/>
+                  <a:srgbClr val="374151"/>
                 </a:solidFill>
-                <a:latin typeface="Aptos"/>
               </a:rPr>
-              <a:t>Final Presentation</a:t>
+              <a:t>Research Presentation</a:t>
+            </a:r>
+          </a:p>
+        </p:txBody>
+      </p:sp>
+      <p:sp>
+        <p:nvSpPr>
+          <p:cNvPr id="9" name="Rectangle 8"/>
+          <p:cNvSpPr/>
+          <p:nvPr/>
+        </p:nvSpPr>
+        <p:spPr>
+          <a:xfrm>
+            <a:off x="914400" y="4160520"/>
+            <a:ext cx="4800600" cy="1234440"/>
+          </a:xfrm>
+          <a:prstGeom prst="rect">
+            <a:avLst/>
+          </a:prstGeom>
+          <a:solidFill>
+            <a:srgbClr val="E8F0FA"/>
+          </a:solidFill>
+          <a:ln w="15240">
+            <a:solidFill>
+              <a:srgbClr val="2A598F"/>
+            </a:solidFill>
+          </a:ln>
+        </p:spPr>
+        <p:style>
+          <a:lnRef idx="1">
+            <a:schemeClr val="accent1"/>
+          </a:lnRef>
+          <a:fillRef idx="3">
+            <a:schemeClr val="accent1"/>
+          </a:fillRef>
+          <a:effectRef idx="2">
+            <a:schemeClr val="accent1"/>
+          </a:effectRef>
+          <a:fontRef idx="minor">
+            <a:schemeClr val="lt1"/>
+          </a:fontRef>
+        </p:style>
+        <p:txBody>
+          <a:bodyPr rtlCol="0" anchor="ctr"/>
+          <a:lstStyle/>
+          <a:p>
+            <a:pPr algn="ctr"/>
+          </a:p>
+        </p:txBody>
+      </p:sp>
+      <p:sp>
+        <p:nvSpPr>
+          <p:cNvPr id="10" name="TextBox 9"/>
+          <p:cNvSpPr txBox="1"/>
+          <p:nvPr/>
+        </p:nvSpPr>
+        <p:spPr>
+          <a:xfrm>
+            <a:off x="1078992" y="4270248"/>
+            <a:ext cx="4471416" cy="256032"/>
+          </a:xfrm>
+          <a:prstGeom prst="rect">
+            <a:avLst/>
+          </a:prstGeom>
+          <a:noFill/>
+        </p:spPr>
+        <p:txBody>
+          <a:bodyPr wrap="square">
+            <a:normAutofit/>
+          </a:bodyPr>
+          <a:lstStyle/>
+          <a:p>
+            <a:r>
+              <a:rPr sz="1250" b="1">
+                <a:solidFill>
+                  <a:srgbClr val="2F5E8D"/>
+                </a:solidFill>
+              </a:rPr>
+              <a:t>Training and roles</a:t>
+            </a:r>
+          </a:p>
+        </p:txBody>
+      </p:sp>
+      <p:sp>
+        <p:nvSpPr>
+          <p:cNvPr id="11" name="TextBox 10"/>
+          <p:cNvSpPr txBox="1"/>
+          <p:nvPr/>
+        </p:nvSpPr>
+        <p:spPr>
+          <a:xfrm>
+            <a:off x="1078992" y="4636008"/>
+            <a:ext cx="4471416" cy="649224"/>
+          </a:xfrm>
+          <a:prstGeom prst="rect">
+            <a:avLst/>
+          </a:prstGeom>
+          <a:noFill/>
+        </p:spPr>
+        <p:txBody>
+          <a:bodyPr wrap="square">
+            <a:normAutofit/>
+          </a:bodyPr>
+          <a:lstStyle/>
+          <a:p>
+            <a:r>
+              <a:rPr sz="1040"/>
+              <a:t>Linear policy uses oracle-trace imitation. MLP+NMS is the final learned router; temporal NMS discourages redundant intervals. Qwen is only the answerer.</a:t>
+            </a:r>
+          </a:p>
+        </p:txBody>
+      </p:sp>
+      <p:sp>
+        <p:nvSpPr>
+          <p:cNvPr id="12" name="Rectangle 11"/>
+          <p:cNvSpPr/>
+          <p:nvPr/>
+        </p:nvSpPr>
+        <p:spPr>
+          <a:xfrm>
+            <a:off x="6400800" y="4160520"/>
+            <a:ext cx="4800600" cy="1234440"/>
+          </a:xfrm>
+          <a:prstGeom prst="rect">
+            <a:avLst/>
+          </a:prstGeom>
+          <a:solidFill>
+            <a:srgbClr val="E8F0FA"/>
+          </a:solidFill>
+          <a:ln w="15240">
+            <a:solidFill>
+              <a:srgbClr val="3B8B74"/>
+            </a:solidFill>
+          </a:ln>
+        </p:spPr>
+        <p:style>
+          <a:lnRef idx="1">
+            <a:schemeClr val="accent1"/>
+          </a:lnRef>
+          <a:fillRef idx="3">
+            <a:schemeClr val="accent1"/>
+          </a:fillRef>
+          <a:effectRef idx="2">
+            <a:schemeClr val="accent1"/>
+          </a:effectRef>
+          <a:fontRef idx="minor">
+            <a:schemeClr val="lt1"/>
+          </a:fontRef>
+        </p:style>
+        <p:txBody>
+          <a:bodyPr rtlCol="0" anchor="ctr"/>
+          <a:lstStyle/>
+          <a:p>
+            <a:pPr algn="ctr"/>
+          </a:p>
+        </p:txBody>
+      </p:sp>
+      <p:sp>
+        <p:nvSpPr>
+          <p:cNvPr id="13" name="TextBox 12"/>
+          <p:cNvSpPr txBox="1"/>
+          <p:nvPr/>
+        </p:nvSpPr>
+        <p:spPr>
+          <a:xfrm>
+            <a:off x="6565392" y="4270248"/>
+            <a:ext cx="4471416" cy="256032"/>
+          </a:xfrm>
+          <a:prstGeom prst="rect">
+            <a:avLst/>
+          </a:prstGeom>
+          <a:noFill/>
+        </p:spPr>
+        <p:txBody>
+          <a:bodyPr wrap="square">
+            <a:normAutofit/>
+          </a:bodyPr>
+          <a:lstStyle/>
+          <a:p>
+            <a:r>
+              <a:rPr sz="1250" b="1">
+                <a:solidFill>
+                  <a:srgbClr val="BC8600"/>
+                </a:solidFill>
+              </a:rPr>
+              <a:t>References</a:t>
+            </a:r>
+          </a:p>
+        </p:txBody>
+      </p:sp>
+      <p:sp>
+        <p:nvSpPr>
+          <p:cNvPr id="14" name="TextBox 13"/>
+          <p:cNvSpPr txBox="1"/>
+          <p:nvPr/>
+        </p:nvSpPr>
+        <p:spPr>
+          <a:xfrm>
+            <a:off x="6565392" y="4636008"/>
+            <a:ext cx="4471416" cy="649224"/>
+          </a:xfrm>
+          <a:prstGeom prst="rect">
+            <a:avLst/>
+          </a:prstGeom>
+          <a:noFill/>
+        </p:spPr>
+        <p:txBody>
+          <a:bodyPr wrap="square">
+            <a:normAutofit/>
+          </a:bodyPr>
+          <a:lstStyle/>
+          <a:p>
+            <a:r>
+              <a:rPr sz="1040"/>
+              <a:t>Temporal-supervised, oracle, and fixed 3+3 rows are diagnostic/reference rows, not the proposed method.</a:t>
             </a:r>
           </a:p>
         </p:txBody>
       </p:sp>
       <p:graphicFrame>
         <p:nvGraphicFramePr>
-          <p:cNvPr id="8" name="Table 7"/>
+          <p:cNvPr id="15" name="Table 14"/>
           <p:cNvGraphicFramePr>
             <a:graphicFrameLocks noGrp="1"/>
           </p:cNvGraphicFramePr>
           <p:nvPr/>
         </p:nvGraphicFramePr>
         <p:xfrm>
-          <a:off x="640080" y="868680"/>
-          <a:ext cx="10927080" cy="2743200"/>
+          <a:off x="548640" y="704088"/>
+          <a:ext cx="11018517" cy="3429000"/>
         </p:xfrm>
         <a:graphic>
           <a:graphicData uri="http://schemas.openxmlformats.org/drawingml/2006/table">
@@ -11540,13 +12196,35 @@
                 <a:tableStyleId>{5C22544A-7EE6-4342-B048-85BDC9FD1C3A}</a:tableStyleId>
               </a:tblPr>
               <a:tblGrid>
-                <a:gridCol w="2185416"/>
-                <a:gridCol w="2185416"/>
-                <a:gridCol w="2185416"/>
-                <a:gridCol w="2185416"/>
-                <a:gridCol w="2185416"/>
+                <a:gridCol w="2383814"/>
+                <a:gridCol w="3531576"/>
+                <a:gridCol w="1094788"/>
+                <a:gridCol w="1271367"/>
+                <a:gridCol w="2736972"/>
               </a:tblGrid>
-              <a:tr h="548640">
+              <a:tr h="428625">
+                <a:tc>
+                  <a:txBody>
+                    <a:bodyPr/>
+                    <a:lstStyle/>
+                    <a:p>
+                      <a:pPr algn="l"/>
+                      <a:r>
+                        <a:rPr sz="800" b="1">
+                          <a:solidFill>
+                            <a:srgbClr val="FFFFFF"/>
+                          </a:solidFill>
+                        </a:rPr>
+                        <a:t>Policy</a:t>
+                      </a:r>
+                    </a:p>
+                  </a:txBody>
+                  <a:tcPr marL="54864" marR="54864" marT="27432" marB="27432" anchor="ctr">
+                    <a:solidFill>
+                      <a:srgbClr val="2F5E8D"/>
+                    </a:solidFill>
+                  </a:tcPr>
+                </a:tc>
                 <a:tc>
                   <a:txBody>
                     <a:bodyPr/>
@@ -11554,19 +12232,18 @@
                     <a:p>
                       <a:pPr algn="ctr"/>
                       <a:r>
-                        <a:rPr sz="1150" b="1">
+                        <a:rPr sz="800" b="1">
                           <a:solidFill>
                             <a:srgbClr val="FFFFFF"/>
                           </a:solidFill>
-                          <a:latin typeface="Aptos"/>
-                        </a:rPr>
-                        <a:t>Policy</a:t>
-                      </a:r>
-                    </a:p>
-                  </a:txBody>
-                  <a:tcPr>
-                    <a:solidFill>
-                      <a:srgbClr val="2A598F"/>
+                        </a:rPr>
+                        <a:t>Selection</a:t>
+                      </a:r>
+                    </a:p>
+                  </a:txBody>
+                  <a:tcPr marL="54864" marR="54864" marT="27432" marB="27432" anchor="ctr">
+                    <a:solidFill>
+                      <a:srgbClr val="2F5E8D"/>
                     </a:solidFill>
                   </a:tcPr>
                 </a:tc>
@@ -11577,19 +12254,18 @@
                     <a:p>
                       <a:pPr algn="ctr"/>
                       <a:r>
-                        <a:rPr sz="1150" b="1">
+                        <a:rPr sz="800" b="1">
                           <a:solidFill>
                             <a:srgbClr val="FFFFFF"/>
                           </a:solidFill>
-                          <a:latin typeface="Aptos"/>
-                        </a:rPr>
-                        <a:t>Selection</a:t>
-                      </a:r>
-                    </a:p>
-                  </a:txBody>
-                  <a:tcPr>
-                    <a:solidFill>
-                      <a:srgbClr val="2A598F"/>
+                        </a:rPr>
+                        <a:t>Count</a:t>
+                      </a:r>
+                    </a:p>
+                  </a:txBody>
+                  <a:tcPr marL="54864" marR="54864" marT="27432" marB="27432" anchor="ctr">
+                    <a:solidFill>
+                      <a:srgbClr val="2F5E8D"/>
                     </a:solidFill>
                   </a:tcPr>
                 </a:tc>
@@ -11600,19 +12276,18 @@
                     <a:p>
                       <a:pPr algn="ctr"/>
                       <a:r>
-                        <a:rPr sz="1150" b="1">
+                        <a:rPr sz="800" b="1">
                           <a:solidFill>
                             <a:srgbClr val="FFFFFF"/>
                           </a:solidFill>
-                          <a:latin typeface="Aptos"/>
-                        </a:rPr>
-                        <a:t>Count</a:t>
-                      </a:r>
-                    </a:p>
-                  </a:txBody>
-                  <a:tcPr>
-                    <a:solidFill>
-                      <a:srgbClr val="2A598F"/>
+                        </a:rPr>
+                        <a:t>Cost</a:t>
+                      </a:r>
+                    </a:p>
+                  </a:txBody>
+                  <a:tcPr marL="54864" marR="54864" marT="27432" marB="27432" anchor="ctr">
+                    <a:solidFill>
+                      <a:srgbClr val="2F5E8D"/>
                     </a:solidFill>
                   </a:tcPr>
                 </a:tc>
@@ -11623,19 +12298,42 @@
                     <a:p>
                       <a:pPr algn="ctr"/>
                       <a:r>
-                        <a:rPr sz="1150" b="1">
+                        <a:rPr sz="800" b="1">
                           <a:solidFill>
                             <a:srgbClr val="FFFFFF"/>
                           </a:solidFill>
-                          <a:latin typeface="Aptos"/>
-                        </a:rPr>
-                        <a:t>Cost</a:t>
-                      </a:r>
-                    </a:p>
-                  </a:txBody>
-                  <a:tcPr>
-                    <a:solidFill>
-                      <a:srgbClr val="2A598F"/>
+                        </a:rPr>
+                        <a:t>Role</a:t>
+                      </a:r>
+                    </a:p>
+                  </a:txBody>
+                  <a:tcPr marL="54864" marR="54864" marT="27432" marB="27432" anchor="ctr">
+                    <a:solidFill>
+                      <a:srgbClr val="2F5E8D"/>
+                    </a:solidFill>
+                  </a:tcPr>
+                </a:tc>
+              </a:tr>
+              <a:tr h="428625">
+                <a:tc>
+                  <a:txBody>
+                    <a:bodyPr/>
+                    <a:lstStyle/>
+                    <a:p>
+                      <a:pPr algn="l"/>
+                      <a:r>
+                        <a:rPr sz="740" b="0">
+                          <a:solidFill>
+                            <a:srgbClr val="111827"/>
+                          </a:solidFill>
+                        </a:rPr>
+                        <a:t>One segment</a:t>
+                      </a:r>
+                    </a:p>
+                  </a:txBody>
+                  <a:tcPr marL="54864" marR="54864" marT="27432" marB="27432" anchor="ctr">
+                    <a:solidFill>
+                      <a:srgbClr val="FFFFFF"/>
                     </a:solidFill>
                   </a:tcPr>
                 </a:tc>
@@ -11646,24 +12344,89 @@
                     <a:p>
                       <a:pPr algn="ctr"/>
                       <a:r>
-                        <a:rPr sz="1150" b="1">
-                          <a:solidFill>
-                            <a:srgbClr val="FFFFFF"/>
-                          </a:solidFill>
-                          <a:latin typeface="Aptos"/>
-                        </a:rPr>
-                        <a:t>Role</a:t>
-                      </a:r>
-                    </a:p>
-                  </a:txBody>
-                  <a:tcPr>
-                    <a:solidFill>
-                      <a:srgbClr val="2A598F"/>
+                        <a:rPr sz="740" b="0">
+                          <a:solidFill>
+                            <a:srgbClr val="111827"/>
+                          </a:solidFill>
+                        </a:rPr>
+                        <a:t>top segment</a:t>
+                      </a:r>
+                    </a:p>
+                  </a:txBody>
+                  <a:tcPr marL="54864" marR="54864" marT="27432" marB="27432" anchor="ctr">
+                    <a:solidFill>
+                      <a:srgbClr val="FFFFFF"/>
+                    </a:solidFill>
+                  </a:tcPr>
+                </a:tc>
+                <a:tc>
+                  <a:txBody>
+                    <a:bodyPr/>
+                    <a:lstStyle/>
+                    <a:p>
+                      <a:pPr algn="ctr"/>
+                      <a:r>
+                        <a:rPr sz="740" b="0">
+                          <a:solidFill>
+                            <a:srgbClr val="111827"/>
+                          </a:solidFill>
+                        </a:rPr>
+                        <a:t>1</a:t>
+                      </a:r>
+                    </a:p>
+                  </a:txBody>
+                  <a:tcPr marL="54864" marR="54864" marT="27432" marB="27432" anchor="ctr">
+                    <a:solidFill>
+                      <a:srgbClr val="FFFFFF"/>
+                    </a:solidFill>
+                  </a:tcPr>
+                </a:tc>
+                <a:tc>
+                  <a:txBody>
+                    <a:bodyPr/>
+                    <a:lstStyle/>
+                    <a:p>
+                      <a:pPr algn="ctr"/>
+                      <a:r>
+                        <a:rPr sz="740" b="0">
+                          <a:solidFill>
+                            <a:srgbClr val="111827"/>
+                          </a:solidFill>
+                        </a:rPr>
+                        <a:t>1.500</a:t>
+                      </a:r>
+                    </a:p>
+                  </a:txBody>
+                  <a:tcPr marL="54864" marR="54864" marT="27432" marB="27432" anchor="ctr">
+                    <a:solidFill>
+                      <a:srgbClr val="FFFFFF"/>
+                    </a:solidFill>
+                  </a:tcPr>
+                </a:tc>
+                <a:tc>
+                  <a:txBody>
+                    <a:bodyPr/>
+                    <a:lstStyle/>
+                    <a:p>
+                      <a:pPr algn="ctr"/>
+                      <a:r>
+                        <a:rPr sz="740" b="0">
+                          <a:solidFill>
+                            <a:srgbClr val="111827"/>
+                          </a:solidFill>
+                        </a:rPr>
+                        <a:t>low-cost control</a:t>
+                      </a:r>
+                    </a:p>
+                  </a:txBody>
+                  <a:tcPr marL="54864" marR="54864" marT="27432" marB="27432" anchor="ctr">
+                    <a:solidFill>
+                      <a:srgbClr val="FFFFFF"/>
                     </a:solidFill>
                   </a:tcPr>
                 </a:tc>
               </a:tr>
-              <a:tr h="548640">
+              <a:tr h="428625">
                 <a:tc>
                   <a:txBody>
                     <a:bodyPr/>
@@ -11671,17 +12434,128 @@
                     <a:p>
                       <a:pPr algn="l"/>
                       <a:r>
-                        <a:rPr sz="1150" b="0">
-                          <a:solidFill>
-                            <a:srgbClr val="14181F"/>
-                          </a:solidFill>
-                          <a:latin typeface="Aptos"/>
-                        </a:rPr>
-                        <a:t>One segment</a:t>
-                      </a:r>
-                    </a:p>
-                  </a:txBody>
-                  <a:tcPr>
+                        <a:rPr sz="740" b="0">
+                          <a:solidFill>
+                            <a:srgbClr val="111827"/>
+                          </a:solidFill>
+                        </a:rPr>
+                        <a:t>Linear policy</a:t>
+                      </a:r>
+                    </a:p>
+                  </a:txBody>
+                  <a:tcPr marL="54864" marR="54864" marT="27432" marB="27432" anchor="ctr">
+                    <a:solidFill>
+                      <a:srgbClr val="F6F8FB"/>
+                    </a:solidFill>
+                  </a:tcPr>
+                </a:tc>
+                <a:tc>
+                  <a:txBody>
+                    <a:bodyPr/>
+                    <a:lstStyle/>
+                    <a:p>
+                      <a:pPr algn="ctr"/>
+                      <a:r>
+                        <a:rPr sz="740" b="0">
+                          <a:solidFill>
+                            <a:srgbClr val="111827"/>
+                          </a:solidFill>
+                        </a:rPr>
+                        <a:t>oracle-trace imitation</a:t>
+                      </a:r>
+                    </a:p>
+                  </a:txBody>
+                  <a:tcPr marL="54864" marR="54864" marT="27432" marB="27432" anchor="ctr">
+                    <a:solidFill>
+                      <a:srgbClr val="F6F8FB"/>
+                    </a:solidFill>
+                  </a:tcPr>
+                </a:tc>
+                <a:tc>
+                  <a:txBody>
+                    <a:bodyPr/>
+                    <a:lstStyle/>
+                    <a:p>
+                      <a:pPr algn="ctr"/>
+                      <a:r>
+                        <a:rPr sz="740" b="0">
+                          <a:solidFill>
+                            <a:srgbClr val="111827"/>
+                          </a:solidFill>
+                        </a:rPr>
+                        <a:t>2</a:t>
+                      </a:r>
+                    </a:p>
+                  </a:txBody>
+                  <a:tcPr marL="54864" marR="54864" marT="27432" marB="27432" anchor="ctr">
+                    <a:solidFill>
+                      <a:srgbClr val="F6F8FB"/>
+                    </a:solidFill>
+                  </a:tcPr>
+                </a:tc>
+                <a:tc>
+                  <a:txBody>
+                    <a:bodyPr/>
+                    <a:lstStyle/>
+                    <a:p>
+                      <a:pPr algn="ctr"/>
+                      <a:r>
+                        <a:rPr sz="740" b="0">
+                          <a:solidFill>
+                            <a:srgbClr val="111827"/>
+                          </a:solidFill>
+                        </a:rPr>
+                        <a:t>2.795</a:t>
+                      </a:r>
+                    </a:p>
+                  </a:txBody>
+                  <a:tcPr marL="54864" marR="54864" marT="27432" marB="27432" anchor="ctr">
+                    <a:solidFill>
+                      <a:srgbClr val="F6F8FB"/>
+                    </a:solidFill>
+                  </a:tcPr>
+                </a:tc>
+                <a:tc>
+                  <a:txBody>
+                    <a:bodyPr/>
+                    <a:lstStyle/>
+                    <a:p>
+                      <a:pPr algn="ctr"/>
+                      <a:r>
+                        <a:rPr sz="740" b="0">
+                          <a:solidFill>
+                            <a:srgbClr val="111827"/>
+                          </a:solidFill>
+                        </a:rPr>
+                        <a:t>compact baseline</a:t>
+                      </a:r>
+                    </a:p>
+                  </a:txBody>
+                  <a:tcPr marL="54864" marR="54864" marT="27432" marB="27432" anchor="ctr">
+                    <a:solidFill>
+                      <a:srgbClr val="F6F8FB"/>
+                    </a:solidFill>
+                  </a:tcPr>
+                </a:tc>
+              </a:tr>
+              <a:tr h="428625">
+                <a:tc>
+                  <a:txBody>
+                    <a:bodyPr/>
+                    <a:lstStyle/>
+                    <a:p>
+                      <a:pPr algn="l"/>
+                      <a:r>
+                        <a:rPr sz="740" b="0">
+                          <a:solidFill>
+                            <a:srgbClr val="111827"/>
+                          </a:solidFill>
+                        </a:rPr>
+                        <a:t>MLP top-2</a:t>
+                      </a:r>
+                    </a:p>
+                  </a:txBody>
+                  <a:tcPr marL="54864" marR="54864" marT="27432" marB="27432" anchor="ctr">
                     <a:solidFill>
                       <a:srgbClr val="FFFFFF"/>
                     </a:solidFill>
@@ -11694,17 +12568,16 @@
                     <a:p>
                       <a:pPr algn="ctr"/>
                       <a:r>
-                        <a:rPr sz="1150" b="0">
-                          <a:solidFill>
-                            <a:srgbClr val="14181F"/>
-                          </a:solidFill>
-                          <a:latin typeface="Aptos"/>
-                        </a:rPr>
-                        <a:t>highest-scoring segment</a:t>
-                      </a:r>
-                    </a:p>
-                  </a:txBody>
-                  <a:tcPr>
+                        <a:rPr sz="740" b="0">
+                          <a:solidFill>
+                            <a:srgbClr val="111827"/>
+                          </a:solidFill>
+                        </a:rPr>
+                        <a:t>candidate MLP scores</a:t>
+                      </a:r>
+                    </a:p>
+                  </a:txBody>
+                  <a:tcPr marL="54864" marR="54864" marT="27432" marB="27432" anchor="ctr">
                     <a:solidFill>
                       <a:srgbClr val="FFFFFF"/>
                     </a:solidFill>
@@ -11717,17 +12590,16 @@
                     <a:p>
                       <a:pPr algn="ctr"/>
                       <a:r>
-                        <a:rPr sz="1150" b="0">
-                          <a:solidFill>
-                            <a:srgbClr val="14181F"/>
-                          </a:solidFill>
-                          <a:latin typeface="Aptos"/>
-                        </a:rPr>
-                        <a:t>1</a:t>
-                      </a:r>
-                    </a:p>
-                  </a:txBody>
-                  <a:tcPr>
+                        <a:rPr sz="740" b="0">
+                          <a:solidFill>
+                            <a:srgbClr val="111827"/>
+                          </a:solidFill>
+                        </a:rPr>
+                        <a:t>2</a:t>
+                      </a:r>
+                    </a:p>
+                  </a:txBody>
+                  <a:tcPr marL="54864" marR="54864" marT="27432" marB="27432" anchor="ctr">
                     <a:solidFill>
                       <a:srgbClr val="FFFFFF"/>
                     </a:solidFill>
@@ -11740,17 +12612,16 @@
                     <a:p>
                       <a:pPr algn="ctr"/>
                       <a:r>
-                        <a:rPr sz="1150" b="0">
-                          <a:solidFill>
-                            <a:srgbClr val="14181F"/>
-                          </a:solidFill>
-                          <a:latin typeface="Aptos"/>
-                        </a:rPr>
-                        <a:t>1.500</a:t>
-                      </a:r>
-                    </a:p>
-                  </a:txBody>
-                  <a:tcPr>
+                        <a:rPr sz="740" b="0">
+                          <a:solidFill>
+                            <a:srgbClr val="111827"/>
+                          </a:solidFill>
+                        </a:rPr>
+                        <a:t>3.000</a:t>
+                      </a:r>
+                    </a:p>
+                  </a:txBody>
+                  <a:tcPr marL="54864" marR="54864" marT="27432" marB="27432" anchor="ctr">
                     <a:solidFill>
                       <a:srgbClr val="FFFFFF"/>
                     </a:solidFill>
@@ -11763,24 +12634,23 @@
                     <a:p>
                       <a:pPr algn="ctr"/>
                       <a:r>
-                        <a:rPr sz="1150" b="0">
-                          <a:solidFill>
-                            <a:srgbClr val="14181F"/>
-                          </a:solidFill>
-                          <a:latin typeface="Aptos"/>
-                        </a:rPr>
-                        <a:t>Low-cost baseline</a:t>
-                      </a:r>
-                    </a:p>
-                  </a:txBody>
-                  <a:tcPr>
+                        <a:rPr sz="740" b="0">
+                          <a:solidFill>
+                            <a:srgbClr val="111827"/>
+                          </a:solidFill>
+                        </a:rPr>
+                        <a:t>router ablation</a:t>
+                      </a:r>
+                    </a:p>
+                  </a:txBody>
+                  <a:tcPr marL="54864" marR="54864" marT="27432" marB="27432" anchor="ctr">
                     <a:solidFill>
                       <a:srgbClr val="FFFFFF"/>
                     </a:solidFill>
                   </a:tcPr>
                 </a:tc>
               </a:tr>
-              <a:tr h="548640">
+              <a:tr h="428625">
                 <a:tc>
                   <a:txBody>
                     <a:bodyPr/>
@@ -11788,19 +12658,18 @@
                     <a:p>
                       <a:pPr algn="l"/>
                       <a:r>
-                        <a:rPr sz="1150" b="0">
-                          <a:solidFill>
-                            <a:srgbClr val="14181F"/>
-                          </a:solidFill>
-                          <a:latin typeface="Aptos"/>
-                        </a:rPr>
-                        <a:t>Linear two-item</a:t>
-                      </a:r>
-                    </a:p>
-                  </a:txBody>
-                  <a:tcPr>
-                    <a:solidFill>
-                      <a:srgbClr val="EBF4F1"/>
+                        <a:rPr sz="740" b="1">
+                          <a:solidFill>
+                            <a:srgbClr val="111827"/>
+                          </a:solidFill>
+                        </a:rPr>
+                        <a:t>MLP+NMS (Our)</a:t>
+                      </a:r>
+                    </a:p>
+                  </a:txBody>
+                  <a:tcPr marL="54864" marR="54864" marT="27432" marB="27432" anchor="ctr">
+                    <a:solidFill>
+                      <a:srgbClr val="E2F0EC"/>
                     </a:solidFill>
                   </a:tcPr>
                 </a:tc>
@@ -11811,19 +12680,18 @@
                     <a:p>
                       <a:pPr algn="ctr"/>
                       <a:r>
-                        <a:rPr sz="1150" b="0">
-                          <a:solidFill>
-                            <a:srgbClr val="14181F"/>
-                          </a:solidFill>
-                          <a:latin typeface="Aptos"/>
-                        </a:rPr>
-                        <a:t>linear router: frame/segment/stop</a:t>
-                      </a:r>
-                    </a:p>
-                  </a:txBody>
-                  <a:tcPr>
-                    <a:solidFill>
-                      <a:srgbClr val="EBF4F1"/>
+                        <a:rPr sz="740" b="1">
+                          <a:solidFill>
+                            <a:srgbClr val="111827"/>
+                          </a:solidFill>
+                        </a:rPr>
+                        <a:t>MLP + temporal diversity</a:t>
+                      </a:r>
+                    </a:p>
+                  </a:txBody>
+                  <a:tcPr marL="54864" marR="54864" marT="27432" marB="27432" anchor="ctr">
+                    <a:solidFill>
+                      <a:srgbClr val="E2F0EC"/>
                     </a:solidFill>
                   </a:tcPr>
                 </a:tc>
@@ -11834,19 +12702,18 @@
                     <a:p>
                       <a:pPr algn="ctr"/>
                       <a:r>
-                        <a:rPr sz="1150" b="0">
-                          <a:solidFill>
-                            <a:srgbClr val="14181F"/>
-                          </a:solidFill>
-                          <a:latin typeface="Aptos"/>
+                        <a:rPr sz="740" b="1">
+                          <a:solidFill>
+                            <a:srgbClr val="111827"/>
+                          </a:solidFill>
                         </a:rPr>
                         <a:t>2</a:t>
                       </a:r>
                     </a:p>
                   </a:txBody>
-                  <a:tcPr>
-                    <a:solidFill>
-                      <a:srgbClr val="EBF4F1"/>
+                  <a:tcPr marL="54864" marR="54864" marT="27432" marB="27432" anchor="ctr">
+                    <a:solidFill>
+                      <a:srgbClr val="E2F0EC"/>
                     </a:solidFill>
                   </a:tcPr>
                 </a:tc>
@@ -11857,19 +12724,18 @@
                     <a:p>
                       <a:pPr algn="ctr"/>
                       <a:r>
-                        <a:rPr sz="1150" b="0">
-                          <a:solidFill>
-                            <a:srgbClr val="14181F"/>
-                          </a:solidFill>
-                          <a:latin typeface="Aptos"/>
-                        </a:rPr>
-                        <a:t>2.795</a:t>
-                      </a:r>
-                    </a:p>
-                  </a:txBody>
-                  <a:tcPr>
-                    <a:solidFill>
-                      <a:srgbClr val="EBF4F1"/>
+                        <a:rPr sz="740" b="1">
+                          <a:solidFill>
+                            <a:srgbClr val="111827"/>
+                          </a:solidFill>
+                        </a:rPr>
+                        <a:t>2.935</a:t>
+                      </a:r>
+                    </a:p>
+                  </a:txBody>
+                  <a:tcPr marL="54864" marR="54864" marT="27432" marB="27432" anchor="ctr">
+                    <a:solidFill>
+                      <a:srgbClr val="E2F0EC"/>
                     </a:solidFill>
                   </a:tcPr>
                 </a:tc>
@@ -11880,24 +12746,23 @@
                     <a:p>
                       <a:pPr algn="ctr"/>
                       <a:r>
-                        <a:rPr sz="1150" b="0">
-                          <a:solidFill>
-                            <a:srgbClr val="14181F"/>
-                          </a:solidFill>
-                          <a:latin typeface="Aptos"/>
-                        </a:rPr>
-                        <a:t>Efficient middle point</a:t>
-                      </a:r>
-                    </a:p>
-                  </a:txBody>
-                  <a:tcPr>
-                    <a:solidFill>
-                      <a:srgbClr val="EBF4F1"/>
+                        <a:rPr sz="740" b="1">
+                          <a:solidFill>
+                            <a:srgbClr val="111827"/>
+                          </a:solidFill>
+                        </a:rPr>
+                        <a:t>proposed selector</a:t>
+                      </a:r>
+                    </a:p>
+                  </a:txBody>
+                  <a:tcPr marL="54864" marR="54864" marT="27432" marB="27432" anchor="ctr">
+                    <a:solidFill>
+                      <a:srgbClr val="E2F0EC"/>
                     </a:solidFill>
                   </a:tcPr>
                 </a:tc>
               </a:tr>
-              <a:tr h="548640">
+              <a:tr h="428625">
                 <a:tc>
                   <a:txBody>
                     <a:bodyPr/>
@@ -11905,19 +12770,242 @@
                     <a:p>
                       <a:pPr algn="l"/>
                       <a:r>
-                        <a:rPr sz="1150" b="0">
-                          <a:solidFill>
-                            <a:srgbClr val="14181F"/>
-                          </a:solidFill>
-                          <a:latin typeface="Aptos"/>
+                        <a:rPr sz="740" b="0">
+                          <a:solidFill>
+                            <a:srgbClr val="111827"/>
+                          </a:solidFill>
+                        </a:rPr>
+                        <a:t>Temporal-supervised</a:t>
+                      </a:r>
+                    </a:p>
+                  </a:txBody>
+                  <a:tcPr marL="54864" marR="54864" marT="27432" marB="27432" anchor="ctr">
+                    <a:solidFill>
+                      <a:srgbClr val="FFFFFF"/>
+                    </a:solidFill>
+                  </a:tcPr>
+                </a:tc>
+                <a:tc>
+                  <a:txBody>
+                    <a:bodyPr/>
+                    <a:lstStyle/>
+                    <a:p>
+                      <a:pPr algn="ctr"/>
+                      <a:r>
+                        <a:rPr sz="740" b="0">
+                          <a:solidFill>
+                            <a:srgbClr val="111827"/>
+                          </a:solidFill>
+                        </a:rPr>
+                        <a:t>overlap-label MLP</a:t>
+                      </a:r>
+                    </a:p>
+                  </a:txBody>
+                  <a:tcPr marL="54864" marR="54864" marT="27432" marB="27432" anchor="ctr">
+                    <a:solidFill>
+                      <a:srgbClr val="FFFFFF"/>
+                    </a:solidFill>
+                  </a:tcPr>
+                </a:tc>
+                <a:tc>
+                  <a:txBody>
+                    <a:bodyPr/>
+                    <a:lstStyle/>
+                    <a:p>
+                      <a:pPr algn="ctr"/>
+                      <a:r>
+                        <a:rPr sz="740" b="0">
+                          <a:solidFill>
+                            <a:srgbClr val="111827"/>
+                          </a:solidFill>
+                        </a:rPr>
+                        <a:t>2</a:t>
+                      </a:r>
+                    </a:p>
+                  </a:txBody>
+                  <a:tcPr marL="54864" marR="54864" marT="27432" marB="27432" anchor="ctr">
+                    <a:solidFill>
+                      <a:srgbClr val="FFFFFF"/>
+                    </a:solidFill>
+                  </a:tcPr>
+                </a:tc>
+                <a:tc>
+                  <a:txBody>
+                    <a:bodyPr/>
+                    <a:lstStyle/>
+                    <a:p>
+                      <a:pPr algn="ctr"/>
+                      <a:r>
+                        <a:rPr sz="740" b="0">
+                          <a:solidFill>
+                            <a:srgbClr val="111827"/>
+                          </a:solidFill>
+                        </a:rPr>
+                        <a:t>2.273</a:t>
+                      </a:r>
+                    </a:p>
+                  </a:txBody>
+                  <a:tcPr marL="54864" marR="54864" marT="27432" marB="27432" anchor="ctr">
+                    <a:solidFill>
+                      <a:srgbClr val="FFFFFF"/>
+                    </a:solidFill>
+                  </a:tcPr>
+                </a:tc>
+                <a:tc>
+                  <a:txBody>
+                    <a:bodyPr/>
+                    <a:lstStyle/>
+                    <a:p>
+                      <a:pPr algn="ctr"/>
+                      <a:r>
+                        <a:rPr sz="740" b="0">
+                          <a:solidFill>
+                            <a:srgbClr val="111827"/>
+                          </a:solidFill>
+                        </a:rPr>
+                        <a:t>diagnostic router</a:t>
+                      </a:r>
+                    </a:p>
+                  </a:txBody>
+                  <a:tcPr marL="54864" marR="54864" marT="27432" marB="27432" anchor="ctr">
+                    <a:solidFill>
+                      <a:srgbClr val="FFFFFF"/>
+                    </a:solidFill>
+                  </a:tcPr>
+                </a:tc>
+              </a:tr>
+              <a:tr h="428625">
+                <a:tc>
+                  <a:txBody>
+                    <a:bodyPr/>
+                    <a:lstStyle/>
+                    <a:p>
+                      <a:pPr algn="l"/>
+                      <a:r>
+                        <a:rPr sz="740" b="0">
+                          <a:solidFill>
+                            <a:srgbClr val="111827"/>
+                          </a:solidFill>
+                        </a:rPr>
+                        <a:t>Oracle top-2</a:t>
+                      </a:r>
+                    </a:p>
+                  </a:txBody>
+                  <a:tcPr marL="54864" marR="54864" marT="27432" marB="27432" anchor="ctr">
+                    <a:solidFill>
+                      <a:srgbClr val="F6F8FB"/>
+                    </a:solidFill>
+                  </a:tcPr>
+                </a:tc>
+                <a:tc>
+                  <a:txBody>
+                    <a:bodyPr/>
+                    <a:lstStyle/>
+                    <a:p>
+                      <a:pPr algn="ctr"/>
+                      <a:r>
+                        <a:rPr sz="740" b="0">
+                          <a:solidFill>
+                            <a:srgbClr val="111827"/>
+                          </a:solidFill>
+                        </a:rPr>
+                        <a:t>ground-truth IoP from pool</a:t>
+                      </a:r>
+                    </a:p>
+                  </a:txBody>
+                  <a:tcPr marL="54864" marR="54864" marT="27432" marB="27432" anchor="ctr">
+                    <a:solidFill>
+                      <a:srgbClr val="F6F8FB"/>
+                    </a:solidFill>
+                  </a:tcPr>
+                </a:tc>
+                <a:tc>
+                  <a:txBody>
+                    <a:bodyPr/>
+                    <a:lstStyle/>
+                    <a:p>
+                      <a:pPr algn="ctr"/>
+                      <a:r>
+                        <a:rPr sz="740" b="0">
+                          <a:solidFill>
+                            <a:srgbClr val="111827"/>
+                          </a:solidFill>
+                        </a:rPr>
+                        <a:t>2</a:t>
+                      </a:r>
+                    </a:p>
+                  </a:txBody>
+                  <a:tcPr marL="54864" marR="54864" marT="27432" marB="27432" anchor="ctr">
+                    <a:solidFill>
+                      <a:srgbClr val="F6F8FB"/>
+                    </a:solidFill>
+                  </a:tcPr>
+                </a:tc>
+                <a:tc>
+                  <a:txBody>
+                    <a:bodyPr/>
+                    <a:lstStyle/>
+                    <a:p>
+                      <a:pPr algn="ctr"/>
+                      <a:r>
+                        <a:rPr sz="740" b="0">
+                          <a:solidFill>
+                            <a:srgbClr val="111827"/>
+                          </a:solidFill>
+                        </a:rPr>
+                        <a:t>2.493</a:t>
+                      </a:r>
+                    </a:p>
+                  </a:txBody>
+                  <a:tcPr marL="54864" marR="54864" marT="27432" marB="27432" anchor="ctr">
+                    <a:solidFill>
+                      <a:srgbClr val="F6F8FB"/>
+                    </a:solidFill>
+                  </a:tcPr>
+                </a:tc>
+                <a:tc>
+                  <a:txBody>
+                    <a:bodyPr/>
+                    <a:lstStyle/>
+                    <a:p>
+                      <a:pPr algn="ctr"/>
+                      <a:r>
+                        <a:rPr sz="740" b="0">
+                          <a:solidFill>
+                            <a:srgbClr val="111827"/>
+                          </a:solidFill>
+                        </a:rPr>
+                        <a:t>headroom reference</a:t>
+                      </a:r>
+                    </a:p>
+                  </a:txBody>
+                  <a:tcPr marL="54864" marR="54864" marT="27432" marB="27432" anchor="ctr">
+                    <a:solidFill>
+                      <a:srgbClr val="F6F8FB"/>
+                    </a:solidFill>
+                  </a:tcPr>
+                </a:tc>
+              </a:tr>
+              <a:tr h="428625">
+                <a:tc>
+                  <a:txBody>
+                    <a:bodyPr/>
+                    <a:lstStyle/>
+                    <a:p>
+                      <a:pPr algn="l"/>
+                      <a:r>
+                        <a:rPr sz="740" b="0">
+                          <a:solidFill>
+                            <a:srgbClr val="111827"/>
+                          </a:solidFill>
                         </a:rPr>
                         <a:t>Fixed 3+3</a:t>
                       </a:r>
                     </a:p>
                   </a:txBody>
-                  <a:tcPr>
-                    <a:solidFill>
-                      <a:srgbClr val="EBF4F1"/>
+                  <a:tcPr marL="54864" marR="54864" marT="27432" marB="27432" anchor="ctr">
+                    <a:solidFill>
+                      <a:srgbClr val="FFFFFF"/>
                     </a:solidFill>
                   </a:tcPr>
                 </a:tc>
@@ -11928,19 +13016,18 @@
                     <a:p>
                       <a:pPr algn="ctr"/>
                       <a:r>
-                        <a:rPr sz="1150" b="0">
-                          <a:solidFill>
-                            <a:srgbClr val="14181F"/>
-                          </a:solidFill>
-                          <a:latin typeface="Aptos"/>
+                        <a:rPr sz="740" b="0">
+                          <a:solidFill>
+                            <a:srgbClr val="111827"/>
+                          </a:solidFill>
                         </a:rPr>
                         <a:t>3 frames + 3 segments</a:t>
                       </a:r>
                     </a:p>
                   </a:txBody>
-                  <a:tcPr>
-                    <a:solidFill>
-                      <a:srgbClr val="EBF4F1"/>
+                  <a:tcPr marL="54864" marR="54864" marT="27432" marB="27432" anchor="ctr">
+                    <a:solidFill>
+                      <a:srgbClr val="FFFFFF"/>
                     </a:solidFill>
                   </a:tcPr>
                 </a:tc>
@@ -11951,19 +13038,18 @@
                     <a:p>
                       <a:pPr algn="ctr"/>
                       <a:r>
-                        <a:rPr sz="1150" b="0">
-                          <a:solidFill>
-                            <a:srgbClr val="14181F"/>
-                          </a:solidFill>
-                          <a:latin typeface="Aptos"/>
+                        <a:rPr sz="740" b="0">
+                          <a:solidFill>
+                            <a:srgbClr val="111827"/>
+                          </a:solidFill>
                         </a:rPr>
                         <a:t>6</a:t>
                       </a:r>
                     </a:p>
                   </a:txBody>
-                  <a:tcPr>
-                    <a:solidFill>
-                      <a:srgbClr val="EBF4F1"/>
+                  <a:tcPr marL="54864" marR="54864" marT="27432" marB="27432" anchor="ctr">
+                    <a:solidFill>
+                      <a:srgbClr val="FFFFFF"/>
                     </a:solidFill>
                   </a:tcPr>
                 </a:tc>
@@ -11974,19 +13060,18 @@
                     <a:p>
                       <a:pPr algn="ctr"/>
                       <a:r>
-                        <a:rPr sz="1150" b="0">
-                          <a:solidFill>
-                            <a:srgbClr val="14181F"/>
-                          </a:solidFill>
-                          <a:latin typeface="Aptos"/>
+                        <a:rPr sz="740" b="0">
+                          <a:solidFill>
+                            <a:srgbClr val="111827"/>
+                          </a:solidFill>
                         </a:rPr>
                         <a:t>7.500</a:t>
                       </a:r>
                     </a:p>
                   </a:txBody>
-                  <a:tcPr>
-                    <a:solidFill>
-                      <a:srgbClr val="EBF4F1"/>
+                  <a:tcPr marL="54864" marR="54864" marT="27432" marB="27432" anchor="ctr">
+                    <a:solidFill>
+                      <a:srgbClr val="FFFFFF"/>
                     </a:solidFill>
                   </a:tcPr>
                 </a:tc>
@@ -11997,136 +13082,18 @@
                     <a:p>
                       <a:pPr algn="ctr"/>
                       <a:r>
-                        <a:rPr sz="1150" b="0">
-                          <a:solidFill>
-                            <a:srgbClr val="14181F"/>
-                          </a:solidFill>
-                          <a:latin typeface="Aptos"/>
-                        </a:rPr>
-                        <a:t>High-coverage control</a:t>
-                      </a:r>
-                    </a:p>
-                  </a:txBody>
-                  <a:tcPr>
-                    <a:solidFill>
-                      <a:srgbClr val="EBF4F1"/>
-                    </a:solidFill>
-                  </a:tcPr>
-                </a:tc>
-              </a:tr>
-              <a:tr h="548640">
-                <a:tc>
-                  <a:txBody>
-                    <a:bodyPr/>
-                    <a:lstStyle/>
-                    <a:p>
-                      <a:pPr algn="l"/>
-                      <a:r>
-                        <a:rPr sz="1150" b="0">
-                          <a:solidFill>
-                            <a:srgbClr val="14181F"/>
-                          </a:solidFill>
-                          <a:latin typeface="Aptos"/>
-                        </a:rPr>
-                        <a:t>Fixed 6+6</a:t>
-                      </a:r>
-                    </a:p>
-                  </a:txBody>
-                  <a:tcPr>
-                    <a:solidFill>
-                      <a:srgbClr val="EBF4F1"/>
-                    </a:solidFill>
-                  </a:tcPr>
-                </a:tc>
-                <a:tc>
-                  <a:txBody>
-                    <a:bodyPr/>
-                    <a:lstStyle/>
-                    <a:p>
-                      <a:pPr algn="ctr"/>
-                      <a:r>
-                        <a:rPr sz="1150" b="0">
-                          <a:solidFill>
-                            <a:srgbClr val="14181F"/>
-                          </a:solidFill>
-                          <a:latin typeface="Aptos"/>
-                        </a:rPr>
-                        <a:t>6 frames + 6 segments</a:t>
-                      </a:r>
-                    </a:p>
-                  </a:txBody>
-                  <a:tcPr>
-                    <a:solidFill>
-                      <a:srgbClr val="EBF4F1"/>
-                    </a:solidFill>
-                  </a:tcPr>
-                </a:tc>
-                <a:tc>
-                  <a:txBody>
-                    <a:bodyPr/>
-                    <a:lstStyle/>
-                    <a:p>
-                      <a:pPr algn="ctr"/>
-                      <a:r>
-                        <a:rPr sz="1150" b="0">
-                          <a:solidFill>
-                            <a:srgbClr val="14181F"/>
-                          </a:solidFill>
-                          <a:latin typeface="Aptos"/>
-                        </a:rPr>
-                        <a:t>about 12</a:t>
-                      </a:r>
-                    </a:p>
-                  </a:txBody>
-                  <a:tcPr>
-                    <a:solidFill>
-                      <a:srgbClr val="EBF4F1"/>
-                    </a:solidFill>
-                  </a:tcPr>
-                </a:tc>
-                <a:tc>
-                  <a:txBody>
-                    <a:bodyPr/>
-                    <a:lstStyle/>
-                    <a:p>
-                      <a:pPr algn="ctr"/>
-                      <a:r>
-                        <a:rPr sz="1150" b="0">
-                          <a:solidFill>
-                            <a:srgbClr val="14181F"/>
-                          </a:solidFill>
-                          <a:latin typeface="Aptos"/>
-                        </a:rPr>
-                        <a:t>14.908</a:t>
-                      </a:r>
-                    </a:p>
-                  </a:txBody>
-                  <a:tcPr>
-                    <a:solidFill>
-                      <a:srgbClr val="EBF4F1"/>
-                    </a:solidFill>
-                  </a:tcPr>
-                </a:tc>
-                <a:tc>
-                  <a:txBody>
-                    <a:bodyPr/>
-                    <a:lstStyle/>
-                    <a:p>
-                      <a:pPr algn="ctr"/>
-                      <a:r>
-                        <a:rPr sz="1150" b="0">
-                          <a:solidFill>
-                            <a:srgbClr val="14181F"/>
-                          </a:solidFill>
-                          <a:latin typeface="Aptos"/>
-                        </a:rPr>
-                        <a:t>Large frozen-answerer control</a:t>
-                      </a:r>
-                    </a:p>
-                  </a:txBody>
-                  <a:tcPr>
-                    <a:solidFill>
-                      <a:srgbClr val="EBF4F1"/>
+                        <a:rPr sz="740" b="0">
+                          <a:solidFill>
+                            <a:srgbClr val="111827"/>
+                          </a:solidFill>
+                        </a:rPr>
+                        <a:t>coverage reference</a:t>
+                      </a:r>
+                    </a:p>
+                  </a:txBody>
+                  <a:tcPr marL="54864" marR="54864" marT="27432" marB="27432" anchor="ctr">
+                    <a:solidFill>
+                      <a:srgbClr val="FFFFFF"/>
                     </a:solidFill>
                   </a:tcPr>
                 </a:tc>
@@ -12135,232 +13102,6 @@
           </a:graphicData>
         </a:graphic>
       </p:graphicFrame>
-      <p:sp>
-        <p:nvSpPr>
-          <p:cNvPr id="9" name="Rectangle 8"/>
-          <p:cNvSpPr/>
-          <p:nvPr/>
-        </p:nvSpPr>
-        <p:spPr>
-          <a:xfrm>
-            <a:off x="914400" y="4160520"/>
-            <a:ext cx="4800600" cy="1234440"/>
-          </a:xfrm>
-          <a:prstGeom prst="rect">
-            <a:avLst/>
-          </a:prstGeom>
-          <a:solidFill>
-            <a:srgbClr val="E8F0FA"/>
-          </a:solidFill>
-          <a:ln w="15240">
-            <a:solidFill>
-              <a:srgbClr val="2A598F"/>
-            </a:solidFill>
-          </a:ln>
-        </p:spPr>
-        <p:style>
-          <a:lnRef idx="1">
-            <a:schemeClr val="accent1"/>
-          </a:lnRef>
-          <a:fillRef idx="3">
-            <a:schemeClr val="accent1"/>
-          </a:fillRef>
-          <a:effectRef idx="2">
-            <a:schemeClr val="accent1"/>
-          </a:effectRef>
-          <a:fontRef idx="minor">
-            <a:schemeClr val="lt1"/>
-          </a:fontRef>
-        </p:style>
-        <p:txBody>
-          <a:bodyPr rtlCol="0" anchor="ctr"/>
-          <a:lstStyle/>
-          <a:p>
-            <a:pPr algn="ctr"/>
-          </a:p>
-        </p:txBody>
-      </p:sp>
-      <p:sp>
-        <p:nvSpPr>
-          <p:cNvPr id="10" name="TextBox 9"/>
-          <p:cNvSpPr txBox="1"/>
-          <p:nvPr/>
-        </p:nvSpPr>
-        <p:spPr>
-          <a:xfrm>
-            <a:off x="1078992" y="4270248"/>
-            <a:ext cx="4471416" cy="256032"/>
-          </a:xfrm>
-          <a:prstGeom prst="rect">
-            <a:avLst/>
-          </a:prstGeom>
-          <a:noFill/>
-        </p:spPr>
-        <p:txBody>
-          <a:bodyPr wrap="square">
-            <a:normAutofit/>
-          </a:bodyPr>
-          <a:lstStyle/>
-          <a:p>
-            <a:r>
-              <a:rPr sz="1500" b="1">
-                <a:solidFill>
-                  <a:srgbClr val="2A598F"/>
-                </a:solidFill>
-                <a:latin typeface="Aptos"/>
-              </a:rPr>
-              <a:t>Policy training</a:t>
-            </a:r>
-          </a:p>
-        </p:txBody>
-      </p:sp>
-      <p:sp>
-        <p:nvSpPr>
-          <p:cNvPr id="11" name="TextBox 10"/>
-          <p:cNvSpPr txBox="1"/>
-          <p:nvPr/>
-        </p:nvSpPr>
-        <p:spPr>
-          <a:xfrm>
-            <a:off x="1078992" y="4636008"/>
-            <a:ext cx="4471416" cy="649224"/>
-          </a:xfrm>
-          <a:prstGeom prst="rect">
-            <a:avLst/>
-          </a:prstGeom>
-          <a:noFill/>
-        </p:spPr>
-        <p:txBody>
-          <a:bodyPr wrap="square">
-            <a:normAutofit/>
-          </a:bodyPr>
-          <a:lstStyle/>
-          <a:p>
-            <a:r>
-              <a:rPr sz="1600" b="0">
-                <a:solidFill>
-                  <a:srgbClr val="14181F"/>
-                </a:solidFill>
-                <a:latin typeface="Aptos"/>
-              </a:rPr>
-              <a:t>The MLP router is trained from oracle traces; Qwen is not trained or used for routing.</a:t>
-            </a:r>
-          </a:p>
-        </p:txBody>
-      </p:sp>
-      <p:sp>
-        <p:nvSpPr>
-          <p:cNvPr id="12" name="Rectangle 11"/>
-          <p:cNvSpPr/>
-          <p:nvPr/>
-        </p:nvSpPr>
-        <p:spPr>
-          <a:xfrm>
-            <a:off x="6400800" y="4160520"/>
-            <a:ext cx="4800600" cy="1234440"/>
-          </a:xfrm>
-          <a:prstGeom prst="rect">
-            <a:avLst/>
-          </a:prstGeom>
-          <a:solidFill>
-            <a:srgbClr val="E8F0FA"/>
-          </a:solidFill>
-          <a:ln w="15240">
-            <a:solidFill>
-              <a:srgbClr val="3B8B74"/>
-            </a:solidFill>
-          </a:ln>
-        </p:spPr>
-        <p:style>
-          <a:lnRef idx="1">
-            <a:schemeClr val="accent1"/>
-          </a:lnRef>
-          <a:fillRef idx="3">
-            <a:schemeClr val="accent1"/>
-          </a:fillRef>
-          <a:effectRef idx="2">
-            <a:schemeClr val="accent1"/>
-          </a:effectRef>
-          <a:fontRef idx="minor">
-            <a:schemeClr val="lt1"/>
-          </a:fontRef>
-        </p:style>
-        <p:txBody>
-          <a:bodyPr rtlCol="0" anchor="ctr"/>
-          <a:lstStyle/>
-          <a:p>
-            <a:pPr algn="ctr"/>
-          </a:p>
-        </p:txBody>
-      </p:sp>
-      <p:sp>
-        <p:nvSpPr>
-          <p:cNvPr id="13" name="TextBox 12"/>
-          <p:cNvSpPr txBox="1"/>
-          <p:nvPr/>
-        </p:nvSpPr>
-        <p:spPr>
-          <a:xfrm>
-            <a:off x="6565392" y="4270248"/>
-            <a:ext cx="4471416" cy="256032"/>
-          </a:xfrm>
-          <a:prstGeom prst="rect">
-            <a:avLst/>
-          </a:prstGeom>
-          <a:noFill/>
-        </p:spPr>
-        <p:txBody>
-          <a:bodyPr wrap="square">
-            <a:normAutofit/>
-          </a:bodyPr>
-          <a:lstStyle/>
-          <a:p>
-            <a:r>
-              <a:rPr sz="1500" b="1">
-                <a:solidFill>
-                  <a:srgbClr val="3B8B74"/>
-                </a:solidFill>
-                <a:latin typeface="Aptos"/>
-              </a:rPr>
-              <a:t>Why fixed controls matter</a:t>
-            </a:r>
-          </a:p>
-        </p:txBody>
-      </p:sp>
-      <p:sp>
-        <p:nvSpPr>
-          <p:cNvPr id="14" name="TextBox 13"/>
-          <p:cNvSpPr txBox="1"/>
-          <p:nvPr/>
-        </p:nvSpPr>
-        <p:spPr>
-          <a:xfrm>
-            <a:off x="6565392" y="4636008"/>
-            <a:ext cx="4471416" cy="649224"/>
-          </a:xfrm>
-          <a:prstGeom prst="rect">
-            <a:avLst/>
-          </a:prstGeom>
-          <a:noFill/>
-        </p:spPr>
-        <p:txBody>
-          <a:bodyPr wrap="square">
-            <a:normAutofit/>
-          </a:bodyPr>
-          <a:lstStyle/>
-          <a:p>
-            <a:r>
-              <a:rPr sz="1600" b="0">
-                <a:solidFill>
-                  <a:srgbClr val="14181F"/>
-                </a:solidFill>
-                <a:latin typeface="Aptos"/>
-              </a:rPr>
-              <a:t>They show what grounding improves when we spend much more visual context.</a:t>
-            </a:r>
-          </a:p>
-        </p:txBody>
-      </p:sp>
     </p:spTree>
   </p:cSld>
   <p:clrMapOvr>
@@ -12600,13 +13341,12 @@
           <a:p>
             <a:pPr algn="r"/>
             <a:r>
-              <a:rPr sz="850" b="0">
+              <a:rPr sz="750">
                 <a:solidFill>
-                  <a:srgbClr val="19375C"/>
+                  <a:srgbClr val="374151"/>
                 </a:solidFill>
-                <a:latin typeface="Aptos"/>
               </a:rPr>
-              <a:t>Final Presentation</a:t>
+              <a:t>Research Presentation</a:t>
             </a:r>
           </a:p>
         </p:txBody>
@@ -12951,17 +13691,20 @@
           <a:lstStyle/>
           <a:p>
             <a:r>
-              <a:rPr sz="1600" b="0">
-                <a:solidFill>
-                  <a:srgbClr val="14181F"/>
-                </a:solidFill>
-                <a:latin typeface="Aptos"/>
-              </a:rPr>
+              <a:rPr sz="1120"/>
               <a:t>Same selected evidence</a:t>
             </a:r>
-            <a:br/>
-            <a:r>
+          </a:p>
+          <a:p>
+            <a:r>
+              <a:rPr sz="1120"/>
               <a:t>Swap only final answerer</a:t>
+            </a:r>
+          </a:p>
+          <a:p>
+            <a:r>
+              <a:rPr sz="1120"/>
+              <a:t>Deterministic Qwen decoding</a:t>
             </a:r>
           </a:p>
         </p:txBody>
@@ -12994,44 +13737,42 @@
                     <a:bodyPr/>
                     <a:lstStyle/>
                     <a:p>
+                      <a:pPr algn="l"/>
+                      <a:r>
+                        <a:rPr sz="950" b="1">
+                          <a:solidFill>
+                            <a:srgbClr val="FFFFFF"/>
+                          </a:solidFill>
+                        </a:rPr>
+                        <a:t>Metric</a:t>
+                      </a:r>
+                    </a:p>
+                  </a:txBody>
+                  <a:tcPr marL="54864" marR="54864" marT="27432" marB="27432" anchor="ctr">
+                    <a:solidFill>
+                      <a:srgbClr val="2F5E8D"/>
+                    </a:solidFill>
+                  </a:tcPr>
+                </a:tc>
+                <a:tc>
+                  <a:txBody>
+                    <a:bodyPr/>
+                    <a:lstStyle/>
+                    <a:p>
                       <a:pPr algn="ctr"/>
                       <a:r>
-                        <a:rPr sz="1250" b="1">
+                        <a:rPr sz="950" b="1">
                           <a:solidFill>
                             <a:srgbClr val="FFFFFF"/>
                           </a:solidFill>
-                          <a:latin typeface="Aptos"/>
-                        </a:rPr>
-                        <a:t>Metric</a:t>
-                      </a:r>
-                    </a:p>
-                  </a:txBody>
-                  <a:tcPr>
-                    <a:solidFill>
-                      <a:srgbClr val="2A598F"/>
-                    </a:solidFill>
-                  </a:tcPr>
-                </a:tc>
-                <a:tc>
-                  <a:txBody>
-                    <a:bodyPr/>
-                    <a:lstStyle/>
-                    <a:p>
-                      <a:pPr algn="ctr"/>
-                      <a:r>
-                        <a:rPr sz="1250" b="1">
-                          <a:solidFill>
-                            <a:srgbClr val="FFFFFF"/>
-                          </a:solidFill>
-                          <a:latin typeface="Aptos"/>
                         </a:rPr>
                         <a:t>Meaning</a:t>
                       </a:r>
                     </a:p>
                   </a:txBody>
-                  <a:tcPr>
-                    <a:solidFill>
-                      <a:srgbClr val="2A598F"/>
+                  <a:tcPr marL="54864" marR="54864" marT="27432" marB="27432" anchor="ctr">
+                    <a:solidFill>
+                      <a:srgbClr val="2F5E8D"/>
                     </a:solidFill>
                   </a:tcPr>
                 </a:tc>
@@ -13044,17 +13785,16 @@
                     <a:p>
                       <a:pPr algn="l"/>
                       <a:r>
-                        <a:rPr sz="1250" b="0">
-                          <a:solidFill>
-                            <a:srgbClr val="14181F"/>
-                          </a:solidFill>
-                          <a:latin typeface="Aptos"/>
+                        <a:rPr sz="900" b="0">
+                          <a:solidFill>
+                            <a:srgbClr val="111827"/>
+                          </a:solidFill>
                         </a:rPr>
                         <a:t>Acc@QA</a:t>
                       </a:r>
                     </a:p>
                   </a:txBody>
-                  <a:tcPr>
+                  <a:tcPr marL="54864" marR="54864" marT="27432" marB="27432" anchor="ctr">
                     <a:solidFill>
                       <a:srgbClr val="FFFFFF"/>
                     </a:solidFill>
@@ -13067,17 +13807,16 @@
                     <a:p>
                       <a:pPr algn="ctr"/>
                       <a:r>
-                        <a:rPr sz="1250" b="0">
-                          <a:solidFill>
-                            <a:srgbClr val="14181F"/>
-                          </a:solidFill>
-                          <a:latin typeface="Aptos"/>
+                        <a:rPr sz="900" b="0">
+                          <a:solidFill>
+                            <a:srgbClr val="111827"/>
+                          </a:solidFill>
                         </a:rPr>
                         <a:t>Whether the answer letter is correct</a:t>
                       </a:r>
                     </a:p>
                   </a:txBody>
-                  <a:tcPr>
+                  <a:tcPr marL="54864" marR="54864" marT="27432" marB="27432" anchor="ctr">
                     <a:solidFill>
                       <a:srgbClr val="FFFFFF"/>
                     </a:solidFill>
@@ -13092,19 +13831,18 @@
                     <a:p>
                       <a:pPr algn="l"/>
                       <a:r>
-                        <a:rPr sz="1250" b="0">
-                          <a:solidFill>
-                            <a:srgbClr val="14181F"/>
-                          </a:solidFill>
-                          <a:latin typeface="Aptos"/>
+                        <a:rPr sz="900" b="0">
+                          <a:solidFill>
+                            <a:srgbClr val="111827"/>
+                          </a:solidFill>
                         </a:rPr>
                         <a:t>Cost / Count</a:t>
                       </a:r>
                     </a:p>
                   </a:txBody>
-                  <a:tcPr>
-                    <a:solidFill>
-                      <a:srgbClr val="F4F6F9"/>
+                  <a:tcPr marL="54864" marR="54864" marT="27432" marB="27432" anchor="ctr">
+                    <a:solidFill>
+                      <a:srgbClr val="F6F8FB"/>
                     </a:solidFill>
                   </a:tcPr>
                 </a:tc>
@@ -13115,19 +13853,18 @@
                     <a:p>
                       <a:pPr algn="ctr"/>
                       <a:r>
-                        <a:rPr sz="1250" b="0">
-                          <a:solidFill>
-                            <a:srgbClr val="14181F"/>
-                          </a:solidFill>
-                          <a:latin typeface="Aptos"/>
-                        </a:rPr>
-                        <a:t>Amount of visual evidence consumed</a:t>
-                      </a:r>
-                    </a:p>
-                  </a:txBody>
-                  <a:tcPr>
-                    <a:solidFill>
-                      <a:srgbClr val="F4F6F9"/>
+                        <a:rPr sz="900" b="0">
+                          <a:solidFill>
+                            <a:srgbClr val="111827"/>
+                          </a:solidFill>
+                        </a:rPr>
+                        <a:t>Amount of visual evidence acquired</a:t>
+                      </a:r>
+                    </a:p>
+                  </a:txBody>
+                  <a:tcPr marL="54864" marR="54864" marT="27432" marB="27432" anchor="ctr">
+                    <a:solidFill>
+                      <a:srgbClr val="F6F8FB"/>
                     </a:solidFill>
                   </a:tcPr>
                 </a:tc>
@@ -13140,17 +13877,16 @@
                     <a:p>
                       <a:pPr algn="l"/>
                       <a:r>
-                        <a:rPr sz="1250" b="0">
-                          <a:solidFill>
-                            <a:srgbClr val="14181F"/>
-                          </a:solidFill>
-                          <a:latin typeface="Aptos"/>
+                        <a:rPr sz="900" b="0">
+                          <a:solidFill>
+                            <a:srgbClr val="111827"/>
+                          </a:solidFill>
                         </a:rPr>
                         <a:t>mIoP, IoP@0.5</a:t>
                       </a:r>
                     </a:p>
                   </a:txBody>
-                  <a:tcPr>
+                  <a:tcPr marL="54864" marR="54864" marT="27432" marB="27432" anchor="ctr">
                     <a:solidFill>
                       <a:srgbClr val="FFFFFF"/>
                     </a:solidFill>
@@ -13163,17 +13899,16 @@
                     <a:p>
                       <a:pPr algn="ctr"/>
                       <a:r>
-                        <a:rPr sz="1250" b="0">
-                          <a:solidFill>
-                            <a:srgbClr val="14181F"/>
-                          </a:solidFill>
-                          <a:latin typeface="Aptos"/>
-                        </a:rPr>
-                        <a:t>How much selected evidence lies inside support span</a:t>
-                      </a:r>
-                    </a:p>
-                  </a:txBody>
-                  <a:tcPr>
+                        <a:rPr sz="900" b="0">
+                          <a:solidFill>
+                            <a:srgbClr val="111827"/>
+                          </a:solidFill>
+                        </a:rPr>
+                        <a:t>Selected evidence is inside the support span</a:t>
+                      </a:r>
+                    </a:p>
+                  </a:txBody>
+                  <a:tcPr marL="54864" marR="54864" marT="27432" marB="27432" anchor="ctr">
                     <a:solidFill>
                       <a:srgbClr val="FFFFFF"/>
                     </a:solidFill>
@@ -13188,19 +13923,18 @@
                     <a:p>
                       <a:pPr algn="l"/>
                       <a:r>
-                        <a:rPr sz="1250" b="0">
-                          <a:solidFill>
-                            <a:srgbClr val="14181F"/>
-                          </a:solidFill>
-                          <a:latin typeface="Aptos"/>
+                        <a:rPr sz="900" b="0">
+                          <a:solidFill>
+                            <a:srgbClr val="111827"/>
+                          </a:solidFill>
                         </a:rPr>
                         <a:t>mIoU, IoU@0.5</a:t>
                       </a:r>
                     </a:p>
                   </a:txBody>
-                  <a:tcPr>
-                    <a:solidFill>
-                      <a:srgbClr val="F4F6F9"/>
+                  <a:tcPr marL="54864" marR="54864" marT="27432" marB="27432" anchor="ctr">
+                    <a:solidFill>
+                      <a:srgbClr val="F6F8FB"/>
                     </a:solidFill>
                   </a:tcPr>
                 </a:tc>
@@ -13211,19 +13945,18 @@
                     <a:p>
                       <a:pPr algn="ctr"/>
                       <a:r>
-                        <a:rPr sz="1250" b="0">
-                          <a:solidFill>
-                            <a:srgbClr val="14181F"/>
-                          </a:solidFill>
-                          <a:latin typeface="Aptos"/>
+                        <a:rPr sz="900" b="0">
+                          <a:solidFill>
+                            <a:srgbClr val="111827"/>
+                          </a:solidFill>
                         </a:rPr>
                         <a:t>Stricter temporal overlap with support span</a:t>
                       </a:r>
                     </a:p>
                   </a:txBody>
-                  <a:tcPr>
-                    <a:solidFill>
-                      <a:srgbClr val="F4F6F9"/>
+                  <a:tcPr marL="54864" marR="54864" marT="27432" marB="27432" anchor="ctr">
+                    <a:solidFill>
+                      <a:srgbClr val="F6F8FB"/>
                     </a:solidFill>
                   </a:tcPr>
                 </a:tc>
@@ -13236,17 +13969,16 @@
                     <a:p>
                       <a:pPr algn="l"/>
                       <a:r>
-                        <a:rPr sz="1250" b="0">
-                          <a:solidFill>
-                            <a:srgbClr val="14181F"/>
-                          </a:solidFill>
-                          <a:latin typeface="Aptos"/>
+                        <a:rPr sz="900" b="0">
+                          <a:solidFill>
+                            <a:srgbClr val="111827"/>
+                          </a:solidFill>
                         </a:rPr>
                         <a:t>Acc@GQA</a:t>
                       </a:r>
                     </a:p>
                   </a:txBody>
-                  <a:tcPr>
+                  <a:tcPr marL="54864" marR="54864" marT="27432" marB="27432" anchor="ctr">
                     <a:solidFill>
                       <a:srgbClr val="FFFFFF"/>
                     </a:solidFill>
@@ -13259,17 +13991,16 @@
                     <a:p>
                       <a:pPr algn="ctr"/>
                       <a:r>
-                        <a:rPr sz="1250" b="0">
-                          <a:solidFill>
-                            <a:srgbClr val="14181F"/>
-                          </a:solidFill>
-                          <a:latin typeface="Aptos"/>
-                        </a:rPr>
-                        <a:t>Correct answer plus IoP@0.5 grounding</a:t>
-                      </a:r>
-                    </a:p>
-                  </a:txBody>
-                  <a:tcPr>
+                        <a:rPr sz="900" b="0">
+                          <a:solidFill>
+                            <a:srgbClr val="111827"/>
+                          </a:solidFill>
+                        </a:rPr>
+                        <a:t>Correct answer and IoP@0.5 grounding success</a:t>
+                      </a:r>
+                    </a:p>
+                  </a:txBody>
+                  <a:tcPr marL="54864" marR="54864" marT="27432" marB="27432" anchor="ctr">
                     <a:solidFill>
                       <a:srgbClr val="FFFFFF"/>
                     </a:solidFill>
@@ -13519,41 +14250,16 @@
           <a:p>
             <a:pPr algn="r"/>
             <a:r>
-              <a:rPr sz="850" b="0">
+              <a:rPr sz="750">
                 <a:solidFill>
-                  <a:srgbClr val="19375C"/>
+                  <a:srgbClr val="374151"/>
                 </a:solidFill>
-                <a:latin typeface="Aptos"/>
               </a:rPr>
-              <a:t>Final Presentation</a:t>
-            </a:r>
-          </a:p>
-        </p:txBody>
-      </p:sp>
-      <p:pic>
-        <p:nvPicPr>
-          <p:cNvPr id="8" name="Picture 7" descr="main_comparison_grounding_presentation.png"/>
-          <p:cNvPicPr>
-            <a:picLocks noChangeAspect="1"/>
-          </p:cNvPicPr>
-          <p:nvPr/>
-        </p:nvPicPr>
-        <p:blipFill>
-          <a:blip r:embed="rId2"/>
-          <a:stretch>
-            <a:fillRect/>
-          </a:stretch>
-        </p:blipFill>
-        <p:spPr>
-          <a:xfrm>
-            <a:off x="685800" y="777240"/>
-            <a:ext cx="10835640" cy="3898583"/>
-          </a:xfrm>
-          <a:prstGeom prst="rect">
-            <a:avLst/>
-          </a:prstGeom>
-        </p:spPr>
-      </p:pic>
+              <a:t>Research Presentation</a:t>
+            </a:r>
+          </a:p>
+        </p:txBody>
+      </p:sp>
       <p:sp>
         <p:nvSpPr>
           <p:cNvPr id="9" name="Rectangle 8"/>
@@ -13622,13 +14328,12 @@
           <a:lstStyle/>
           <a:p>
             <a:r>
-              <a:rPr sz="1200" b="1">
+              <a:rPr sz="1250" b="1">
                 <a:solidFill>
-                  <a:srgbClr val="2A598F"/>
+                  <a:srgbClr val="2F5E8D"/>
                 </a:solidFill>
-                <a:latin typeface="Aptos"/>
               </a:rPr>
-              <a:t>Context</a:t>
+              <a:t>Protocol context</a:t>
             </a:r>
           </a:p>
         </p:txBody>
@@ -13656,13 +14361,8 @@
           <a:lstStyle/>
           <a:p>
             <a:r>
-              <a:rPr sz="1300" b="0">
-                <a:solidFill>
-                  <a:srgbClr val="14181F"/>
-                </a:solidFill>
-                <a:latin typeface="Aptos"/>
-              </a:rPr>
-              <a:t>Prior rows provide scale; our grounding uses selected-evidence best overlap.</a:t>
+              <a:rPr sz="1019"/>
+              <a:t>Prior rows use official NExT-GQA metrics; our grounding uses selected-evidence best overlap.</a:t>
             </a:r>
           </a:p>
         </p:txBody>
@@ -13735,13 +14435,12 @@
           <a:lstStyle/>
           <a:p>
             <a:r>
-              <a:rPr sz="1200" b="1">
+              <a:rPr sz="1250" b="1">
                 <a:solidFill>
-                  <a:srgbClr val="3B8B74"/>
+                  <a:srgbClr val="3F927D"/>
                 </a:solidFill>
-                <a:latin typeface="Aptos"/>
               </a:rPr>
-              <a:t>Our proposed point</a:t>
+              <a:t>Proposed point</a:t>
             </a:r>
           </a:p>
         </p:txBody>
@@ -13769,13 +14468,8 @@
           <a:lstStyle/>
           <a:p>
             <a:r>
-              <a:rPr sz="1300" b="0">
-                <a:solidFill>
-                  <a:srgbClr val="14181F"/>
-                </a:solidFill>
-                <a:latin typeface="Aptos"/>
-              </a:rPr>
-              <a:t>MLP+NMS gives the best learned cost-aware tradeoff.</a:t>
+              <a:rPr sz="1019"/>
+              <a:t>Qwen MLP+NMS (Our): 0.689 Acc@QA, 0.321 Acc@GQA, cost 2.935.</a:t>
             </a:r>
           </a:p>
         </p:txBody>
@@ -13848,13 +14542,12 @@
           <a:lstStyle/>
           <a:p>
             <a:r>
-              <a:rPr sz="1200" b="1">
+              <a:rPr sz="1250" b="1">
                 <a:solidFill>
-                  <a:srgbClr val="B08400"/>
+                  <a:srgbClr val="BC8600"/>
                 </a:solidFill>
-                <a:latin typeface="Aptos"/>
               </a:rPr>
-              <a:t>Our upper point</a:t>
+              <a:t>References</a:t>
             </a:r>
           </a:p>
         </p:txBody>
@@ -13882,17 +14575,36 @@
           <a:lstStyle/>
           <a:p>
             <a:r>
-              <a:rPr sz="1300" b="0">
-                <a:solidFill>
-                  <a:srgbClr val="14181F"/>
-                </a:solidFill>
-                <a:latin typeface="Aptos"/>
-              </a:rPr>
-              <a:t>Fixed 3+3 gives the strongest grounding.</a:t>
-            </a:r>
-          </a:p>
-        </p:txBody>
-      </p:sp>
+              <a:rPr sz="1019"/>
+              <a:t>Oracle top-2 reaches 0.442 Acc@GQA at cost 2.493; fixed 3+3 reaches 0.454 at cost 7.500.</a:t>
+            </a:r>
+          </a:p>
+        </p:txBody>
+      </p:sp>
+      <p:pic>
+        <p:nvPicPr>
+          <p:cNvPr id="18" name="Picture 17" descr="main_comparison.png"/>
+          <p:cNvPicPr>
+            <a:picLocks noChangeAspect="1"/>
+          </p:cNvPicPr>
+          <p:nvPr/>
+        </p:nvPicPr>
+        <p:blipFill>
+          <a:blip r:embed="rId3"/>
+          <a:stretch>
+            <a:fillRect/>
+          </a:stretch>
+        </p:blipFill>
+        <p:spPr>
+          <a:xfrm>
+            <a:off x="685800" y="777240"/>
+            <a:ext cx="10835640" cy="3898583"/>
+          </a:xfrm>
+          <a:prstGeom prst="rect">
+            <a:avLst/>
+          </a:prstGeom>
+        </p:spPr>
+      </p:pic>
     </p:spTree>
   </p:cSld>
   <p:clrMapOvr>

--- a/docs/presentation/adaptive_evidence_acquisition_grounded_videoqa_presentation.pptx
+++ b/docs/presentation/adaptive_evidence_acquisition_grounded_videoqa_presentation.pptx
@@ -78,7 +78,7 @@
         <p:txBody>
           <a:bodyPr/>
           <a:p>
-            <a:fld id="{E43C3CF9-4663-47BE-B75A-B971A500FB28}" type="slidenum">
+            <a:fld id="{232F07CD-4478-4707-91F0-89801D5B9E74}" type="slidenum">
               <a:t>&lt;#&gt;</a:t>
             </a:fld>
           </a:p>
@@ -266,7 +266,7 @@
         <p:txBody>
           <a:bodyPr/>
           <a:p>
-            <a:fld id="{93D5CE7D-50D6-448C-8D56-FFD1AC286F9D}" type="slidenum">
+            <a:fld id="{A7B18FB2-3A6B-4A28-9197-AE841A8AB618}" type="slidenum">
               <a:t>&lt;#&gt;</a:t>
             </a:fld>
           </a:p>
@@ -522,7 +522,7 @@
         <p:txBody>
           <a:bodyPr/>
           <a:p>
-            <a:fld id="{CBF4CF02-3069-40F7-A431-43DEA600BE3E}" type="slidenum">
+            <a:fld id="{F88D5520-A277-4E9C-B8DE-BC6F118AF418}" type="slidenum">
               <a:t>&lt;#&gt;</a:t>
             </a:fld>
           </a:p>
@@ -846,7 +846,7 @@
         <p:txBody>
           <a:bodyPr/>
           <a:p>
-            <a:fld id="{2325DF1C-2792-4253-818C-1A4E622218C7}" type="slidenum">
+            <a:fld id="{623773FC-77B3-4200-9053-41710403E2C2}" type="slidenum">
               <a:t>&lt;#&gt;</a:t>
             </a:fld>
           </a:p>
@@ -1003,7 +1003,7 @@
         <p:txBody>
           <a:bodyPr/>
           <a:p>
-            <a:fld id="{9AF19517-6D8F-4B36-B340-833D59AAD2CB}" type="slidenum">
+            <a:fld id="{7205300D-8B22-446B-9A9D-3000D4EB48BD}" type="slidenum">
               <a:t>&lt;#&gt;</a:t>
             </a:fld>
           </a:p>
@@ -1157,7 +1157,7 @@
         <p:txBody>
           <a:bodyPr/>
           <a:p>
-            <a:fld id="{D4795399-37D8-4883-9347-496C0D16DD28}" type="slidenum">
+            <a:fld id="{C5051B86-7A06-499E-97A9-D2E43F02A827}" type="slidenum">
               <a:t>&lt;#&gt;</a:t>
             </a:fld>
           </a:p>
@@ -1345,7 +1345,7 @@
         <p:txBody>
           <a:bodyPr/>
           <a:p>
-            <a:fld id="{26101553-C9D5-42EE-B01B-6A5D2CBB35FC}" type="slidenum">
+            <a:fld id="{9557B0AF-848D-4AAB-9E04-D9B275F4AC94}" type="slidenum">
               <a:t>&lt;#&gt;</a:t>
             </a:fld>
           </a:p>
@@ -1465,7 +1465,7 @@
         <p:txBody>
           <a:bodyPr/>
           <a:p>
-            <a:fld id="{AF2281B6-E8C1-4ACC-A0C6-56A4C8F88862}" type="slidenum">
+            <a:fld id="{F3848838-E80F-490D-BFC1-3BE51C50CCF2}" type="slidenum">
               <a:t>&lt;#&gt;</a:t>
             </a:fld>
           </a:p>
@@ -1585,7 +1585,7 @@
         <p:txBody>
           <a:bodyPr/>
           <a:p>
-            <a:fld id="{C6147C86-BD08-425F-86CF-159934AD5F8B}" type="slidenum">
+            <a:fld id="{956CAFE0-4F62-413C-955B-5B5545A2313F}" type="slidenum">
               <a:t>&lt;#&gt;</a:t>
             </a:fld>
           </a:p>
@@ -1807,7 +1807,7 @@
         <p:txBody>
           <a:bodyPr/>
           <a:p>
-            <a:fld id="{FB2C5565-8322-413B-B4F5-DD5009DFD8B5}" type="slidenum">
+            <a:fld id="{DE87121A-6FC2-4999-A791-FE1BDF2A2089}" type="slidenum">
               <a:t>&lt;#&gt;</a:t>
             </a:fld>
           </a:p>
@@ -2029,7 +2029,7 @@
         <p:txBody>
           <a:bodyPr/>
           <a:p>
-            <a:fld id="{00A21807-E2DE-44FC-8C0A-A7D689980D48}" type="slidenum">
+            <a:fld id="{AA7A10D7-4237-41DE-B210-27430D23E8B4}" type="slidenum">
               <a:t>&lt;#&gt;</a:t>
             </a:fld>
           </a:p>
@@ -2251,7 +2251,7 @@
         <p:txBody>
           <a:bodyPr/>
           <a:p>
-            <a:fld id="{3C4CDA24-E7DC-4E9A-A490-9D35295BAF1B}" type="slidenum">
+            <a:fld id="{343E3F04-244F-438A-A499-FD723D996497}" type="slidenum">
               <a:t>&lt;#&gt;</a:t>
             </a:fld>
           </a:p>
@@ -2320,7 +2320,7 @@
         <p:spPr>
           <a:xfrm>
             <a:off x="3124080" y="6356520"/>
-            <a:ext cx="2893680" cy="363240"/>
+            <a:ext cx="2893320" cy="362880"/>
           </a:xfrm>
           <a:prstGeom prst="rect">
             <a:avLst/>
@@ -2377,7 +2377,7 @@
         <p:spPr>
           <a:xfrm>
             <a:off x="6553080" y="6356520"/>
-            <a:ext cx="2131920" cy="363240"/>
+            <a:ext cx="2131560" cy="362880"/>
           </a:xfrm>
           <a:prstGeom prst="rect">
             <a:avLst/>
@@ -2412,7 +2412,7 @@
               </a:lnSpc>
               <a:buNone/>
             </a:pPr>
-            <a:fld id="{37E30D77-CC9B-4A40-9F89-5F014F4FAFD7}" type="slidenum">
+            <a:fld id="{650E3BB0-5E18-4B42-9FD5-1D54E4AD478C}" type="slidenum">
               <a:rPr b="0" lang="en-US" sz="1200" spc="-1" strike="noStrike">
                 <a:solidFill>
                   <a:srgbClr val="8b8b8b"/>
@@ -2440,7 +2440,7 @@
         <p:spPr>
           <a:xfrm>
             <a:off x="457200" y="6356520"/>
-            <a:ext cx="2131920" cy="363240"/>
+            <a:ext cx="2131560" cy="362880"/>
           </a:xfrm>
           <a:prstGeom prst="rect">
             <a:avLst/>
@@ -2746,7 +2746,7 @@
         <p:spPr>
           <a:xfrm>
             <a:off x="0" y="0"/>
-            <a:ext cx="12189960" cy="501120"/>
+            <a:ext cx="12189600" cy="500760"/>
           </a:xfrm>
           <a:prstGeom prst="rect">
             <a:avLst/>
@@ -2787,7 +2787,7 @@
         <p:spPr>
           <a:xfrm>
             <a:off x="594360" y="1051560"/>
-            <a:ext cx="10788120" cy="731160"/>
+            <a:ext cx="10787760" cy="731160"/>
           </a:xfrm>
           <a:prstGeom prst="rect">
             <a:avLst/>
@@ -2804,7 +2804,7 @@
           <a:fontRef idx="minor"/>
         </p:style>
         <p:txBody>
-          <a:bodyPr lIns="146160" rIns="146160" tIns="91440" bIns="91440" anchor="t">
+          <a:bodyPr lIns="164520" rIns="164520" tIns="91440" bIns="91440" anchor="t">
             <a:spAutoFit/>
           </a:bodyPr>
           <a:p>
@@ -2839,7 +2839,7 @@
         <p:spPr>
           <a:xfrm>
             <a:off x="594360" y="1600200"/>
-            <a:ext cx="9325080" cy="548280"/>
+            <a:ext cx="9324720" cy="548280"/>
           </a:xfrm>
           <a:prstGeom prst="rect">
             <a:avLst/>
@@ -2856,7 +2856,7 @@
           <a:fontRef idx="minor"/>
         </p:style>
         <p:txBody>
-          <a:bodyPr lIns="146160" rIns="146160" tIns="91440" bIns="91440" anchor="t">
+          <a:bodyPr lIns="164520" rIns="164520" tIns="91440" bIns="91440" anchor="t">
             <a:spAutoFit/>
           </a:bodyPr>
           <a:p>
@@ -2891,7 +2891,7 @@
         <p:spPr>
           <a:xfrm>
             <a:off x="594360" y="2514600"/>
-            <a:ext cx="9599400" cy="517680"/>
+            <a:ext cx="9599040" cy="517680"/>
           </a:xfrm>
           <a:prstGeom prst="rect">
             <a:avLst/>
@@ -2908,7 +2908,7 @@
           <a:fontRef idx="minor"/>
         </p:style>
         <p:txBody>
-          <a:bodyPr lIns="146160" rIns="146160" tIns="91440" bIns="91440" anchor="t">
+          <a:bodyPr lIns="164520" rIns="164520" tIns="91440" bIns="91440" anchor="t">
             <a:spAutoFit/>
           </a:bodyPr>
           <a:p>
@@ -2943,7 +2943,7 @@
         <p:spPr>
           <a:xfrm>
             <a:off x="594360" y="3127320"/>
-            <a:ext cx="4935960" cy="1663560"/>
+            <a:ext cx="4935600" cy="1663200"/>
           </a:xfrm>
           <a:prstGeom prst="rect">
             <a:avLst/>
@@ -2982,7 +2982,7 @@
             <a:noAutofit/>
           </a:bodyPr>
           <a:p>
-            <a:pPr algn="ctr">
+            <a:pPr>
               <a:lnSpc>
                 <a:spcPct val="100000"/>
               </a:lnSpc>
@@ -3040,7 +3040,7 @@
         <p:spPr>
           <a:xfrm>
             <a:off x="5897880" y="3127320"/>
-            <a:ext cx="4935960" cy="1663560"/>
+            <a:ext cx="4935600" cy="1663200"/>
           </a:xfrm>
           <a:prstGeom prst="rect">
             <a:avLst/>
@@ -3079,7 +3079,7 @@
             <a:noAutofit/>
           </a:bodyPr>
           <a:p>
-            <a:pPr algn="ctr">
+            <a:pPr>
               <a:lnSpc>
                 <a:spcPct val="100000"/>
               </a:lnSpc>
@@ -3137,7 +3137,7 @@
         <p:spPr>
           <a:xfrm>
             <a:off x="594360" y="5806440"/>
-            <a:ext cx="9873720" cy="358920"/>
+            <a:ext cx="9873360" cy="358920"/>
           </a:xfrm>
           <a:prstGeom prst="rect">
             <a:avLst/>
@@ -3219,7 +3219,7 @@
         <p:spPr>
           <a:xfrm>
             <a:off x="0" y="0"/>
-            <a:ext cx="12189960" cy="565200"/>
+            <a:ext cx="12189600" cy="564840"/>
           </a:xfrm>
           <a:prstGeom prst="rect">
             <a:avLst/>
@@ -3260,7 +3260,7 @@
         <p:spPr>
           <a:xfrm>
             <a:off x="347400" y="73080"/>
-            <a:ext cx="9873720" cy="480960"/>
+            <a:ext cx="9873360" cy="480960"/>
           </a:xfrm>
           <a:prstGeom prst="rect">
             <a:avLst/>
@@ -3312,7 +3312,7 @@
         <p:spPr>
           <a:xfrm>
             <a:off x="10652760" y="82440"/>
-            <a:ext cx="1095480" cy="420120"/>
+            <a:ext cx="1095120" cy="420120"/>
           </a:xfrm>
           <a:prstGeom prst="rect">
             <a:avLst/>
@@ -4699,7 +4699,7 @@
         <p:spPr>
           <a:xfrm>
             <a:off x="822960" y="4224600"/>
-            <a:ext cx="4935960" cy="1352520"/>
+            <a:ext cx="4935600" cy="1352160"/>
           </a:xfrm>
           <a:prstGeom prst="rect">
             <a:avLst/>
@@ -4738,7 +4738,7 @@
             <a:noAutofit/>
           </a:bodyPr>
           <a:p>
-            <a:pPr algn="ctr">
+            <a:pPr>
               <a:lnSpc>
                 <a:spcPct val="100000"/>
               </a:lnSpc>
@@ -4796,7 +4796,7 @@
         <p:spPr>
           <a:xfrm>
             <a:off x="6263640" y="4224600"/>
-            <a:ext cx="4935960" cy="1352520"/>
+            <a:ext cx="4935600" cy="1352160"/>
           </a:xfrm>
           <a:prstGeom prst="rect">
             <a:avLst/>
@@ -4835,7 +4835,7 @@
             <a:noAutofit/>
           </a:bodyPr>
           <a:p>
-            <a:pPr algn="ctr">
+            <a:pPr>
               <a:lnSpc>
                 <a:spcPct val="100000"/>
               </a:lnSpc>
@@ -4923,7 +4923,7 @@
         <p:spPr>
           <a:xfrm>
             <a:off x="0" y="0"/>
-            <a:ext cx="12189960" cy="565200"/>
+            <a:ext cx="12189600" cy="564840"/>
           </a:xfrm>
           <a:prstGeom prst="rect">
             <a:avLst/>
@@ -4964,7 +4964,7 @@
         <p:spPr>
           <a:xfrm>
             <a:off x="347400" y="73080"/>
-            <a:ext cx="9873720" cy="480960"/>
+            <a:ext cx="9873360" cy="480960"/>
           </a:xfrm>
           <a:prstGeom prst="rect">
             <a:avLst/>
@@ -5016,7 +5016,7 @@
         <p:spPr>
           <a:xfrm>
             <a:off x="10652760" y="82440"/>
-            <a:ext cx="1095480" cy="420120"/>
+            <a:ext cx="1095120" cy="420120"/>
           </a:xfrm>
           <a:prstGeom prst="rect">
             <a:avLst/>
@@ -7606,7 +7606,7 @@
         <p:spPr>
           <a:xfrm>
             <a:off x="640080" y="5687640"/>
-            <a:ext cx="10971000" cy="380520"/>
+            <a:ext cx="10970640" cy="380520"/>
           </a:xfrm>
           <a:prstGeom prst="rect">
             <a:avLst/>
@@ -7627,7 +7627,7 @@
             <a:spAutoFit/>
           </a:bodyPr>
           <a:p>
-            <a:pPr algn="ctr">
+            <a:pPr>
               <a:lnSpc>
                 <a:spcPct val="100000"/>
               </a:lnSpc>
@@ -7691,7 +7691,7 @@
         <p:spPr>
           <a:xfrm>
             <a:off x="0" y="0"/>
-            <a:ext cx="12189960" cy="565200"/>
+            <a:ext cx="12189600" cy="564840"/>
           </a:xfrm>
           <a:prstGeom prst="rect">
             <a:avLst/>
@@ -7732,7 +7732,7 @@
         <p:spPr>
           <a:xfrm>
             <a:off x="347400" y="73080"/>
-            <a:ext cx="9873720" cy="480960"/>
+            <a:ext cx="9873360" cy="480960"/>
           </a:xfrm>
           <a:prstGeom prst="rect">
             <a:avLst/>
@@ -7784,7 +7784,7 @@
         <p:spPr>
           <a:xfrm>
             <a:off x="10652760" y="82440"/>
-            <a:ext cx="1095480" cy="420120"/>
+            <a:ext cx="1095120" cy="420120"/>
           </a:xfrm>
           <a:prstGeom prst="rect">
             <a:avLst/>
@@ -7836,7 +7836,7 @@
         <p:spPr>
           <a:xfrm>
             <a:off x="777240" y="1005840"/>
-            <a:ext cx="3061440" cy="1334160"/>
+            <a:ext cx="3061080" cy="1333800"/>
           </a:xfrm>
           <a:prstGeom prst="rect">
             <a:avLst/>
@@ -7871,11 +7871,11 @@
           <a:fontRef idx="minor"/>
         </p:style>
         <p:txBody>
-          <a:bodyPr lIns="146160" rIns="146160" tIns="91440" bIns="91440" anchor="ctr">
+          <a:bodyPr lIns="164520" rIns="164520" tIns="91440" bIns="91440" anchor="ctr">
             <a:noAutofit/>
           </a:bodyPr>
           <a:p>
-            <a:pPr algn="ctr">
+            <a:pPr>
               <a:lnSpc>
                 <a:spcPct val="100000"/>
               </a:lnSpc>
@@ -7899,7 +7899,7 @@
             </a:endParaRPr>
           </a:p>
           <a:p>
-            <a:pPr algn="ctr">
+            <a:pPr>
               <a:lnSpc>
                 <a:spcPct val="100000"/>
               </a:lnSpc>
@@ -7933,7 +7933,7 @@
         <p:spPr>
           <a:xfrm>
             <a:off x="4526280" y="1005840"/>
-            <a:ext cx="3061440" cy="1334160"/>
+            <a:ext cx="3061080" cy="1333800"/>
           </a:xfrm>
           <a:prstGeom prst="rect">
             <a:avLst/>
@@ -7968,11 +7968,11 @@
           <a:fontRef idx="minor"/>
         </p:style>
         <p:txBody>
-          <a:bodyPr lIns="146160" rIns="146160" tIns="91440" bIns="91440" anchor="ctr">
+          <a:bodyPr lIns="164520" rIns="164520" tIns="91440" bIns="91440" anchor="ctr">
             <a:noAutofit/>
           </a:bodyPr>
           <a:p>
-            <a:pPr algn="ctr">
+            <a:pPr>
               <a:lnSpc>
                 <a:spcPct val="100000"/>
               </a:lnSpc>
@@ -7996,7 +7996,7 @@
             </a:endParaRPr>
           </a:p>
           <a:p>
-            <a:pPr algn="ctr">
+            <a:pPr>
               <a:lnSpc>
                 <a:spcPct val="100000"/>
               </a:lnSpc>
@@ -8030,7 +8030,7 @@
         <p:spPr>
           <a:xfrm>
             <a:off x="8275320" y="1005840"/>
-            <a:ext cx="3061440" cy="1334160"/>
+            <a:ext cx="3061080" cy="1333800"/>
           </a:xfrm>
           <a:prstGeom prst="rect">
             <a:avLst/>
@@ -8065,11 +8065,11 @@
           <a:fontRef idx="minor"/>
         </p:style>
         <p:txBody>
-          <a:bodyPr lIns="146160" rIns="146160" tIns="91440" bIns="91440" anchor="ctr">
+          <a:bodyPr lIns="164520" rIns="164520" tIns="91440" bIns="91440" anchor="ctr">
             <a:noAutofit/>
           </a:bodyPr>
           <a:p>
-            <a:pPr algn="ctr">
+            <a:pPr>
               <a:lnSpc>
                 <a:spcPct val="100000"/>
               </a:lnSpc>
@@ -8093,7 +8093,7 @@
             </a:endParaRPr>
           </a:p>
           <a:p>
-            <a:pPr algn="ctr">
+            <a:pPr>
               <a:lnSpc>
                 <a:spcPct val="100000"/>
               </a:lnSpc>
@@ -8127,7 +8127,7 @@
         <p:spPr>
           <a:xfrm>
             <a:off x="822960" y="2834640"/>
-            <a:ext cx="4981680" cy="1416600"/>
+            <a:ext cx="4981320" cy="1416240"/>
           </a:xfrm>
           <a:prstGeom prst="rect">
             <a:avLst/>
@@ -8166,7 +8166,7 @@
             <a:noAutofit/>
           </a:bodyPr>
           <a:p>
-            <a:pPr algn="ctr">
+            <a:pPr>
               <a:lnSpc>
                 <a:spcPct val="100000"/>
               </a:lnSpc>
@@ -8224,7 +8224,7 @@
         <p:spPr>
           <a:xfrm>
             <a:off x="6263640" y="2834640"/>
-            <a:ext cx="4981680" cy="1416600"/>
+            <a:ext cx="4981320" cy="1416240"/>
           </a:xfrm>
           <a:prstGeom prst="rect">
             <a:avLst/>
@@ -8263,7 +8263,7 @@
             <a:noAutofit/>
           </a:bodyPr>
           <a:p>
-            <a:pPr algn="ctr">
+            <a:pPr>
               <a:lnSpc>
                 <a:spcPct val="100000"/>
               </a:lnSpc>
@@ -8321,7 +8321,7 @@
         <p:spPr>
           <a:xfrm>
             <a:off x="777240" y="4956120"/>
-            <a:ext cx="10743840" cy="633240"/>
+            <a:ext cx="10743480" cy="633240"/>
           </a:xfrm>
           <a:prstGeom prst="rect">
             <a:avLst/>
@@ -8343,7 +8343,7 @@
           <a:fontRef idx="minor"/>
         </p:style>
         <p:txBody>
-          <a:bodyPr lIns="182880" rIns="182880" tIns="91440" bIns="91440" anchor="t">
+          <a:bodyPr lIns="164520" rIns="164520" tIns="91440" bIns="91440" anchor="t">
             <a:spAutoFit/>
           </a:bodyPr>
           <a:p>
@@ -8408,7 +8408,7 @@
         <p:spPr>
           <a:xfrm>
             <a:off x="0" y="0"/>
-            <a:ext cx="12189960" cy="565200"/>
+            <a:ext cx="12189600" cy="564840"/>
           </a:xfrm>
           <a:prstGeom prst="rect">
             <a:avLst/>
@@ -8449,7 +8449,7 @@
         <p:spPr>
           <a:xfrm>
             <a:off x="347400" y="73080"/>
-            <a:ext cx="9873720" cy="480960"/>
+            <a:ext cx="9873360" cy="480960"/>
           </a:xfrm>
           <a:prstGeom prst="rect">
             <a:avLst/>
@@ -8501,7 +8501,7 @@
         <p:spPr>
           <a:xfrm>
             <a:off x="10652760" y="82440"/>
-            <a:ext cx="1095480" cy="420120"/>
+            <a:ext cx="1095120" cy="420120"/>
           </a:xfrm>
           <a:prstGeom prst="rect">
             <a:avLst/>
@@ -8557,7 +8557,7 @@
         <p:spPr>
           <a:xfrm>
             <a:off x="640080" y="749880"/>
-            <a:ext cx="10925280" cy="3838680"/>
+            <a:ext cx="10924920" cy="3838320"/>
           </a:xfrm>
           <a:prstGeom prst="rect">
             <a:avLst/>
@@ -8576,7 +8576,7 @@
         <p:spPr>
           <a:xfrm>
             <a:off x="822960" y="4736520"/>
-            <a:ext cx="10559880" cy="1389240"/>
+            <a:ext cx="10559520" cy="1388880"/>
           </a:xfrm>
           <a:prstGeom prst="rect">
             <a:avLst/>
@@ -8619,7 +8619,7 @@
         <p:spPr>
           <a:xfrm>
             <a:off x="932760" y="4855320"/>
-            <a:ext cx="10340280" cy="230760"/>
+            <a:ext cx="10339920" cy="230760"/>
           </a:xfrm>
           <a:prstGeom prst="rect">
             <a:avLst/>
@@ -8640,7 +8640,7 @@
             <a:spAutoFit/>
           </a:bodyPr>
           <a:p>
-            <a:pPr algn="ctr">
+            <a:pPr>
               <a:lnSpc>
                 <a:spcPct val="100000"/>
               </a:lnSpc>
@@ -8671,7 +8671,7 @@
         <p:spPr>
           <a:xfrm>
             <a:off x="987480" y="5248800"/>
-            <a:ext cx="10230840" cy="507960"/>
+            <a:ext cx="10230480" cy="617400"/>
           </a:xfrm>
           <a:prstGeom prst="rect">
             <a:avLst/>
@@ -8688,7 +8688,7 @@
           <a:fontRef idx="minor"/>
         </p:style>
         <p:txBody>
-          <a:bodyPr lIns="73080" rIns="73080" tIns="36720" bIns="36720" anchor="t">
+          <a:bodyPr lIns="164520" rIns="164520" tIns="91440" bIns="91440" anchor="t">
             <a:spAutoFit/>
           </a:bodyPr>
           <a:p>
@@ -8756,7 +8756,7 @@
         <p:spPr>
           <a:xfrm>
             <a:off x="0" y="0"/>
-            <a:ext cx="12189960" cy="565200"/>
+            <a:ext cx="12189600" cy="564840"/>
           </a:xfrm>
           <a:prstGeom prst="rect">
             <a:avLst/>
@@ -8797,7 +8797,7 @@
         <p:spPr>
           <a:xfrm>
             <a:off x="347400" y="73080"/>
-            <a:ext cx="9873720" cy="480960"/>
+            <a:ext cx="9873360" cy="480960"/>
           </a:xfrm>
           <a:prstGeom prst="rect">
             <a:avLst/>
@@ -8849,7 +8849,7 @@
         <p:spPr>
           <a:xfrm>
             <a:off x="10652760" y="82440"/>
-            <a:ext cx="1095480" cy="420120"/>
+            <a:ext cx="1095120" cy="420120"/>
           </a:xfrm>
           <a:prstGeom prst="rect">
             <a:avLst/>
@@ -9556,7 +9556,7 @@
         <p:spPr>
           <a:xfrm>
             <a:off x="914400" y="4827960"/>
-            <a:ext cx="10330920" cy="1169640"/>
+            <a:ext cx="10330560" cy="1169280"/>
           </a:xfrm>
           <a:prstGeom prst="rect">
             <a:avLst/>
@@ -9591,11 +9591,11 @@
           <a:fontRef idx="minor"/>
         </p:style>
         <p:txBody>
-          <a:bodyPr lIns="182880" rIns="182880" tIns="91440" bIns="91440" anchor="ctr">
+          <a:bodyPr lIns="164520" rIns="164520" tIns="91440" bIns="91440" anchor="ctr">
             <a:noAutofit/>
           </a:bodyPr>
           <a:p>
-            <a:pPr algn="ctr">
+            <a:pPr>
               <a:lnSpc>
                 <a:spcPct val="100000"/>
               </a:lnSpc>
@@ -9683,7 +9683,7 @@
         <p:spPr>
           <a:xfrm>
             <a:off x="0" y="0"/>
-            <a:ext cx="12189960" cy="565200"/>
+            <a:ext cx="12189600" cy="564840"/>
           </a:xfrm>
           <a:prstGeom prst="rect">
             <a:avLst/>
@@ -9724,7 +9724,7 @@
         <p:spPr>
           <a:xfrm>
             <a:off x="347400" y="73080"/>
-            <a:ext cx="9873720" cy="480960"/>
+            <a:ext cx="9873360" cy="480960"/>
           </a:xfrm>
           <a:prstGeom prst="rect">
             <a:avLst/>
@@ -9776,7 +9776,7 @@
         <p:spPr>
           <a:xfrm>
             <a:off x="10652760" y="82440"/>
-            <a:ext cx="1095480" cy="420120"/>
+            <a:ext cx="1095120" cy="420120"/>
           </a:xfrm>
           <a:prstGeom prst="rect">
             <a:avLst/>
@@ -9828,7 +9828,7 @@
         <p:spPr>
           <a:xfrm>
             <a:off x="731520" y="868680"/>
-            <a:ext cx="10742400" cy="1114920"/>
+            <a:ext cx="10742040" cy="1114560"/>
           </a:xfrm>
           <a:prstGeom prst="rect">
             <a:avLst/>
@@ -9867,7 +9867,7 @@
             <a:noAutofit/>
           </a:bodyPr>
           <a:p>
-            <a:pPr algn="ctr">
+            <a:pPr>
               <a:lnSpc>
                 <a:spcPct val="100000"/>
               </a:lnSpc>
@@ -9925,7 +9925,7 @@
         <p:spPr>
           <a:xfrm>
             <a:off x="731520" y="2267640"/>
-            <a:ext cx="10742400" cy="1114920"/>
+            <a:ext cx="10742040" cy="1114560"/>
           </a:xfrm>
           <a:prstGeom prst="rect">
             <a:avLst/>
@@ -9964,7 +9964,7 @@
             <a:noAutofit/>
           </a:bodyPr>
           <a:p>
-            <a:pPr algn="ctr">
+            <a:pPr>
               <a:lnSpc>
                 <a:spcPct val="100000"/>
               </a:lnSpc>
@@ -10022,7 +10022,7 @@
         <p:spPr>
           <a:xfrm>
             <a:off x="731520" y="3666600"/>
-            <a:ext cx="10742400" cy="1114920"/>
+            <a:ext cx="10742040" cy="1114560"/>
           </a:xfrm>
           <a:prstGeom prst="rect">
             <a:avLst/>
@@ -10061,7 +10061,7 @@
             <a:noAutofit/>
           </a:bodyPr>
           <a:p>
-            <a:pPr algn="ctr">
+            <a:pPr>
               <a:lnSpc>
                 <a:spcPct val="100000"/>
               </a:lnSpc>
@@ -10119,7 +10119,7 @@
         <p:spPr>
           <a:xfrm>
             <a:off x="868680" y="5321880"/>
-            <a:ext cx="10423800" cy="633240"/>
+            <a:ext cx="10423440" cy="633240"/>
           </a:xfrm>
           <a:prstGeom prst="rect">
             <a:avLst/>
@@ -10141,7 +10141,7 @@
           <a:fontRef idx="minor"/>
         </p:style>
         <p:txBody>
-          <a:bodyPr lIns="182880" rIns="182880" tIns="91440" bIns="91440" anchor="t">
+          <a:bodyPr lIns="164520" rIns="164520" tIns="91440" bIns="91440" anchor="t">
             <a:spAutoFit/>
           </a:bodyPr>
           <a:p>
@@ -10206,7 +10206,7 @@
         <p:spPr>
           <a:xfrm>
             <a:off x="0" y="0"/>
-            <a:ext cx="12189960" cy="565200"/>
+            <a:ext cx="12189600" cy="564840"/>
           </a:xfrm>
           <a:prstGeom prst="rect">
             <a:avLst/>
@@ -10247,7 +10247,7 @@
         <p:spPr>
           <a:xfrm>
             <a:off x="347400" y="73080"/>
-            <a:ext cx="9873720" cy="480960"/>
+            <a:ext cx="9873360" cy="480960"/>
           </a:xfrm>
           <a:prstGeom prst="rect">
             <a:avLst/>
@@ -10299,7 +10299,7 @@
         <p:spPr>
           <a:xfrm>
             <a:off x="10652760" y="82440"/>
-            <a:ext cx="1095480" cy="420120"/>
+            <a:ext cx="1095120" cy="420120"/>
           </a:xfrm>
           <a:prstGeom prst="rect">
             <a:avLst/>
@@ -10351,7 +10351,7 @@
         <p:spPr>
           <a:xfrm>
             <a:off x="777240" y="896040"/>
-            <a:ext cx="10697760" cy="840600"/>
+            <a:ext cx="10697400" cy="840240"/>
           </a:xfrm>
           <a:prstGeom prst="roundRect">
             <a:avLst>
@@ -10387,7 +10387,7 @@
           <a:fontRef idx="minor"/>
         </p:style>
         <p:txBody>
-          <a:bodyPr lIns="182880" rIns="182880" tIns="109800" bIns="109800" anchor="ctr">
+          <a:bodyPr lIns="164520" rIns="164520" tIns="91440" bIns="91440" anchor="ctr">
             <a:noAutofit/>
           </a:bodyPr>
           <a:p>
@@ -10446,7 +10446,7 @@
         <p:spPr>
           <a:xfrm>
             <a:off x="777240" y="1993320"/>
-            <a:ext cx="5165640" cy="1352520"/>
+            <a:ext cx="5165280" cy="1352160"/>
           </a:xfrm>
           <a:prstGeom prst="roundRect">
             <a:avLst>
@@ -10482,7 +10482,7 @@
           <a:fontRef idx="minor"/>
         </p:style>
         <p:txBody>
-          <a:bodyPr lIns="182880" rIns="182880" tIns="109800" bIns="109800" anchor="ctr">
+          <a:bodyPr lIns="164520" rIns="164520" tIns="91440" bIns="91440" anchor="ctr">
             <a:noAutofit/>
           </a:bodyPr>
           <a:p>
@@ -10541,7 +10541,7 @@
         <p:spPr>
           <a:xfrm>
             <a:off x="6263640" y="1993320"/>
-            <a:ext cx="5165640" cy="1352520"/>
+            <a:ext cx="5165280" cy="1352160"/>
           </a:xfrm>
           <a:prstGeom prst="roundRect">
             <a:avLst>
@@ -10577,7 +10577,7 @@
           <a:fontRef idx="minor"/>
         </p:style>
         <p:txBody>
-          <a:bodyPr lIns="182880" rIns="182880" tIns="109800" bIns="109800" anchor="ctr">
+          <a:bodyPr lIns="164520" rIns="164520" tIns="91440" bIns="91440" anchor="ctr">
             <a:noAutofit/>
           </a:bodyPr>
           <a:p>
@@ -10636,7 +10636,7 @@
         <p:spPr>
           <a:xfrm>
             <a:off x="777240" y="3675960"/>
-            <a:ext cx="5165640" cy="1352520"/>
+            <a:ext cx="5165280" cy="1352160"/>
           </a:xfrm>
           <a:prstGeom prst="roundRect">
             <a:avLst>
@@ -10672,7 +10672,7 @@
           <a:fontRef idx="minor"/>
         </p:style>
         <p:txBody>
-          <a:bodyPr lIns="182880" rIns="182880" tIns="109800" bIns="109800" anchor="ctr">
+          <a:bodyPr lIns="164520" rIns="164520" tIns="91440" bIns="91440" anchor="ctr">
             <a:noAutofit/>
           </a:bodyPr>
           <a:p>
@@ -10731,7 +10731,7 @@
         <p:spPr>
           <a:xfrm>
             <a:off x="6263640" y="3675960"/>
-            <a:ext cx="5165640" cy="1352520"/>
+            <a:ext cx="5165280" cy="1352160"/>
           </a:xfrm>
           <a:prstGeom prst="roundRect">
             <a:avLst>
@@ -10767,7 +10767,7 @@
           <a:fontRef idx="minor"/>
         </p:style>
         <p:txBody>
-          <a:bodyPr lIns="182880" rIns="182880" tIns="109800" bIns="109800" anchor="ctr">
+          <a:bodyPr lIns="164520" rIns="164520" tIns="91440" bIns="91440" anchor="ctr">
             <a:noAutofit/>
           </a:bodyPr>
           <a:p>
@@ -10826,7 +10826,7 @@
         <p:spPr>
           <a:xfrm>
             <a:off x="1005840" y="5596200"/>
-            <a:ext cx="10194840" cy="694080"/>
+            <a:ext cx="10194480" cy="693720"/>
           </a:xfrm>
           <a:prstGeom prst="roundRect">
             <a:avLst>
@@ -10862,7 +10862,7 @@
           <a:fontRef idx="minor"/>
         </p:style>
         <p:txBody>
-          <a:bodyPr lIns="182880" rIns="182880" tIns="109800" bIns="109800" anchor="ctr">
+          <a:bodyPr lIns="164520" rIns="164520" tIns="91440" bIns="91440" anchor="ctr">
             <a:noAutofit/>
           </a:bodyPr>
           <a:p>
@@ -10951,7 +10951,7 @@
         <p:spPr>
           <a:xfrm>
             <a:off x="0" y="0"/>
-            <a:ext cx="12189960" cy="565200"/>
+            <a:ext cx="12189600" cy="564840"/>
           </a:xfrm>
           <a:prstGeom prst="rect">
             <a:avLst/>
@@ -10992,7 +10992,7 @@
         <p:spPr>
           <a:xfrm>
             <a:off x="347400" y="73080"/>
-            <a:ext cx="9873720" cy="480960"/>
+            <a:ext cx="9873360" cy="480960"/>
           </a:xfrm>
           <a:prstGeom prst="rect">
             <a:avLst/>
@@ -11044,7 +11044,7 @@
         <p:spPr>
           <a:xfrm>
             <a:off x="10652760" y="82440"/>
-            <a:ext cx="1095480" cy="420120"/>
+            <a:ext cx="1095120" cy="420120"/>
           </a:xfrm>
           <a:prstGeom prst="rect">
             <a:avLst/>
@@ -11096,7 +11096,7 @@
         <p:spPr>
           <a:xfrm>
             <a:off x="731520" y="896040"/>
-            <a:ext cx="10697760" cy="1078200"/>
+            <a:ext cx="10697400" cy="1077840"/>
           </a:xfrm>
           <a:prstGeom prst="rect">
             <a:avLst/>
@@ -11135,7 +11135,7 @@
             <a:noAutofit/>
           </a:bodyPr>
           <a:p>
-            <a:pPr algn="ctr">
+            <a:pPr>
               <a:lnSpc>
                 <a:spcPct val="100000"/>
               </a:lnSpc>
@@ -11193,7 +11193,7 @@
         <p:spPr>
           <a:xfrm>
             <a:off x="731520" y="2359080"/>
-            <a:ext cx="10697760" cy="1078200"/>
+            <a:ext cx="10697400" cy="1077840"/>
           </a:xfrm>
           <a:prstGeom prst="rect">
             <a:avLst/>
@@ -11232,7 +11232,7 @@
             <a:noAutofit/>
           </a:bodyPr>
           <a:p>
-            <a:pPr algn="ctr">
+            <a:pPr>
               <a:lnSpc>
                 <a:spcPct val="100000"/>
               </a:lnSpc>
@@ -11290,7 +11290,7 @@
         <p:spPr>
           <a:xfrm>
             <a:off x="731520" y="3822120"/>
-            <a:ext cx="10697760" cy="1078200"/>
+            <a:ext cx="10697400" cy="1077840"/>
           </a:xfrm>
           <a:prstGeom prst="rect">
             <a:avLst/>
@@ -11329,7 +11329,7 @@
             <a:noAutofit/>
           </a:bodyPr>
           <a:p>
-            <a:pPr algn="ctr">
+            <a:pPr>
               <a:lnSpc>
                 <a:spcPct val="100000"/>
               </a:lnSpc>
@@ -11387,7 +11387,7 @@
         <p:spPr>
           <a:xfrm>
             <a:off x="868680" y="5413320"/>
-            <a:ext cx="10239480" cy="608760"/>
+            <a:ext cx="10239120" cy="608760"/>
           </a:xfrm>
           <a:prstGeom prst="rect">
             <a:avLst/>
@@ -11472,7 +11472,7 @@
         <p:spPr>
           <a:xfrm>
             <a:off x="0" y="0"/>
-            <a:ext cx="12189960" cy="565200"/>
+            <a:ext cx="12189600" cy="564840"/>
           </a:xfrm>
           <a:prstGeom prst="rect">
             <a:avLst/>
@@ -11513,7 +11513,7 @@
         <p:spPr>
           <a:xfrm>
             <a:off x="347400" y="73080"/>
-            <a:ext cx="9873720" cy="480960"/>
+            <a:ext cx="9873360" cy="480960"/>
           </a:xfrm>
           <a:prstGeom prst="rect">
             <a:avLst/>
@@ -11565,7 +11565,7 @@
         <p:spPr>
           <a:xfrm>
             <a:off x="10652760" y="82440"/>
-            <a:ext cx="1095480" cy="420120"/>
+            <a:ext cx="1095120" cy="420120"/>
           </a:xfrm>
           <a:prstGeom prst="rect">
             <a:avLst/>
@@ -11617,7 +11617,7 @@
         <p:spPr>
           <a:xfrm>
             <a:off x="822960" y="1005840"/>
-            <a:ext cx="4935960" cy="3198960"/>
+            <a:ext cx="4935600" cy="3198960"/>
           </a:xfrm>
           <a:prstGeom prst="rect">
             <a:avLst/>
@@ -11634,7 +11634,7 @@
           <a:fontRef idx="minor"/>
         </p:style>
         <p:txBody>
-          <a:bodyPr lIns="146160" rIns="146160" tIns="91440" bIns="91440" anchor="t">
+          <a:bodyPr lIns="164520" rIns="164520" tIns="91440" bIns="91440" anchor="t">
             <a:spAutoFit/>
           </a:bodyPr>
           <a:p>
@@ -11733,7 +11733,7 @@
         <p:spPr>
           <a:xfrm>
             <a:off x="6080760" y="960120"/>
-            <a:ext cx="4799520" cy="1663200"/>
+            <a:ext cx="4799160" cy="1662840"/>
           </a:xfrm>
           <a:prstGeom prst="rect">
             <a:avLst/>
@@ -11772,7 +11772,7 @@
             <a:noAutofit/>
           </a:bodyPr>
           <a:p>
-            <a:pPr algn="ctr">
+            <a:pPr>
               <a:lnSpc>
                 <a:spcPct val="100000"/>
               </a:lnSpc>
@@ -11854,7 +11854,7 @@
         <p:spPr>
           <a:xfrm>
             <a:off x="6080760" y="3017520"/>
-            <a:ext cx="4799520" cy="1297440"/>
+            <a:ext cx="4799160" cy="1297080"/>
           </a:xfrm>
           <a:prstGeom prst="rect">
             <a:avLst/>
@@ -11893,7 +11893,7 @@
             <a:noAutofit/>
           </a:bodyPr>
           <a:p>
-            <a:pPr algn="ctr">
+            <a:pPr>
               <a:lnSpc>
                 <a:spcPct val="100000"/>
               </a:lnSpc>
@@ -11951,7 +11951,7 @@
         <p:spPr>
           <a:xfrm>
             <a:off x="960120" y="4800600"/>
-            <a:ext cx="4890240" cy="840600"/>
+            <a:ext cx="4889880" cy="840240"/>
           </a:xfrm>
           <a:prstGeom prst="rect">
             <a:avLst/>
@@ -11990,7 +11990,7 @@
             <a:noAutofit/>
           </a:bodyPr>
           <a:p>
-            <a:pPr algn="ctr">
+            <a:pPr>
               <a:lnSpc>
                 <a:spcPct val="100000"/>
               </a:lnSpc>
@@ -12048,7 +12048,7 @@
         <p:spPr>
           <a:xfrm>
             <a:off x="5989320" y="4800600"/>
-            <a:ext cx="4890240" cy="840600"/>
+            <a:ext cx="4889880" cy="840240"/>
           </a:xfrm>
           <a:prstGeom prst="rect">
             <a:avLst/>
@@ -12087,7 +12087,7 @@
             <a:noAutofit/>
           </a:bodyPr>
           <a:p>
-            <a:pPr algn="ctr">
+            <a:pPr>
               <a:lnSpc>
                 <a:spcPct val="100000"/>
               </a:lnSpc>
@@ -12175,7 +12175,7 @@
         <p:spPr>
           <a:xfrm>
             <a:off x="0" y="0"/>
-            <a:ext cx="12189960" cy="565200"/>
+            <a:ext cx="12189600" cy="564840"/>
           </a:xfrm>
           <a:prstGeom prst="rect">
             <a:avLst/>
@@ -12216,7 +12216,7 @@
         <p:spPr>
           <a:xfrm>
             <a:off x="347400" y="73080"/>
-            <a:ext cx="9873720" cy="480960"/>
+            <a:ext cx="9873360" cy="480960"/>
           </a:xfrm>
           <a:prstGeom prst="rect">
             <a:avLst/>
@@ -12268,7 +12268,7 @@
         <p:spPr>
           <a:xfrm>
             <a:off x="10652760" y="82440"/>
-            <a:ext cx="1095480" cy="420120"/>
+            <a:ext cx="1095120" cy="420120"/>
           </a:xfrm>
           <a:prstGeom prst="rect">
             <a:avLst/>
@@ -13133,7 +13133,7 @@
         <p:spPr>
           <a:xfrm>
             <a:off x="822960" y="4754880"/>
-            <a:ext cx="10559520" cy="1114920"/>
+            <a:ext cx="10559160" cy="1114560"/>
           </a:xfrm>
           <a:prstGeom prst="rect">
             <a:avLst/>
@@ -13168,11 +13168,11 @@
           <a:fontRef idx="minor"/>
         </p:style>
         <p:txBody>
-          <a:bodyPr lIns="182880" rIns="182880" tIns="91440" bIns="91440" anchor="ctr">
+          <a:bodyPr lIns="164520" rIns="164520" tIns="91440" bIns="91440" anchor="ctr">
             <a:noAutofit/>
           </a:bodyPr>
           <a:p>
-            <a:pPr algn="ctr">
+            <a:pPr>
               <a:lnSpc>
                 <a:spcPct val="100000"/>
               </a:lnSpc>
@@ -13260,7 +13260,7 @@
         <p:spPr>
           <a:xfrm>
             <a:off x="0" y="0"/>
-            <a:ext cx="12189960" cy="565200"/>
+            <a:ext cx="12189600" cy="564840"/>
           </a:xfrm>
           <a:prstGeom prst="rect">
             <a:avLst/>
@@ -13301,7 +13301,7 @@
         <p:spPr>
           <a:xfrm>
             <a:off x="347400" y="73080"/>
-            <a:ext cx="9873720" cy="480960"/>
+            <a:ext cx="9873360" cy="480960"/>
           </a:xfrm>
           <a:prstGeom prst="rect">
             <a:avLst/>
@@ -13353,7 +13353,7 @@
         <p:spPr>
           <a:xfrm>
             <a:off x="10652760" y="82440"/>
-            <a:ext cx="1095480" cy="420120"/>
+            <a:ext cx="1095120" cy="420120"/>
           </a:xfrm>
           <a:prstGeom prst="rect">
             <a:avLst/>
@@ -13405,7 +13405,7 @@
         <p:spPr>
           <a:xfrm>
             <a:off x="685800" y="914400"/>
-            <a:ext cx="5073120" cy="1352520"/>
+            <a:ext cx="5072760" cy="1352160"/>
           </a:xfrm>
           <a:prstGeom prst="rect">
             <a:avLst/>
@@ -13444,7 +13444,7 @@
             <a:noAutofit/>
           </a:bodyPr>
           <a:p>
-            <a:pPr algn="ctr">
+            <a:pPr>
               <a:lnSpc>
                 <a:spcPct val="100000"/>
               </a:lnSpc>
@@ -13468,7 +13468,7 @@
             </a:endParaRPr>
           </a:p>
           <a:p>
-            <a:pPr algn="ctr">
+            <a:pPr>
               <a:lnSpc>
                 <a:spcPct val="100000"/>
               </a:lnSpc>
@@ -13526,7 +13526,7 @@
         <p:spPr>
           <a:xfrm>
             <a:off x="6172200" y="914400"/>
-            <a:ext cx="5073120" cy="1352520"/>
+            <a:ext cx="5072760" cy="1352160"/>
           </a:xfrm>
           <a:prstGeom prst="rect">
             <a:avLst/>
@@ -13565,7 +13565,7 @@
             <a:noAutofit/>
           </a:bodyPr>
           <a:p>
-            <a:pPr algn="ctr">
+            <a:pPr>
               <a:lnSpc>
                 <a:spcPct val="100000"/>
               </a:lnSpc>
@@ -13589,7 +13589,7 @@
             </a:endParaRPr>
           </a:p>
           <a:p>
-            <a:pPr algn="ctr">
+            <a:pPr>
               <a:lnSpc>
                 <a:spcPct val="100000"/>
               </a:lnSpc>
@@ -13647,7 +13647,7 @@
         <p:spPr>
           <a:xfrm>
             <a:off x="685800" y="2761560"/>
-            <a:ext cx="5073120" cy="1352520"/>
+            <a:ext cx="5072760" cy="1352160"/>
           </a:xfrm>
           <a:prstGeom prst="rect">
             <a:avLst/>
@@ -13686,7 +13686,7 @@
             <a:noAutofit/>
           </a:bodyPr>
           <a:p>
-            <a:pPr algn="ctr">
+            <a:pPr>
               <a:lnSpc>
                 <a:spcPct val="100000"/>
               </a:lnSpc>
@@ -13710,7 +13710,7 @@
             </a:endParaRPr>
           </a:p>
           <a:p>
-            <a:pPr algn="ctr">
+            <a:pPr>
               <a:lnSpc>
                 <a:spcPct val="100000"/>
               </a:lnSpc>
@@ -13768,7 +13768,7 @@
         <p:spPr>
           <a:xfrm>
             <a:off x="6172200" y="2761560"/>
-            <a:ext cx="5073120" cy="1352520"/>
+            <a:ext cx="5072760" cy="1352160"/>
           </a:xfrm>
           <a:prstGeom prst="rect">
             <a:avLst/>
@@ -13807,7 +13807,7 @@
             <a:noAutofit/>
           </a:bodyPr>
           <a:p>
-            <a:pPr algn="ctr">
+            <a:pPr>
               <a:lnSpc>
                 <a:spcPct val="100000"/>
               </a:lnSpc>
@@ -13865,7 +13865,7 @@
         <p:spPr>
           <a:xfrm>
             <a:off x="868680" y="5193720"/>
-            <a:ext cx="10422360" cy="608760"/>
+            <a:ext cx="10422000" cy="608760"/>
           </a:xfrm>
           <a:prstGeom prst="rect">
             <a:avLst/>
@@ -13882,11 +13882,11 @@
           <a:fontRef idx="minor"/>
         </p:style>
         <p:txBody>
-          <a:bodyPr lIns="182880" rIns="182880" tIns="91440" bIns="91440" anchor="t">
+          <a:bodyPr lIns="164520" rIns="164520" tIns="91440" bIns="91440" anchor="t">
             <a:spAutoFit/>
           </a:bodyPr>
           <a:p>
-            <a:pPr algn="ctr">
+            <a:pPr>
               <a:lnSpc>
                 <a:spcPct val="100000"/>
               </a:lnSpc>
@@ -13950,7 +13950,7 @@
         <p:spPr>
           <a:xfrm>
             <a:off x="0" y="0"/>
-            <a:ext cx="12189960" cy="565200"/>
+            <a:ext cx="12189600" cy="564840"/>
           </a:xfrm>
           <a:prstGeom prst="rect">
             <a:avLst/>
@@ -13991,7 +13991,7 @@
         <p:spPr>
           <a:xfrm>
             <a:off x="347400" y="73080"/>
-            <a:ext cx="9873720" cy="480960"/>
+            <a:ext cx="9873360" cy="480960"/>
           </a:xfrm>
           <a:prstGeom prst="rect">
             <a:avLst/>
@@ -14043,7 +14043,7 @@
         <p:spPr>
           <a:xfrm>
             <a:off x="10652760" y="82440"/>
-            <a:ext cx="1095480" cy="420120"/>
+            <a:ext cx="1095120" cy="420120"/>
           </a:xfrm>
           <a:prstGeom prst="rect">
             <a:avLst/>
@@ -14095,7 +14095,7 @@
         <p:spPr>
           <a:xfrm>
             <a:off x="502920" y="1225440"/>
-            <a:ext cx="2055600" cy="1443960"/>
+            <a:ext cx="2055240" cy="1443600"/>
           </a:xfrm>
           <a:prstGeom prst="rect">
             <a:avLst/>
@@ -14130,11 +14130,11 @@
           <a:fontRef idx="minor"/>
         </p:style>
         <p:txBody>
-          <a:bodyPr lIns="118800" rIns="118800" tIns="91440" bIns="91440" anchor="ctr">
+          <a:bodyPr lIns="164520" rIns="164520" tIns="91440" bIns="91440" anchor="ctr">
             <a:noAutofit/>
           </a:bodyPr>
           <a:p>
-            <a:pPr algn="ctr">
+            <a:pPr>
               <a:lnSpc>
                 <a:spcPct val="100000"/>
               </a:lnSpc>
@@ -14158,7 +14158,7 @@
             </a:endParaRPr>
           </a:p>
           <a:p>
-            <a:pPr algn="ctr">
+            <a:pPr>
               <a:lnSpc>
                 <a:spcPct val="100000"/>
               </a:lnSpc>
@@ -14216,7 +14216,7 @@
         <p:spPr>
           <a:xfrm>
             <a:off x="2578680" y="1774080"/>
-            <a:ext cx="226800" cy="511560"/>
+            <a:ext cx="226440" cy="511560"/>
           </a:xfrm>
           <a:prstGeom prst="rect">
             <a:avLst/>
@@ -14237,7 +14237,7 @@
             <a:spAutoFit/>
           </a:bodyPr>
           <a:p>
-            <a:pPr algn="ctr">
+            <a:pPr>
               <a:lnSpc>
                 <a:spcPct val="100000"/>
               </a:lnSpc>
@@ -14268,647 +14268,7 @@
         <p:spPr>
           <a:xfrm>
             <a:off x="2834640" y="1225440"/>
-            <a:ext cx="2055600" cy="1443960"/>
-          </a:xfrm>
-          <a:prstGeom prst="rect">
-            <a:avLst/>
-          </a:prstGeom>
-          <a:solidFill>
-            <a:srgbClr val="e0f1ec"/>
-          </a:solidFill>
-          <a:ln w="17780">
-            <a:solidFill>
-              <a:srgbClr val="37917e"/>
-            </a:solidFill>
-            <a:round/>
-          </a:ln>
-          <a:effectLst>
-            <a:outerShdw blurRad="39960" dir="5400000" dist="23040" rotWithShape="0">
-              <a:srgbClr val="000000">
-                <a:alpha val="35000"/>
-              </a:srgbClr>
-            </a:outerShdw>
-          </a:effectLst>
-        </p:spPr>
-        <p:style>
-          <a:lnRef idx="1">
-            <a:schemeClr val="accent1"/>
-          </a:lnRef>
-          <a:fillRef idx="3">
-            <a:schemeClr val="accent1"/>
-          </a:fillRef>
-          <a:effectRef idx="2">
-            <a:schemeClr val="accent1"/>
-          </a:effectRef>
-          <a:fontRef idx="minor"/>
-        </p:style>
-        <p:txBody>
-          <a:bodyPr lIns="118800" rIns="118800" tIns="91440" bIns="91440" anchor="ctr">
-            <a:noAutofit/>
-          </a:bodyPr>
-          <a:p>
-            <a:pPr algn="ctr">
-              <a:lnSpc>
-                <a:spcPct val="100000"/>
-              </a:lnSpc>
-              <a:spcAft>
-                <a:spcPts val="201"/>
-              </a:spcAft>
-              <a:buNone/>
-            </a:pPr>
-            <a:r>
-              <a:rPr b="1" lang="en-US" sz="1280" spc="-1" strike="noStrike">
-                <a:solidFill>
-                  <a:srgbClr val="37917e"/>
-                </a:solidFill>
-                <a:latin typeface="Aptos"/>
-                <a:ea typeface="DejaVu Sans"/>
-              </a:rPr>
-              <a:t>Candidate pool</a:t>
-            </a:r>
-            <a:endParaRPr b="0" lang="en-US" sz="1280" spc="-1" strike="noStrike">
-              <a:latin typeface="Arial"/>
-            </a:endParaRPr>
-          </a:p>
-          <a:p>
-            <a:pPr algn="ctr">
-              <a:lnSpc>
-                <a:spcPct val="100000"/>
-              </a:lnSpc>
-              <a:spcAft>
-                <a:spcPts val="201"/>
-              </a:spcAft>
-              <a:buNone/>
-            </a:pPr>
-            <a:r>
-              <a:rPr b="0" lang="en-US" sz="1280" spc="-1" strike="noStrike">
-                <a:solidFill>
-                  <a:srgbClr val="121b2b"/>
-                </a:solidFill>
-                <a:latin typeface="Aptos"/>
-                <a:ea typeface="DejaVu Sans"/>
-              </a:rPr>
-              <a:t>keyframes + short</a:t>
-            </a:r>
-            <a:endParaRPr b="0" lang="en-US" sz="1280" spc="-1" strike="noStrike">
-              <a:latin typeface="Arial"/>
-            </a:endParaRPr>
-          </a:p>
-          <a:p>
-            <a:pPr>
-              <a:lnSpc>
-                <a:spcPct val="100000"/>
-              </a:lnSpc>
-              <a:spcAft>
-                <a:spcPts val="201"/>
-              </a:spcAft>
-              <a:buNone/>
-            </a:pPr>
-            <a:r>
-              <a:rPr b="0" lang="en-US" sz="1280" spc="-1" strike="noStrike">
-                <a:solidFill>
-                  <a:srgbClr val="121b2b"/>
-                </a:solidFill>
-                <a:latin typeface="Aptos"/>
-                <a:ea typeface="DejaVu Sans"/>
-              </a:rPr>
-              <a:t>temporal segments</a:t>
-            </a:r>
-            <a:endParaRPr b="0" lang="en-US" sz="1280" spc="-1" strike="noStrike">
-              <a:latin typeface="Arial"/>
-            </a:endParaRPr>
-          </a:p>
-        </p:txBody>
-      </p:sp>
-      <p:sp>
-        <p:nvSpPr>
-          <p:cNvPr id="82" name="TextBox 7"/>
-          <p:cNvSpPr/>
-          <p:nvPr/>
-        </p:nvSpPr>
-        <p:spPr>
-          <a:xfrm>
-            <a:off x="4910400" y="1774080"/>
-            <a:ext cx="226800" cy="511560"/>
-          </a:xfrm>
-          <a:prstGeom prst="rect">
-            <a:avLst/>
-          </a:prstGeom>
-          <a:noFill/>
-          <a:ln w="0">
-            <a:noFill/>
-          </a:ln>
-        </p:spPr>
-        <p:style>
-          <a:lnRef idx="0"/>
-          <a:fillRef idx="0"/>
-          <a:effectRef idx="0"/>
-          <a:fontRef idx="minor"/>
-        </p:style>
-        <p:txBody>
-          <a:bodyPr lIns="73080" rIns="73080" tIns="73080" bIns="73080" anchor="t">
-            <a:spAutoFit/>
-          </a:bodyPr>
-          <a:p>
-            <a:pPr algn="ctr">
-              <a:lnSpc>
-                <a:spcPct val="100000"/>
-              </a:lnSpc>
-              <a:buNone/>
-            </a:pPr>
-            <a:r>
-              <a:rPr b="1" lang="en-US" sz="2400" spc="-1" strike="noStrike">
-                <a:solidFill>
-                  <a:srgbClr val="546478"/>
-                </a:solidFill>
-                <a:latin typeface="Arial"/>
-                <a:ea typeface="DejaVu Sans"/>
-              </a:rPr>
-              <a:t>&gt;</a:t>
-            </a:r>
-            <a:endParaRPr b="0" lang="en-US" sz="2400" spc="-1" strike="noStrike">
-              <a:latin typeface="Arial"/>
-            </a:endParaRPr>
-          </a:p>
-        </p:txBody>
-      </p:sp>
-      <p:sp>
-        <p:nvSpPr>
-          <p:cNvPr id="83" name="Rectangle 8"/>
-          <p:cNvSpPr/>
-          <p:nvPr/>
-        </p:nvSpPr>
-        <p:spPr>
-          <a:xfrm>
-            <a:off x="5166360" y="1225440"/>
-            <a:ext cx="2055600" cy="1443960"/>
-          </a:xfrm>
-          <a:prstGeom prst="rect">
-            <a:avLst/>
-          </a:prstGeom>
-          <a:solidFill>
-            <a:srgbClr val="fcf5dd"/>
-          </a:solidFill>
-          <a:ln w="17780">
-            <a:solidFill>
-              <a:srgbClr val="b88600"/>
-            </a:solidFill>
-            <a:round/>
-          </a:ln>
-          <a:effectLst>
-            <a:outerShdw blurRad="39960" dir="5400000" dist="23040" rotWithShape="0">
-              <a:srgbClr val="000000">
-                <a:alpha val="35000"/>
-              </a:srgbClr>
-            </a:outerShdw>
-          </a:effectLst>
-        </p:spPr>
-        <p:style>
-          <a:lnRef idx="1">
-            <a:schemeClr val="accent1"/>
-          </a:lnRef>
-          <a:fillRef idx="3">
-            <a:schemeClr val="accent1"/>
-          </a:fillRef>
-          <a:effectRef idx="2">
-            <a:schemeClr val="accent1"/>
-          </a:effectRef>
-          <a:fontRef idx="minor"/>
-        </p:style>
-        <p:txBody>
-          <a:bodyPr lIns="118800" rIns="118800" tIns="91440" bIns="91440" anchor="ctr">
-            <a:noAutofit/>
-          </a:bodyPr>
-          <a:p>
-            <a:pPr algn="ctr">
-              <a:lnSpc>
-                <a:spcPct val="100000"/>
-              </a:lnSpc>
-              <a:spcAft>
-                <a:spcPts val="201"/>
-              </a:spcAft>
-              <a:buNone/>
-            </a:pPr>
-            <a:r>
-              <a:rPr b="1" lang="en-US" sz="1280" spc="-1" strike="noStrike">
-                <a:solidFill>
-                  <a:srgbClr val="b88600"/>
-                </a:solidFill>
-                <a:latin typeface="Aptos"/>
-                <a:ea typeface="DejaVu Sans"/>
-              </a:rPr>
-              <a:t>Evidence router</a:t>
-            </a:r>
-            <a:endParaRPr b="0" lang="en-US" sz="1280" spc="-1" strike="noStrike">
-              <a:latin typeface="Arial"/>
-            </a:endParaRPr>
-          </a:p>
-          <a:p>
-            <a:pPr algn="ctr">
-              <a:lnSpc>
-                <a:spcPct val="100000"/>
-              </a:lnSpc>
-              <a:spcAft>
-                <a:spcPts val="201"/>
-              </a:spcAft>
-              <a:buNone/>
-            </a:pPr>
-            <a:r>
-              <a:rPr b="0" lang="en-US" sz="1280" spc="-1" strike="noStrike">
-                <a:solidFill>
-                  <a:srgbClr val="121b2b"/>
-                </a:solidFill>
-                <a:latin typeface="Aptos"/>
-                <a:ea typeface="DejaVu Sans"/>
-              </a:rPr>
-              <a:t>MLP+NMS selects compact,</a:t>
-            </a:r>
-            <a:endParaRPr b="0" lang="en-US" sz="1280" spc="-1" strike="noStrike">
-              <a:latin typeface="Arial"/>
-            </a:endParaRPr>
-          </a:p>
-          <a:p>
-            <a:pPr>
-              <a:lnSpc>
-                <a:spcPct val="100000"/>
-              </a:lnSpc>
-              <a:spcAft>
-                <a:spcPts val="201"/>
-              </a:spcAft>
-              <a:buNone/>
-            </a:pPr>
-            <a:r>
-              <a:rPr b="0" lang="en-US" sz="1280" spc="-1" strike="noStrike">
-                <a:solidFill>
-                  <a:srgbClr val="121b2b"/>
-                </a:solidFill>
-                <a:latin typeface="Aptos"/>
-                <a:ea typeface="DejaVu Sans"/>
-              </a:rPr>
-              <a:t>diverse evidence</a:t>
-            </a:r>
-            <a:endParaRPr b="0" lang="en-US" sz="1280" spc="-1" strike="noStrike">
-              <a:latin typeface="Arial"/>
-            </a:endParaRPr>
-          </a:p>
-        </p:txBody>
-      </p:sp>
-      <p:sp>
-        <p:nvSpPr>
-          <p:cNvPr id="84" name="TextBox 9"/>
-          <p:cNvSpPr/>
-          <p:nvPr/>
-        </p:nvSpPr>
-        <p:spPr>
-          <a:xfrm>
-            <a:off x="7242120" y="1774080"/>
-            <a:ext cx="226800" cy="511560"/>
-          </a:xfrm>
-          <a:prstGeom prst="rect">
-            <a:avLst/>
-          </a:prstGeom>
-          <a:noFill/>
-          <a:ln w="0">
-            <a:noFill/>
-          </a:ln>
-        </p:spPr>
-        <p:style>
-          <a:lnRef idx="0"/>
-          <a:fillRef idx="0"/>
-          <a:effectRef idx="0"/>
-          <a:fontRef idx="minor"/>
-        </p:style>
-        <p:txBody>
-          <a:bodyPr lIns="73080" rIns="73080" tIns="73080" bIns="73080" anchor="t">
-            <a:spAutoFit/>
-          </a:bodyPr>
-          <a:p>
-            <a:pPr algn="ctr">
-              <a:lnSpc>
-                <a:spcPct val="100000"/>
-              </a:lnSpc>
-              <a:buNone/>
-            </a:pPr>
-            <a:r>
-              <a:rPr b="1" lang="en-US" sz="2400" spc="-1" strike="noStrike">
-                <a:solidFill>
-                  <a:srgbClr val="546478"/>
-                </a:solidFill>
-                <a:latin typeface="Arial"/>
-                <a:ea typeface="DejaVu Sans"/>
-              </a:rPr>
-              <a:t>&gt;</a:t>
-            </a:r>
-            <a:endParaRPr b="0" lang="en-US" sz="2400" spc="-1" strike="noStrike">
-              <a:latin typeface="Arial"/>
-            </a:endParaRPr>
-          </a:p>
-        </p:txBody>
-      </p:sp>
-      <p:sp>
-        <p:nvSpPr>
-          <p:cNvPr id="85" name="Rectangle 10"/>
-          <p:cNvSpPr/>
-          <p:nvPr/>
-        </p:nvSpPr>
-        <p:spPr>
-          <a:xfrm>
-            <a:off x="7498080" y="1225440"/>
-            <a:ext cx="2055600" cy="1443960"/>
-          </a:xfrm>
-          <a:prstGeom prst="rect">
-            <a:avLst/>
-          </a:prstGeom>
-          <a:solidFill>
-            <a:srgbClr val="e2edf9"/>
-          </a:solidFill>
-          <a:ln w="17780">
-            <a:solidFill>
-              <a:srgbClr val="2b5b8b"/>
-            </a:solidFill>
-            <a:round/>
-          </a:ln>
-          <a:effectLst>
-            <a:outerShdw blurRad="39960" dir="5400000" dist="23040" rotWithShape="0">
-              <a:srgbClr val="000000">
-                <a:alpha val="35000"/>
-              </a:srgbClr>
-            </a:outerShdw>
-          </a:effectLst>
-        </p:spPr>
-        <p:style>
-          <a:lnRef idx="1">
-            <a:schemeClr val="accent1"/>
-          </a:lnRef>
-          <a:fillRef idx="3">
-            <a:schemeClr val="accent1"/>
-          </a:fillRef>
-          <a:effectRef idx="2">
-            <a:schemeClr val="accent1"/>
-          </a:effectRef>
-          <a:fontRef idx="minor"/>
-        </p:style>
-        <p:txBody>
-          <a:bodyPr lIns="118800" rIns="118800" tIns="91440" bIns="91440" anchor="ctr">
-            <a:noAutofit/>
-          </a:bodyPr>
-          <a:p>
-            <a:pPr algn="ctr">
-              <a:lnSpc>
-                <a:spcPct val="100000"/>
-              </a:lnSpc>
-              <a:spcAft>
-                <a:spcPts val="201"/>
-              </a:spcAft>
-              <a:buNone/>
-            </a:pPr>
-            <a:r>
-              <a:rPr b="1" lang="en-US" sz="1280" spc="-1" strike="noStrike">
-                <a:solidFill>
-                  <a:srgbClr val="2b5b8b"/>
-                </a:solidFill>
-                <a:latin typeface="Aptos"/>
-                <a:ea typeface="DejaVu Sans"/>
-              </a:rPr>
-              <a:t>Qwen answerer</a:t>
-            </a:r>
-            <a:endParaRPr b="0" lang="en-US" sz="1280" spc="-1" strike="noStrike">
-              <a:latin typeface="Arial"/>
-            </a:endParaRPr>
-          </a:p>
-          <a:p>
-            <a:pPr algn="ctr">
-              <a:lnSpc>
-                <a:spcPct val="100000"/>
-              </a:lnSpc>
-              <a:spcAft>
-                <a:spcPts val="201"/>
-              </a:spcAft>
-              <a:buNone/>
-            </a:pPr>
-            <a:r>
-              <a:rPr b="0" lang="en-US" sz="1280" spc="-1" strike="noStrike">
-                <a:solidFill>
-                  <a:srgbClr val="121b2b"/>
-                </a:solidFill>
-                <a:latin typeface="Aptos"/>
-                <a:ea typeface="DejaVu Sans"/>
-              </a:rPr>
-              <a:t>predicts answer using</a:t>
-            </a:r>
-            <a:endParaRPr b="0" lang="en-US" sz="1280" spc="-1" strike="noStrike">
-              <a:latin typeface="Arial"/>
-            </a:endParaRPr>
-          </a:p>
-          <a:p>
-            <a:pPr>
-              <a:lnSpc>
-                <a:spcPct val="100000"/>
-              </a:lnSpc>
-              <a:spcAft>
-                <a:spcPts val="201"/>
-              </a:spcAft>
-              <a:buNone/>
-            </a:pPr>
-            <a:r>
-              <a:rPr b="0" lang="en-US" sz="1280" spc="-1" strike="noStrike">
-                <a:solidFill>
-                  <a:srgbClr val="121b2b"/>
-                </a:solidFill>
-                <a:latin typeface="Aptos"/>
-                <a:ea typeface="DejaVu Sans"/>
-              </a:rPr>
-              <a:t>selected evidence only</a:t>
-            </a:r>
-            <a:endParaRPr b="0" lang="en-US" sz="1280" spc="-1" strike="noStrike">
-              <a:latin typeface="Arial"/>
-            </a:endParaRPr>
-          </a:p>
-        </p:txBody>
-      </p:sp>
-      <p:sp>
-        <p:nvSpPr>
-          <p:cNvPr id="86" name="TextBox 11"/>
-          <p:cNvSpPr/>
-          <p:nvPr/>
-        </p:nvSpPr>
-        <p:spPr>
-          <a:xfrm>
-            <a:off x="9573840" y="1774080"/>
-            <a:ext cx="226800" cy="511560"/>
-          </a:xfrm>
-          <a:prstGeom prst="rect">
-            <a:avLst/>
-          </a:prstGeom>
-          <a:noFill/>
-          <a:ln w="0">
-            <a:noFill/>
-          </a:ln>
-        </p:spPr>
-        <p:style>
-          <a:lnRef idx="0"/>
-          <a:fillRef idx="0"/>
-          <a:effectRef idx="0"/>
-          <a:fontRef idx="minor"/>
-        </p:style>
-        <p:txBody>
-          <a:bodyPr lIns="73080" rIns="73080" tIns="73080" bIns="73080" anchor="t">
-            <a:spAutoFit/>
-          </a:bodyPr>
-          <a:p>
-            <a:pPr algn="ctr">
-              <a:lnSpc>
-                <a:spcPct val="100000"/>
-              </a:lnSpc>
-              <a:buNone/>
-            </a:pPr>
-            <a:r>
-              <a:rPr b="1" lang="en-US" sz="2400" spc="-1" strike="noStrike">
-                <a:solidFill>
-                  <a:srgbClr val="546478"/>
-                </a:solidFill>
-                <a:latin typeface="Arial"/>
-                <a:ea typeface="DejaVu Sans"/>
-              </a:rPr>
-              <a:t>&gt;</a:t>
-            </a:r>
-            <a:endParaRPr b="0" lang="en-US" sz="2400" spc="-1" strike="noStrike">
-              <a:latin typeface="Arial"/>
-            </a:endParaRPr>
-          </a:p>
-        </p:txBody>
-      </p:sp>
-      <p:sp>
-        <p:nvSpPr>
-          <p:cNvPr id="87" name="Rectangle 12"/>
-          <p:cNvSpPr/>
-          <p:nvPr/>
-        </p:nvSpPr>
-        <p:spPr>
-          <a:xfrm>
-            <a:off x="9829800" y="1225440"/>
-            <a:ext cx="2055600" cy="1443960"/>
-          </a:xfrm>
-          <a:prstGeom prst="rect">
-            <a:avLst/>
-          </a:prstGeom>
-          <a:solidFill>
-            <a:srgbClr val="e0f1ec"/>
-          </a:solidFill>
-          <a:ln w="17780">
-            <a:solidFill>
-              <a:srgbClr val="37917e"/>
-            </a:solidFill>
-            <a:round/>
-          </a:ln>
-          <a:effectLst>
-            <a:outerShdw blurRad="39960" dir="5400000" dist="23040" rotWithShape="0">
-              <a:srgbClr val="000000">
-                <a:alpha val="35000"/>
-              </a:srgbClr>
-            </a:outerShdw>
-          </a:effectLst>
-        </p:spPr>
-        <p:style>
-          <a:lnRef idx="1">
-            <a:schemeClr val="accent1"/>
-          </a:lnRef>
-          <a:fillRef idx="3">
-            <a:schemeClr val="accent1"/>
-          </a:fillRef>
-          <a:effectRef idx="2">
-            <a:schemeClr val="accent1"/>
-          </a:effectRef>
-          <a:fontRef idx="minor"/>
-        </p:style>
-        <p:txBody>
-          <a:bodyPr lIns="118800" rIns="118800" tIns="91440" bIns="91440" anchor="ctr">
-            <a:noAutofit/>
-          </a:bodyPr>
-          <a:p>
-            <a:pPr algn="ctr">
-              <a:lnSpc>
-                <a:spcPct val="100000"/>
-              </a:lnSpc>
-              <a:spcAft>
-                <a:spcPts val="201"/>
-              </a:spcAft>
-              <a:buNone/>
-            </a:pPr>
-            <a:r>
-              <a:rPr b="1" lang="en-US" sz="1280" spc="-1" strike="noStrike">
-                <a:solidFill>
-                  <a:srgbClr val="37917e"/>
-                </a:solidFill>
-                <a:latin typeface="Aptos"/>
-                <a:ea typeface="DejaVu Sans"/>
-              </a:rPr>
-              <a:t>Evaluation</a:t>
-            </a:r>
-            <a:endParaRPr b="0" lang="en-US" sz="1280" spc="-1" strike="noStrike">
-              <a:latin typeface="Arial"/>
-            </a:endParaRPr>
-          </a:p>
-          <a:p>
-            <a:pPr algn="ctr">
-              <a:lnSpc>
-                <a:spcPct val="100000"/>
-              </a:lnSpc>
-              <a:spcAft>
-                <a:spcPts val="201"/>
-              </a:spcAft>
-              <a:buNone/>
-            </a:pPr>
-            <a:r>
-              <a:rPr b="0" lang="en-US" sz="1280" spc="-1" strike="noStrike">
-                <a:solidFill>
-                  <a:srgbClr val="121b2b"/>
-                </a:solidFill>
-                <a:latin typeface="Aptos"/>
-                <a:ea typeface="DejaVu Sans"/>
-              </a:rPr>
-              <a:t>Acc@QA + cost</a:t>
-            </a:r>
-            <a:endParaRPr b="0" lang="en-US" sz="1280" spc="-1" strike="noStrike">
-              <a:latin typeface="Arial"/>
-            </a:endParaRPr>
-          </a:p>
-          <a:p>
-            <a:pPr>
-              <a:lnSpc>
-                <a:spcPct val="100000"/>
-              </a:lnSpc>
-              <a:spcAft>
-                <a:spcPts val="201"/>
-              </a:spcAft>
-              <a:buNone/>
-            </a:pPr>
-            <a:r>
-              <a:rPr b="0" lang="en-US" sz="1280" spc="-1" strike="noStrike">
-                <a:solidFill>
-                  <a:srgbClr val="121b2b"/>
-                </a:solidFill>
-                <a:latin typeface="Aptos"/>
-                <a:ea typeface="DejaVu Sans"/>
-              </a:rPr>
-              <a:t>+ IoP/IoU + Acc@GQA</a:t>
-            </a:r>
-            <a:endParaRPr b="0" lang="en-US" sz="1280" spc="-1" strike="noStrike">
-              <a:latin typeface="Arial"/>
-            </a:endParaRPr>
-          </a:p>
-        </p:txBody>
-      </p:sp>
-      <p:sp>
-        <p:nvSpPr>
-          <p:cNvPr id="88" name="Rectangle 13"/>
-          <p:cNvSpPr/>
-          <p:nvPr/>
-        </p:nvSpPr>
-        <p:spPr>
-          <a:xfrm>
-            <a:off x="731520" y="3456360"/>
-            <a:ext cx="5164560" cy="1572120"/>
+            <a:ext cx="2055240" cy="1443600"/>
           </a:xfrm>
           <a:prstGeom prst="rect">
             <a:avLst/>
@@ -14947,30 +14307,6 @@
             <a:noAutofit/>
           </a:bodyPr>
           <a:p>
-            <a:pPr algn="ctr">
-              <a:lnSpc>
-                <a:spcPct val="100000"/>
-              </a:lnSpc>
-              <a:spcAft>
-                <a:spcPts val="201"/>
-              </a:spcAft>
-              <a:buNone/>
-            </a:pPr>
-            <a:r>
-              <a:rPr b="1" lang="en-US" sz="1380" spc="-1" strike="noStrike">
-                <a:solidFill>
-                  <a:srgbClr val="37917e"/>
-                </a:solidFill>
-                <a:latin typeface="Aptos"/>
-                <a:ea typeface="DejaVu Sans"/>
-              </a:rPr>
-              <a:t>Controlled answerer swap</a:t>
-            </a:r>
-            <a:endParaRPr b="0" lang="en-US" sz="1380" spc="-1" strike="noStrike">
-              <a:latin typeface="Arial"/>
-            </a:endParaRPr>
-          </a:p>
-          <a:p>
             <a:pPr>
               <a:lnSpc>
                 <a:spcPct val="100000"/>
@@ -14981,16 +14317,64 @@
               <a:buNone/>
             </a:pPr>
             <a:r>
-              <a:rPr b="0" lang="en-US" sz="1530" spc="-1" strike="noStrike">
+              <a:rPr b="1" lang="en-US" sz="1280" spc="-1" strike="noStrike">
+                <a:solidFill>
+                  <a:srgbClr val="37917e"/>
+                </a:solidFill>
+                <a:latin typeface="Aptos"/>
+                <a:ea typeface="DejaVu Sans"/>
+              </a:rPr>
+              <a:t>Candidate pool</a:t>
+            </a:r>
+            <a:endParaRPr b="0" lang="en-US" sz="1280" spc="-1" strike="noStrike">
+              <a:latin typeface="Arial"/>
+            </a:endParaRPr>
+          </a:p>
+          <a:p>
+            <a:pPr>
+              <a:lnSpc>
+                <a:spcPct val="100000"/>
+              </a:lnSpc>
+              <a:spcAft>
+                <a:spcPts val="201"/>
+              </a:spcAft>
+              <a:buNone/>
+            </a:pPr>
+            <a:r>
+              <a:rPr b="0" lang="en-US" sz="1280" spc="-1" strike="noStrike">
                 <a:solidFill>
                   <a:srgbClr val="121b2b"/>
                 </a:solidFill>
                 <a:latin typeface="Aptos"/>
                 <a:ea typeface="DejaVu Sans"/>
               </a:rPr>
-              <a:t>Keep selected evidence fixed, then swap only the answerer. This separates routing quality from visual reasoning quality.</a:t>
+              <a:t>keyframes + short</a:t>
             </a:r>
-            <a:endParaRPr b="0" lang="en-US" sz="1530" spc="-1" strike="noStrike">
+            <a:endParaRPr b="0" lang="en-US" sz="1280" spc="-1" strike="noStrike">
+              <a:latin typeface="Arial"/>
+            </a:endParaRPr>
+          </a:p>
+          <a:p>
+            <a:pPr>
+              <a:lnSpc>
+                <a:spcPct val="100000"/>
+              </a:lnSpc>
+              <a:spcAft>
+                <a:spcPts val="201"/>
+              </a:spcAft>
+              <a:buNone/>
+            </a:pPr>
+            <a:r>
+              <a:rPr b="0" lang="en-US" sz="1280" spc="-1" strike="noStrike">
+                <a:solidFill>
+                  <a:srgbClr val="121b2b"/>
+                </a:solidFill>
+                <a:latin typeface="Aptos"/>
+                <a:ea typeface="DejaVu Sans"/>
+              </a:rPr>
+              <a:t>temporal segments</a:t>
+            </a:r>
+            <a:endParaRPr b="0" lang="en-US" sz="1280" spc="-1" strike="noStrike">
               <a:latin typeface="Arial"/>
             </a:endParaRPr>
           </a:p>
@@ -14998,14 +14382,239 @@
       </p:sp>
       <p:sp>
         <p:nvSpPr>
-          <p:cNvPr id="89" name="Rectangle 14"/>
+          <p:cNvPr id="82" name="TextBox 7"/>
           <p:cNvSpPr/>
           <p:nvPr/>
         </p:nvSpPr>
         <p:spPr>
           <a:xfrm>
-            <a:off x="6263640" y="3456360"/>
-            <a:ext cx="5164560" cy="1572120"/>
+            <a:off x="4910400" y="1774080"/>
+            <a:ext cx="226440" cy="511560"/>
+          </a:xfrm>
+          <a:prstGeom prst="rect">
+            <a:avLst/>
+          </a:prstGeom>
+          <a:noFill/>
+          <a:ln w="0">
+            <a:noFill/>
+          </a:ln>
+        </p:spPr>
+        <p:style>
+          <a:lnRef idx="0"/>
+          <a:fillRef idx="0"/>
+          <a:effectRef idx="0"/>
+          <a:fontRef idx="minor"/>
+        </p:style>
+        <p:txBody>
+          <a:bodyPr lIns="73080" rIns="73080" tIns="73080" bIns="73080" anchor="t">
+            <a:spAutoFit/>
+          </a:bodyPr>
+          <a:p>
+            <a:pPr>
+              <a:lnSpc>
+                <a:spcPct val="100000"/>
+              </a:lnSpc>
+              <a:buNone/>
+            </a:pPr>
+            <a:r>
+              <a:rPr b="1" lang="en-US" sz="2400" spc="-1" strike="noStrike">
+                <a:solidFill>
+                  <a:srgbClr val="546478"/>
+                </a:solidFill>
+                <a:latin typeface="Arial"/>
+                <a:ea typeface="DejaVu Sans"/>
+              </a:rPr>
+              <a:t>&gt;</a:t>
+            </a:r>
+            <a:endParaRPr b="0" lang="en-US" sz="2400" spc="-1" strike="noStrike">
+              <a:latin typeface="Arial"/>
+            </a:endParaRPr>
+          </a:p>
+        </p:txBody>
+      </p:sp>
+      <p:sp>
+        <p:nvSpPr>
+          <p:cNvPr id="83" name="Rectangle 8"/>
+          <p:cNvSpPr/>
+          <p:nvPr/>
+        </p:nvSpPr>
+        <p:spPr>
+          <a:xfrm>
+            <a:off x="5166360" y="1225440"/>
+            <a:ext cx="2055240" cy="1443600"/>
+          </a:xfrm>
+          <a:prstGeom prst="rect">
+            <a:avLst/>
+          </a:prstGeom>
+          <a:solidFill>
+            <a:srgbClr val="fcf5dd"/>
+          </a:solidFill>
+          <a:ln w="17780">
+            <a:solidFill>
+              <a:srgbClr val="b88600"/>
+            </a:solidFill>
+            <a:round/>
+          </a:ln>
+          <a:effectLst>
+            <a:outerShdw blurRad="39960" dir="5400000" dist="23040" rotWithShape="0">
+              <a:srgbClr val="000000">
+                <a:alpha val="35000"/>
+              </a:srgbClr>
+            </a:outerShdw>
+          </a:effectLst>
+        </p:spPr>
+        <p:style>
+          <a:lnRef idx="1">
+            <a:schemeClr val="accent1"/>
+          </a:lnRef>
+          <a:fillRef idx="3">
+            <a:schemeClr val="accent1"/>
+          </a:fillRef>
+          <a:effectRef idx="2">
+            <a:schemeClr val="accent1"/>
+          </a:effectRef>
+          <a:fontRef idx="minor"/>
+        </p:style>
+        <p:txBody>
+          <a:bodyPr lIns="164520" rIns="164520" tIns="91440" bIns="91440" anchor="ctr">
+            <a:noAutofit/>
+          </a:bodyPr>
+          <a:p>
+            <a:pPr>
+              <a:lnSpc>
+                <a:spcPct val="100000"/>
+              </a:lnSpc>
+              <a:spcAft>
+                <a:spcPts val="201"/>
+              </a:spcAft>
+              <a:buNone/>
+            </a:pPr>
+            <a:r>
+              <a:rPr b="1" lang="en-US" sz="1280" spc="-1" strike="noStrike">
+                <a:solidFill>
+                  <a:srgbClr val="b88600"/>
+                </a:solidFill>
+                <a:latin typeface="Aptos"/>
+                <a:ea typeface="DejaVu Sans"/>
+              </a:rPr>
+              <a:t>Evidence router</a:t>
+            </a:r>
+            <a:endParaRPr b="0" lang="en-US" sz="1280" spc="-1" strike="noStrike">
+              <a:latin typeface="Arial"/>
+            </a:endParaRPr>
+          </a:p>
+          <a:p>
+            <a:pPr>
+              <a:lnSpc>
+                <a:spcPct val="100000"/>
+              </a:lnSpc>
+              <a:spcAft>
+                <a:spcPts val="201"/>
+              </a:spcAft>
+              <a:buNone/>
+            </a:pPr>
+            <a:r>
+              <a:rPr b="0" lang="en-US" sz="1280" spc="-1" strike="noStrike">
+                <a:solidFill>
+                  <a:srgbClr val="121b2b"/>
+                </a:solidFill>
+                <a:latin typeface="Aptos"/>
+                <a:ea typeface="DejaVu Sans"/>
+              </a:rPr>
+              <a:t>MLP+NMS selects compact,</a:t>
+            </a:r>
+            <a:endParaRPr b="0" lang="en-US" sz="1280" spc="-1" strike="noStrike">
+              <a:latin typeface="Arial"/>
+            </a:endParaRPr>
+          </a:p>
+          <a:p>
+            <a:pPr>
+              <a:lnSpc>
+                <a:spcPct val="100000"/>
+              </a:lnSpc>
+              <a:spcAft>
+                <a:spcPts val="201"/>
+              </a:spcAft>
+              <a:buNone/>
+            </a:pPr>
+            <a:r>
+              <a:rPr b="0" lang="en-US" sz="1280" spc="-1" strike="noStrike">
+                <a:solidFill>
+                  <a:srgbClr val="121b2b"/>
+                </a:solidFill>
+                <a:latin typeface="Aptos"/>
+                <a:ea typeface="DejaVu Sans"/>
+              </a:rPr>
+              <a:t>diverse evidence</a:t>
+            </a:r>
+            <a:endParaRPr b="0" lang="en-US" sz="1280" spc="-1" strike="noStrike">
+              <a:latin typeface="Arial"/>
+            </a:endParaRPr>
+          </a:p>
+        </p:txBody>
+      </p:sp>
+      <p:sp>
+        <p:nvSpPr>
+          <p:cNvPr id="84" name="TextBox 9"/>
+          <p:cNvSpPr/>
+          <p:nvPr/>
+        </p:nvSpPr>
+        <p:spPr>
+          <a:xfrm>
+            <a:off x="7242120" y="1774080"/>
+            <a:ext cx="226440" cy="511560"/>
+          </a:xfrm>
+          <a:prstGeom prst="rect">
+            <a:avLst/>
+          </a:prstGeom>
+          <a:noFill/>
+          <a:ln w="0">
+            <a:noFill/>
+          </a:ln>
+        </p:spPr>
+        <p:style>
+          <a:lnRef idx="0"/>
+          <a:fillRef idx="0"/>
+          <a:effectRef idx="0"/>
+          <a:fontRef idx="minor"/>
+        </p:style>
+        <p:txBody>
+          <a:bodyPr lIns="73080" rIns="73080" tIns="73080" bIns="73080" anchor="t">
+            <a:spAutoFit/>
+          </a:bodyPr>
+          <a:p>
+            <a:pPr>
+              <a:lnSpc>
+                <a:spcPct val="100000"/>
+              </a:lnSpc>
+              <a:buNone/>
+            </a:pPr>
+            <a:r>
+              <a:rPr b="1" lang="en-US" sz="2400" spc="-1" strike="noStrike">
+                <a:solidFill>
+                  <a:srgbClr val="546478"/>
+                </a:solidFill>
+                <a:latin typeface="Arial"/>
+                <a:ea typeface="DejaVu Sans"/>
+              </a:rPr>
+              <a:t>&gt;</a:t>
+            </a:r>
+            <a:endParaRPr b="0" lang="en-US" sz="2400" spc="-1" strike="noStrike">
+              <a:latin typeface="Arial"/>
+            </a:endParaRPr>
+          </a:p>
+        </p:txBody>
+      </p:sp>
+      <p:sp>
+        <p:nvSpPr>
+          <p:cNvPr id="85" name="Rectangle 10"/>
+          <p:cNvSpPr/>
+          <p:nvPr/>
+        </p:nvSpPr>
+        <p:spPr>
+          <a:xfrm>
+            <a:off x="7498080" y="1225440"/>
+            <a:ext cx="2055240" cy="1443600"/>
           </a:xfrm>
           <a:prstGeom prst="rect">
             <a:avLst/>
@@ -15044,7 +14653,398 @@
             <a:noAutofit/>
           </a:bodyPr>
           <a:p>
-            <a:pPr algn="ctr">
+            <a:pPr>
+              <a:lnSpc>
+                <a:spcPct val="100000"/>
+              </a:lnSpc>
+              <a:spcAft>
+                <a:spcPts val="201"/>
+              </a:spcAft>
+              <a:buNone/>
+            </a:pPr>
+            <a:r>
+              <a:rPr b="1" lang="en-US" sz="1280" spc="-1" strike="noStrike">
+                <a:solidFill>
+                  <a:srgbClr val="2b5b8b"/>
+                </a:solidFill>
+                <a:latin typeface="Aptos"/>
+                <a:ea typeface="DejaVu Sans"/>
+              </a:rPr>
+              <a:t>Qwen answerer</a:t>
+            </a:r>
+            <a:endParaRPr b="0" lang="en-US" sz="1280" spc="-1" strike="noStrike">
+              <a:latin typeface="Arial"/>
+            </a:endParaRPr>
+          </a:p>
+          <a:p>
+            <a:pPr>
+              <a:lnSpc>
+                <a:spcPct val="100000"/>
+              </a:lnSpc>
+              <a:spcAft>
+                <a:spcPts val="201"/>
+              </a:spcAft>
+              <a:buNone/>
+            </a:pPr>
+            <a:r>
+              <a:rPr b="0" lang="en-US" sz="1280" spc="-1" strike="noStrike">
+                <a:solidFill>
+                  <a:srgbClr val="121b2b"/>
+                </a:solidFill>
+                <a:latin typeface="Aptos"/>
+                <a:ea typeface="DejaVu Sans"/>
+              </a:rPr>
+              <a:t>predicts answer using</a:t>
+            </a:r>
+            <a:endParaRPr b="0" lang="en-US" sz="1280" spc="-1" strike="noStrike">
+              <a:latin typeface="Arial"/>
+            </a:endParaRPr>
+          </a:p>
+          <a:p>
+            <a:pPr>
+              <a:lnSpc>
+                <a:spcPct val="100000"/>
+              </a:lnSpc>
+              <a:spcAft>
+                <a:spcPts val="201"/>
+              </a:spcAft>
+              <a:buNone/>
+            </a:pPr>
+            <a:r>
+              <a:rPr b="0" lang="en-US" sz="1280" spc="-1" strike="noStrike">
+                <a:solidFill>
+                  <a:srgbClr val="121b2b"/>
+                </a:solidFill>
+                <a:latin typeface="Aptos"/>
+                <a:ea typeface="DejaVu Sans"/>
+              </a:rPr>
+              <a:t>selected evidence only</a:t>
+            </a:r>
+            <a:endParaRPr b="0" lang="en-US" sz="1280" spc="-1" strike="noStrike">
+              <a:latin typeface="Arial"/>
+            </a:endParaRPr>
+          </a:p>
+        </p:txBody>
+      </p:sp>
+      <p:sp>
+        <p:nvSpPr>
+          <p:cNvPr id="86" name="TextBox 11"/>
+          <p:cNvSpPr/>
+          <p:nvPr/>
+        </p:nvSpPr>
+        <p:spPr>
+          <a:xfrm>
+            <a:off x="9573840" y="1774080"/>
+            <a:ext cx="226440" cy="511560"/>
+          </a:xfrm>
+          <a:prstGeom prst="rect">
+            <a:avLst/>
+          </a:prstGeom>
+          <a:noFill/>
+          <a:ln w="0">
+            <a:noFill/>
+          </a:ln>
+        </p:spPr>
+        <p:style>
+          <a:lnRef idx="0"/>
+          <a:fillRef idx="0"/>
+          <a:effectRef idx="0"/>
+          <a:fontRef idx="minor"/>
+        </p:style>
+        <p:txBody>
+          <a:bodyPr lIns="73080" rIns="73080" tIns="73080" bIns="73080" anchor="t">
+            <a:spAutoFit/>
+          </a:bodyPr>
+          <a:p>
+            <a:pPr>
+              <a:lnSpc>
+                <a:spcPct val="100000"/>
+              </a:lnSpc>
+              <a:buNone/>
+            </a:pPr>
+            <a:r>
+              <a:rPr b="1" lang="en-US" sz="2400" spc="-1" strike="noStrike">
+                <a:solidFill>
+                  <a:srgbClr val="546478"/>
+                </a:solidFill>
+                <a:latin typeface="Arial"/>
+                <a:ea typeface="DejaVu Sans"/>
+              </a:rPr>
+              <a:t>&gt;</a:t>
+            </a:r>
+            <a:endParaRPr b="0" lang="en-US" sz="2400" spc="-1" strike="noStrike">
+              <a:latin typeface="Arial"/>
+            </a:endParaRPr>
+          </a:p>
+        </p:txBody>
+      </p:sp>
+      <p:sp>
+        <p:nvSpPr>
+          <p:cNvPr id="87" name="Rectangle 12"/>
+          <p:cNvSpPr/>
+          <p:nvPr/>
+        </p:nvSpPr>
+        <p:spPr>
+          <a:xfrm>
+            <a:off x="9829800" y="1225440"/>
+            <a:ext cx="2055240" cy="1443600"/>
+          </a:xfrm>
+          <a:prstGeom prst="rect">
+            <a:avLst/>
+          </a:prstGeom>
+          <a:solidFill>
+            <a:srgbClr val="e0f1ec"/>
+          </a:solidFill>
+          <a:ln w="17780">
+            <a:solidFill>
+              <a:srgbClr val="37917e"/>
+            </a:solidFill>
+            <a:round/>
+          </a:ln>
+          <a:effectLst>
+            <a:outerShdw blurRad="39960" dir="5400000" dist="23040" rotWithShape="0">
+              <a:srgbClr val="000000">
+                <a:alpha val="35000"/>
+              </a:srgbClr>
+            </a:outerShdw>
+          </a:effectLst>
+        </p:spPr>
+        <p:style>
+          <a:lnRef idx="1">
+            <a:schemeClr val="accent1"/>
+          </a:lnRef>
+          <a:fillRef idx="3">
+            <a:schemeClr val="accent1"/>
+          </a:fillRef>
+          <a:effectRef idx="2">
+            <a:schemeClr val="accent1"/>
+          </a:effectRef>
+          <a:fontRef idx="minor"/>
+        </p:style>
+        <p:txBody>
+          <a:bodyPr lIns="164520" rIns="164520" tIns="91440" bIns="91440" anchor="ctr">
+            <a:noAutofit/>
+          </a:bodyPr>
+          <a:p>
+            <a:pPr>
+              <a:lnSpc>
+                <a:spcPct val="100000"/>
+              </a:lnSpc>
+              <a:spcAft>
+                <a:spcPts val="201"/>
+              </a:spcAft>
+              <a:buNone/>
+            </a:pPr>
+            <a:r>
+              <a:rPr b="1" lang="en-US" sz="1280" spc="-1" strike="noStrike">
+                <a:solidFill>
+                  <a:srgbClr val="37917e"/>
+                </a:solidFill>
+                <a:latin typeface="Aptos"/>
+                <a:ea typeface="DejaVu Sans"/>
+              </a:rPr>
+              <a:t>Evaluation</a:t>
+            </a:r>
+            <a:endParaRPr b="0" lang="en-US" sz="1280" spc="-1" strike="noStrike">
+              <a:latin typeface="Arial"/>
+            </a:endParaRPr>
+          </a:p>
+          <a:p>
+            <a:pPr>
+              <a:lnSpc>
+                <a:spcPct val="100000"/>
+              </a:lnSpc>
+              <a:spcAft>
+                <a:spcPts val="201"/>
+              </a:spcAft>
+              <a:buNone/>
+            </a:pPr>
+            <a:r>
+              <a:rPr b="0" lang="en-US" sz="1280" spc="-1" strike="noStrike">
+                <a:solidFill>
+                  <a:srgbClr val="121b2b"/>
+                </a:solidFill>
+                <a:latin typeface="Aptos"/>
+                <a:ea typeface="DejaVu Sans"/>
+              </a:rPr>
+              <a:t>Acc@QA + cost</a:t>
+            </a:r>
+            <a:endParaRPr b="0" lang="en-US" sz="1280" spc="-1" strike="noStrike">
+              <a:latin typeface="Arial"/>
+            </a:endParaRPr>
+          </a:p>
+          <a:p>
+            <a:pPr>
+              <a:lnSpc>
+                <a:spcPct val="100000"/>
+              </a:lnSpc>
+              <a:spcAft>
+                <a:spcPts val="201"/>
+              </a:spcAft>
+              <a:buNone/>
+            </a:pPr>
+            <a:r>
+              <a:rPr b="0" lang="en-US" sz="1280" spc="-1" strike="noStrike">
+                <a:solidFill>
+                  <a:srgbClr val="121b2b"/>
+                </a:solidFill>
+                <a:latin typeface="Aptos"/>
+                <a:ea typeface="DejaVu Sans"/>
+              </a:rPr>
+              <a:t>+ IoP/IoU + Acc@GQA</a:t>
+            </a:r>
+            <a:endParaRPr b="0" lang="en-US" sz="1280" spc="-1" strike="noStrike">
+              <a:latin typeface="Arial"/>
+            </a:endParaRPr>
+          </a:p>
+        </p:txBody>
+      </p:sp>
+      <p:sp>
+        <p:nvSpPr>
+          <p:cNvPr id="88" name="Rectangle 13"/>
+          <p:cNvSpPr/>
+          <p:nvPr/>
+        </p:nvSpPr>
+        <p:spPr>
+          <a:xfrm>
+            <a:off x="731520" y="3456360"/>
+            <a:ext cx="5164200" cy="1571760"/>
+          </a:xfrm>
+          <a:prstGeom prst="rect">
+            <a:avLst/>
+          </a:prstGeom>
+          <a:solidFill>
+            <a:srgbClr val="e0f1ec"/>
+          </a:solidFill>
+          <a:ln w="17780">
+            <a:solidFill>
+              <a:srgbClr val="37917e"/>
+            </a:solidFill>
+            <a:round/>
+          </a:ln>
+          <a:effectLst>
+            <a:outerShdw blurRad="39960" dir="5400000" dist="23040" rotWithShape="0">
+              <a:srgbClr val="000000">
+                <a:alpha val="35000"/>
+              </a:srgbClr>
+            </a:outerShdw>
+          </a:effectLst>
+        </p:spPr>
+        <p:style>
+          <a:lnRef idx="1">
+            <a:schemeClr val="accent1"/>
+          </a:lnRef>
+          <a:fillRef idx="3">
+            <a:schemeClr val="accent1"/>
+          </a:fillRef>
+          <a:effectRef idx="2">
+            <a:schemeClr val="accent1"/>
+          </a:effectRef>
+          <a:fontRef idx="minor"/>
+        </p:style>
+        <p:txBody>
+          <a:bodyPr lIns="164520" rIns="164520" tIns="91440" bIns="91440" anchor="ctr">
+            <a:noAutofit/>
+          </a:bodyPr>
+          <a:p>
+            <a:pPr>
+              <a:lnSpc>
+                <a:spcPct val="100000"/>
+              </a:lnSpc>
+              <a:spcAft>
+                <a:spcPts val="201"/>
+              </a:spcAft>
+              <a:buNone/>
+            </a:pPr>
+            <a:r>
+              <a:rPr b="1" lang="en-US" sz="1380" spc="-1" strike="noStrike">
+                <a:solidFill>
+                  <a:srgbClr val="37917e"/>
+                </a:solidFill>
+                <a:latin typeface="Aptos"/>
+                <a:ea typeface="DejaVu Sans"/>
+              </a:rPr>
+              <a:t>Controlled answerer swap</a:t>
+            </a:r>
+            <a:endParaRPr b="0" lang="en-US" sz="1380" spc="-1" strike="noStrike">
+              <a:latin typeface="Arial"/>
+            </a:endParaRPr>
+          </a:p>
+          <a:p>
+            <a:pPr>
+              <a:lnSpc>
+                <a:spcPct val="100000"/>
+              </a:lnSpc>
+              <a:spcAft>
+                <a:spcPts val="201"/>
+              </a:spcAft>
+              <a:buNone/>
+            </a:pPr>
+            <a:r>
+              <a:rPr b="0" lang="en-US" sz="1530" spc="-1" strike="noStrike">
+                <a:solidFill>
+                  <a:srgbClr val="121b2b"/>
+                </a:solidFill>
+                <a:latin typeface="Aptos"/>
+                <a:ea typeface="DejaVu Sans"/>
+              </a:rPr>
+              <a:t>Keep selected evidence fixed, then swap only the answerer. This separates routing quality from visual reasoning quality.</a:t>
+            </a:r>
+            <a:endParaRPr b="0" lang="en-US" sz="1530" spc="-1" strike="noStrike">
+              <a:latin typeface="Arial"/>
+            </a:endParaRPr>
+          </a:p>
+        </p:txBody>
+      </p:sp>
+      <p:sp>
+        <p:nvSpPr>
+          <p:cNvPr id="89" name="Rectangle 14"/>
+          <p:cNvSpPr/>
+          <p:nvPr/>
+        </p:nvSpPr>
+        <p:spPr>
+          <a:xfrm>
+            <a:off x="6263640" y="3456360"/>
+            <a:ext cx="5164200" cy="1571760"/>
+          </a:xfrm>
+          <a:prstGeom prst="rect">
+            <a:avLst/>
+          </a:prstGeom>
+          <a:solidFill>
+            <a:srgbClr val="e2edf9"/>
+          </a:solidFill>
+          <a:ln w="17780">
+            <a:solidFill>
+              <a:srgbClr val="2b5b8b"/>
+            </a:solidFill>
+            <a:round/>
+          </a:ln>
+          <a:effectLst>
+            <a:outerShdw blurRad="39960" dir="5400000" dist="23040" rotWithShape="0">
+              <a:srgbClr val="000000">
+                <a:alpha val="35000"/>
+              </a:srgbClr>
+            </a:outerShdw>
+          </a:effectLst>
+        </p:spPr>
+        <p:style>
+          <a:lnRef idx="1">
+            <a:schemeClr val="accent1"/>
+          </a:lnRef>
+          <a:fillRef idx="3">
+            <a:schemeClr val="accent1"/>
+          </a:fillRef>
+          <a:effectRef idx="2">
+            <a:schemeClr val="accent1"/>
+          </a:effectRef>
+          <a:fontRef idx="minor"/>
+        </p:style>
+        <p:txBody>
+          <a:bodyPr lIns="164520" rIns="164520" tIns="91440" bIns="91440" anchor="ctr">
+            <a:noAutofit/>
+          </a:bodyPr>
+          <a:p>
+            <a:pPr>
               <a:lnSpc>
                 <a:spcPct val="100000"/>
               </a:lnSpc>
@@ -15102,7 +15102,7 @@
         <p:spPr>
           <a:xfrm>
             <a:off x="822960" y="5358240"/>
-            <a:ext cx="10422360" cy="380520"/>
+            <a:ext cx="10422000" cy="380520"/>
           </a:xfrm>
           <a:prstGeom prst="rect">
             <a:avLst/>
@@ -15123,7 +15123,7 @@
             <a:spAutoFit/>
           </a:bodyPr>
           <a:p>
-            <a:pPr algn="ctr">
+            <a:pPr>
               <a:lnSpc>
                 <a:spcPct val="100000"/>
               </a:lnSpc>
@@ -15187,7 +15187,7 @@
         <p:spPr>
           <a:xfrm>
             <a:off x="0" y="0"/>
-            <a:ext cx="12189960" cy="565200"/>
+            <a:ext cx="12189600" cy="564840"/>
           </a:xfrm>
           <a:prstGeom prst="rect">
             <a:avLst/>
@@ -15228,7 +15228,7 @@
         <p:spPr>
           <a:xfrm>
             <a:off x="347400" y="73080"/>
-            <a:ext cx="9873720" cy="480960"/>
+            <a:ext cx="9873360" cy="480960"/>
           </a:xfrm>
           <a:prstGeom prst="rect">
             <a:avLst/>
@@ -15280,7 +15280,7 @@
         <p:spPr>
           <a:xfrm>
             <a:off x="10652760" y="82440"/>
-            <a:ext cx="1095480" cy="420120"/>
+            <a:ext cx="1095120" cy="420120"/>
           </a:xfrm>
           <a:prstGeom prst="rect">
             <a:avLst/>
@@ -17453,7 +17453,7 @@
         <p:spPr>
           <a:xfrm>
             <a:off x="685800" y="5559480"/>
-            <a:ext cx="10788120" cy="380520"/>
+            <a:ext cx="10787760" cy="380520"/>
           </a:xfrm>
           <a:prstGeom prst="rect">
             <a:avLst/>
@@ -17474,7 +17474,7 @@
             <a:spAutoFit/>
           </a:bodyPr>
           <a:p>
-            <a:pPr algn="ctr">
+            <a:pPr>
               <a:lnSpc>
                 <a:spcPct val="100000"/>
               </a:lnSpc>
@@ -17538,7 +17538,7 @@
         <p:spPr>
           <a:xfrm>
             <a:off x="0" y="0"/>
-            <a:ext cx="12189960" cy="565200"/>
+            <a:ext cx="12189600" cy="564840"/>
           </a:xfrm>
           <a:prstGeom prst="rect">
             <a:avLst/>
@@ -17579,7 +17579,7 @@
         <p:spPr>
           <a:xfrm>
             <a:off x="347400" y="73080"/>
-            <a:ext cx="9873720" cy="480960"/>
+            <a:ext cx="9873360" cy="480960"/>
           </a:xfrm>
           <a:prstGeom prst="rect">
             <a:avLst/>
@@ -17631,7 +17631,7 @@
         <p:spPr>
           <a:xfrm>
             <a:off x="10652760" y="82440"/>
-            <a:ext cx="1095480" cy="420120"/>
+            <a:ext cx="1095120" cy="420120"/>
           </a:xfrm>
           <a:prstGeom prst="rect">
             <a:avLst/>
@@ -17683,7 +17683,7 @@
         <p:spPr>
           <a:xfrm>
             <a:off x="594360" y="914400"/>
-            <a:ext cx="3335760" cy="1352520"/>
+            <a:ext cx="3335400" cy="1352160"/>
           </a:xfrm>
           <a:prstGeom prst="rect">
             <a:avLst/>
@@ -17718,11 +17718,11 @@
           <a:fontRef idx="minor"/>
         </p:style>
         <p:txBody>
-          <a:bodyPr lIns="137160" rIns="137160" tIns="91440" bIns="91440" anchor="ctr">
+          <a:bodyPr lIns="164520" rIns="164520" tIns="91440" bIns="91440" anchor="ctr">
             <a:noAutofit/>
           </a:bodyPr>
           <a:p>
-            <a:pPr algn="ctr">
+            <a:pPr>
               <a:lnSpc>
                 <a:spcPct val="100000"/>
               </a:lnSpc>
@@ -17746,7 +17746,7 @@
             </a:endParaRPr>
           </a:p>
           <a:p>
-            <a:pPr algn="ctr">
+            <a:pPr>
               <a:lnSpc>
                 <a:spcPct val="100000"/>
               </a:lnSpc>
@@ -17770,7 +17770,7 @@
             </a:endParaRPr>
           </a:p>
           <a:p>
-            <a:pPr algn="ctr">
+            <a:pPr>
               <a:lnSpc>
                 <a:spcPct val="100000"/>
               </a:lnSpc>
@@ -17828,7 +17828,7 @@
         <p:spPr>
           <a:xfrm>
             <a:off x="4434840" y="914400"/>
-            <a:ext cx="3335760" cy="1352520"/>
+            <a:ext cx="3335400" cy="1352160"/>
           </a:xfrm>
           <a:prstGeom prst="rect">
             <a:avLst/>
@@ -17863,11 +17863,11 @@
           <a:fontRef idx="minor"/>
         </p:style>
         <p:txBody>
-          <a:bodyPr lIns="137160" rIns="137160" tIns="91440" bIns="91440" anchor="ctr">
+          <a:bodyPr lIns="164520" rIns="164520" tIns="91440" bIns="91440" anchor="ctr">
             <a:noAutofit/>
           </a:bodyPr>
           <a:p>
-            <a:pPr algn="ctr">
+            <a:pPr>
               <a:lnSpc>
                 <a:spcPct val="100000"/>
               </a:lnSpc>
@@ -17891,7 +17891,7 @@
             </a:endParaRPr>
           </a:p>
           <a:p>
-            <a:pPr algn="ctr">
+            <a:pPr>
               <a:lnSpc>
                 <a:spcPct val="100000"/>
               </a:lnSpc>
@@ -17949,7 +17949,7 @@
         <p:spPr>
           <a:xfrm>
             <a:off x="8275320" y="914400"/>
-            <a:ext cx="3335760" cy="1352520"/>
+            <a:ext cx="3335400" cy="1352160"/>
           </a:xfrm>
           <a:prstGeom prst="rect">
             <a:avLst/>
@@ -17984,11 +17984,11 @@
           <a:fontRef idx="minor"/>
         </p:style>
         <p:txBody>
-          <a:bodyPr lIns="137160" rIns="137160" tIns="91440" bIns="91440" anchor="ctr">
+          <a:bodyPr lIns="164520" rIns="164520" tIns="91440" bIns="91440" anchor="ctr">
             <a:noAutofit/>
           </a:bodyPr>
           <a:p>
-            <a:pPr algn="ctr">
+            <a:pPr>
               <a:lnSpc>
                 <a:spcPct val="100000"/>
               </a:lnSpc>
@@ -18012,7 +18012,7 @@
             </a:endParaRPr>
           </a:p>
           <a:p>
-            <a:pPr algn="ctr">
+            <a:pPr>
               <a:lnSpc>
                 <a:spcPct val="100000"/>
               </a:lnSpc>
@@ -18036,7 +18036,7 @@
             </a:endParaRPr>
           </a:p>
           <a:p>
-            <a:pPr algn="ctr">
+            <a:pPr>
               <a:lnSpc>
                 <a:spcPct val="100000"/>
               </a:lnSpc>
@@ -18752,7 +18752,7 @@
         <p:spPr>
           <a:xfrm>
             <a:off x="914400" y="5413320"/>
-            <a:ext cx="10330920" cy="578520"/>
+            <a:ext cx="10330560" cy="578520"/>
           </a:xfrm>
           <a:prstGeom prst="rect">
             <a:avLst/>
@@ -18769,11 +18769,11 @@
           <a:fontRef idx="minor"/>
         </p:style>
         <p:txBody>
-          <a:bodyPr lIns="182880" rIns="182880" tIns="91440" bIns="91440" anchor="t">
+          <a:bodyPr lIns="164520" rIns="164520" tIns="91440" bIns="91440" anchor="t">
             <a:spAutoFit/>
           </a:bodyPr>
           <a:p>
-            <a:pPr algn="ctr">
+            <a:pPr>
               <a:lnSpc>
                 <a:spcPct val="100000"/>
               </a:lnSpc>
@@ -18837,7 +18837,7 @@
         <p:spPr>
           <a:xfrm>
             <a:off x="0" y="0"/>
-            <a:ext cx="12189960" cy="565200"/>
+            <a:ext cx="12189600" cy="564840"/>
           </a:xfrm>
           <a:prstGeom prst="rect">
             <a:avLst/>
@@ -18878,7 +18878,7 @@
         <p:spPr>
           <a:xfrm>
             <a:off x="347400" y="73080"/>
-            <a:ext cx="9873720" cy="480960"/>
+            <a:ext cx="9873360" cy="480960"/>
           </a:xfrm>
           <a:prstGeom prst="rect">
             <a:avLst/>
@@ -18930,7 +18930,7 @@
         <p:spPr>
           <a:xfrm>
             <a:off x="10652760" y="82440"/>
-            <a:ext cx="1095480" cy="420120"/>
+            <a:ext cx="1095120" cy="420120"/>
           </a:xfrm>
           <a:prstGeom prst="rect">
             <a:avLst/>
@@ -18986,7 +18986,7 @@
         <p:spPr>
           <a:xfrm>
             <a:off x="594360" y="822960"/>
-            <a:ext cx="11016720" cy="3884400"/>
+            <a:ext cx="11016360" cy="3884040"/>
           </a:xfrm>
           <a:prstGeom prst="rect">
             <a:avLst/>
@@ -19005,7 +19005,7 @@
         <p:spPr>
           <a:xfrm>
             <a:off x="594360" y="4617720"/>
-            <a:ext cx="3473280" cy="1535400"/>
+            <a:ext cx="3472920" cy="1535040"/>
           </a:xfrm>
           <a:prstGeom prst="rect">
             <a:avLst/>
@@ -19048,7 +19048,7 @@
         <p:spPr>
           <a:xfrm>
             <a:off x="704160" y="4754880"/>
-            <a:ext cx="3253680" cy="249480"/>
+            <a:ext cx="3253320" cy="249480"/>
           </a:xfrm>
           <a:prstGeom prst="rect">
             <a:avLst/>
@@ -19069,7 +19069,7 @@
             <a:spAutoFit/>
           </a:bodyPr>
           <a:p>
-            <a:pPr algn="ctr">
+            <a:pPr>
               <a:lnSpc>
                 <a:spcPct val="100000"/>
               </a:lnSpc>
@@ -19100,7 +19100,7 @@
         <p:spPr>
           <a:xfrm>
             <a:off x="758880" y="5139000"/>
-            <a:ext cx="3144240" cy="676800"/>
+            <a:ext cx="3143880" cy="786240"/>
           </a:xfrm>
           <a:prstGeom prst="rect">
             <a:avLst/>
@@ -19117,7 +19117,7 @@
           <a:fontRef idx="minor"/>
         </p:style>
         <p:txBody>
-          <a:bodyPr lIns="73080" rIns="73080" tIns="36720" bIns="36720" anchor="t">
+          <a:bodyPr lIns="164520" rIns="164520" tIns="91440" bIns="91440" anchor="t">
             <a:spAutoFit/>
           </a:bodyPr>
           <a:p>
@@ -19155,7 +19155,7 @@
         <p:spPr>
           <a:xfrm>
             <a:off x="4343400" y="4617720"/>
-            <a:ext cx="3473280" cy="1535400"/>
+            <a:ext cx="3472920" cy="1535040"/>
           </a:xfrm>
           <a:prstGeom prst="rect">
             <a:avLst/>
@@ -19198,7 +19198,7 @@
         <p:spPr>
           <a:xfrm>
             <a:off x="4453200" y="4754880"/>
-            <a:ext cx="3253680" cy="249480"/>
+            <a:ext cx="3253320" cy="249480"/>
           </a:xfrm>
           <a:prstGeom prst="rect">
             <a:avLst/>
@@ -19219,7 +19219,7 @@
             <a:spAutoFit/>
           </a:bodyPr>
           <a:p>
-            <a:pPr algn="ctr">
+            <a:pPr>
               <a:lnSpc>
                 <a:spcPct val="100000"/>
               </a:lnSpc>
@@ -19250,7 +19250,7 @@
         <p:spPr>
           <a:xfrm>
             <a:off x="4507920" y="5139000"/>
-            <a:ext cx="3144240" cy="475560"/>
+            <a:ext cx="3143880" cy="585000"/>
           </a:xfrm>
           <a:prstGeom prst="rect">
             <a:avLst/>
@@ -19267,7 +19267,7 @@
           <a:fontRef idx="minor"/>
         </p:style>
         <p:txBody>
-          <a:bodyPr lIns="73080" rIns="73080" tIns="36720" bIns="36720" anchor="t">
+          <a:bodyPr lIns="164520" rIns="164520" tIns="91440" bIns="91440" anchor="t">
             <a:spAutoFit/>
           </a:bodyPr>
           <a:p>
@@ -19305,7 +19305,7 @@
         <p:spPr>
           <a:xfrm>
             <a:off x="8092440" y="4617720"/>
-            <a:ext cx="3473280" cy="1535400"/>
+            <a:ext cx="3472920" cy="1535040"/>
           </a:xfrm>
           <a:prstGeom prst="rect">
             <a:avLst/>
@@ -19348,7 +19348,7 @@
         <p:spPr>
           <a:xfrm>
             <a:off x="8202240" y="4754880"/>
-            <a:ext cx="3253680" cy="249480"/>
+            <a:ext cx="3253320" cy="249480"/>
           </a:xfrm>
           <a:prstGeom prst="rect">
             <a:avLst/>
@@ -19369,7 +19369,7 @@
             <a:spAutoFit/>
           </a:bodyPr>
           <a:p>
-            <a:pPr algn="ctr">
+            <a:pPr>
               <a:lnSpc>
                 <a:spcPct val="100000"/>
               </a:lnSpc>
@@ -19400,7 +19400,7 @@
         <p:spPr>
           <a:xfrm>
             <a:off x="8256960" y="5139000"/>
-            <a:ext cx="3144240" cy="475560"/>
+            <a:ext cx="3143880" cy="585000"/>
           </a:xfrm>
           <a:prstGeom prst="rect">
             <a:avLst/>
@@ -19417,7 +19417,7 @@
           <a:fontRef idx="minor"/>
         </p:style>
         <p:txBody>
-          <a:bodyPr lIns="73080" rIns="73080" tIns="36720" bIns="36720" anchor="t">
+          <a:bodyPr lIns="164520" rIns="164520" tIns="91440" bIns="91440" anchor="t">
             <a:spAutoFit/>
           </a:bodyPr>
           <a:p>
